--- a/docs/presentation.pptx
+++ b/docs/presentation.pptx
@@ -1792,7 +1792,7 @@
                 <a:ea typeface="Calibri" pitchFamily="34" charset="-122"/>
                 <a:cs typeface="Calibri" pitchFamily="34" charset="-120"/>
               </a:rPr>
-              <a:t>A Lightweight Generative AI Agent Framework</a:t>
+              <a:t>A Lightweight WhatsApp-Driven GenAI Agent Framework</a:t>
             </a:r>
             <a:endParaRPr lang="en-US" sz="2200" dirty="0"/>
           </a:p>
@@ -1831,7 +1831,7 @@
                 <a:ea typeface="Calibri" pitchFamily="34" charset="-122"/>
                 <a:cs typeface="Calibri" pitchFamily="34" charset="-120"/>
               </a:rPr>
-              <a:t>Design, Implementation, and Evaluation of an Autonomous Tool-Using Agent</a:t>
+              <a:t>Structured Decision Agent with Local Tool Execution</a:t>
             </a:r>
             <a:endParaRPr lang="en-US" sz="1400" dirty="0"/>
           </a:p>
@@ -2070,7 +2070,7 @@
                 <a:ea typeface="Calibri" pitchFamily="34" charset="-122"/>
                 <a:cs typeface="Calibri" pitchFamily="34" charset="-120"/>
               </a:rPr>
-              <a:t>Lightweight does not mean limited — 2,000 lines covers core agent capabilities with full ReAct loop</a:t>
+              <a:t>~1,800 lines of TypeScript delivers secure WhatsApp AI assistance with free LLM support</a:t>
             </a:r>
             <a:endParaRPr lang="en-US" sz="1500" dirty="0"/>
           </a:p>
@@ -2173,7 +2173,7 @@
                 <a:ea typeface="Calibri" pitchFamily="34" charset="-122"/>
                 <a:cs typeface="Calibri" pitchFamily="34" charset="-120"/>
               </a:rPr>
-              <a:t>Full ReAct loop with 4 tools</a:t>
+              <a:t>Single-decision architecture with AuthZ wall</a:t>
             </a:r>
             <a:endParaRPr lang="en-US" sz="1300" dirty="0"/>
           </a:p>
@@ -2212,7 +2212,7 @@
                 <a:ea typeface="Calibri" pitchFamily="34" charset="-122"/>
                 <a:cs typeface="Calibri" pitchFamily="34" charset="-120"/>
               </a:rPr>
-              <a:t>Real-time web UI with streaming</a:t>
+              <a:t>WhatsApp delivery + cron reminders</a:t>
             </a:r>
             <a:endParaRPr lang="en-US" sz="1300" dirty="0"/>
           </a:p>
@@ -2294,7 +2294,7 @@
                 <a:ea typeface="Calibri" pitchFamily="34" charset="-122"/>
                 <a:cs typeface="Calibri" pitchFamily="34" charset="-120"/>
               </a:rPr>
-              <a:t>Docker sandboxing for tool execution</a:t>
+              <a:t>Multi-platform: Telegram, Signal</a:t>
             </a:r>
             <a:endParaRPr lang="en-US" sz="1300" dirty="0"/>
           </a:p>
@@ -2315,7 +2315,7 @@
                 <a:ea typeface="Calibri" pitchFamily="34" charset="-122"/>
                 <a:cs typeface="Calibri" pitchFamily="34" charset="-120"/>
               </a:rPr>
-              <a:t>Additional tools &amp; Telegram bot</a:t>
+              <a:t>Voice message transcription</a:t>
             </a:r>
             <a:endParaRPr lang="en-US" sz="1300" dirty="0"/>
           </a:p>
@@ -2336,7 +2336,7 @@
                 <a:ea typeface="Calibri" pitchFamily="34" charset="-122"/>
                 <a:cs typeface="Calibri" pitchFamily="34" charset="-120"/>
               </a:rPr>
-              <a:t>Multi-user authentication</a:t>
+              <a:t>Multi-user auth &amp; session isolation</a:t>
             </a:r>
             <a:endParaRPr lang="en-US" sz="1300" dirty="0"/>
           </a:p>
@@ -2354,7 +2354,7 @@
                 <a:ea typeface="Calibri" pitchFamily="34" charset="-122"/>
                 <a:cs typeface="Calibri" pitchFamily="34" charset="-120"/>
               </a:rPr>
-              <a:t>Comprehensive test coverage</a:t>
+              <a:t>Automated memory summarization</a:t>
             </a:r>
             <a:endParaRPr lang="en-US" sz="1300" dirty="0"/>
           </a:p>
@@ -2520,7 +2520,7 @@
                 <a:ea typeface="Georgia" pitchFamily="34" charset="-122"/>
                 <a:cs typeface="Georgia" pitchFamily="34" charset="-120"/>
               </a:rPr>
-              <a:t>Problem &amp; Motivation</a:t>
+              <a:t>Introduction</a:t>
             </a:r>
             <a:endParaRPr lang="en-US" sz="2800" dirty="0"/>
           </a:p>
@@ -2645,7 +2645,7 @@
                 <a:ea typeface="Georgia" pitchFamily="34" charset="-122"/>
                 <a:cs typeface="Georgia" pitchFamily="34" charset="-120"/>
               </a:rPr>
-              <a:t>500K+</a:t>
+              <a:t>2B+</a:t>
             </a:r>
             <a:endParaRPr lang="en-US" sz="4200" dirty="0"/>
           </a:p>
@@ -2684,7 +2684,7 @@
                 <a:ea typeface="Calibri" pitchFamily="34" charset="-122"/>
                 <a:cs typeface="Calibri" pitchFamily="34" charset="-120"/>
               </a:rPr>
-              <a:t>lines of code in OpenClaw</a:t>
+              <a:t>WhatsApp active users worldwide</a:t>
             </a:r>
             <a:endParaRPr lang="en-US" sz="1300" dirty="0"/>
           </a:p>
@@ -2699,7 +2699,7 @@
         <p:spPr>
           <a:xfrm>
             <a:off x="4114800" y="1097280"/>
-            <a:ext cx="4572000" cy="1645920"/>
+            <a:ext cx="4572000" cy="2011680"/>
           </a:xfrm>
           <a:prstGeom prst="rect">
             <a:avLst/>
@@ -2727,7 +2727,7 @@
                 <a:ea typeface="Calibri" pitchFamily="34" charset="-122"/>
                 <a:cs typeface="Calibri" pitchFamily="34" charset="-120"/>
               </a:rPr>
-              <a:t>LLM provider lock-in limits accessibility and increases cost</a:t>
+              <a:t>AI agents are moving from labs to daily life (ReAct paradigm)</a:t>
             </a:r>
             <a:endParaRPr lang="en-US" sz="1400" dirty="0"/>
           </a:p>
@@ -2748,7 +2748,7 @@
                 <a:ea typeface="Calibri" pitchFamily="34" charset="-122"/>
                 <a:cs typeface="Calibri" pitchFamily="34" charset="-120"/>
               </a:rPr>
-              <a:t>Tool execution without safety measures poses security risks</a:t>
+              <a:t>Framework spectrum: OpenClaw (500K LOC) → NanoClaw (3.9K) → LiteClaw (1.8K)</a:t>
             </a:r>
             <a:endParaRPr lang="en-US" sz="1400" dirty="0"/>
           </a:p>
@@ -2769,82 +2769,100 @@
                 <a:ea typeface="Calibri" pitchFamily="34" charset="-122"/>
                 <a:cs typeface="Calibri" pitchFamily="34" charset="-120"/>
               </a:rPr>
-              <a:t>Developers need agent functionality without massive frameworks</a:t>
+              <a:t>No existing framework delivers AI assistance natively via WhatsApp</a:t>
             </a:r>
             <a:endParaRPr lang="en-US" sz="1400" dirty="0"/>
           </a:p>
-        </p:txBody>
-      </p:sp>
-      <p:sp>
-        <p:nvSpPr>
-          <p:cNvPr id="10" name="Shape 8"/>
-          <p:cNvSpPr/>
-          <p:nvPr/>
-        </p:nvSpPr>
-        <p:spPr>
-          <a:xfrm>
-            <a:off x="548640" y="2926080"/>
-            <a:ext cx="8046720" cy="1097280"/>
-          </a:xfrm>
-          <a:prstGeom prst="rect">
-            <a:avLst/>
-          </a:prstGeom>
-          <a:solidFill>
-            <a:srgbClr val="1E2761"/>
-          </a:solidFill>
-          <a:ln/>
-        </p:spPr>
-      </p:sp>
-      <p:sp>
-        <p:nvSpPr>
-          <p:cNvPr id="11" name="Text 9"/>
-          <p:cNvSpPr/>
-          <p:nvPr/>
-        </p:nvSpPr>
-        <p:spPr>
-          <a:xfrm>
-            <a:off x="822960" y="3063240"/>
-            <a:ext cx="7498080" cy="822960"/>
-          </a:xfrm>
-          <a:prstGeom prst="rect">
-            <a:avLst/>
-          </a:prstGeom>
-          <a:noFill/>
-          <a:ln/>
-        </p:spPr>
-        <p:txBody>
-          <a:bodyPr wrap="square" rtlCol="0" anchor="ctr"/>
-          <a:lstStyle/>
-          <a:p>
-            <a:pPr indent="0" marL="0">
-              <a:buNone/>
-            </a:pPr>
-            <a:r>
-              <a:rPr lang="en-US" sz="1400" b="1" dirty="0">
-                <a:solidFill>
-                  <a:srgbClr val="CADCFC"/>
+          <a:p>
+            <a:pPr marL="342900" indent="-342900">
+              <a:buSzPct val="100000"/>
+              <a:buChar char="•"/>
+            </a:pPr>
+            <a:r>
+              <a:rPr lang="en-US" sz="1400" dirty="0">
+                <a:solidFill>
+                  <a:srgbClr val="1E293B"/>
                 </a:solidFill>
                 <a:latin typeface="Calibri" pitchFamily="34" charset="0"/>
                 <a:ea typeface="Calibri" pitchFamily="34" charset="-122"/>
                 <a:cs typeface="Calibri" pitchFamily="34" charset="-120"/>
               </a:rPr>
-              <a:t>Research Question: </a:t>
-            </a:r>
+              <a:t>LiteClaw: ~1,800 lines of TypeScript, single-decision, local-only tools</a:t>
+            </a:r>
+            <a:endParaRPr lang="en-US" sz="1400" dirty="0"/>
+          </a:p>
+        </p:txBody>
+      </p:sp>
+      <p:sp>
+        <p:nvSpPr>
+          <p:cNvPr id="10" name="Shape 8"/>
+          <p:cNvSpPr/>
+          <p:nvPr/>
+        </p:nvSpPr>
+        <p:spPr>
+          <a:xfrm>
+            <a:off x="548640" y="3200400"/>
+            <a:ext cx="8046720" cy="914400"/>
+          </a:xfrm>
+          <a:prstGeom prst="rect">
+            <a:avLst/>
+          </a:prstGeom>
+          <a:solidFill>
+            <a:srgbClr val="F0F4FF"/>
+          </a:solidFill>
+          <a:ln/>
+        </p:spPr>
+      </p:sp>
+      <p:sp>
+        <p:nvSpPr>
+          <p:cNvPr id="11" name="Text 9"/>
+          <p:cNvSpPr/>
+          <p:nvPr/>
+        </p:nvSpPr>
+        <p:spPr>
+          <a:xfrm>
+            <a:off x="822960" y="3246120"/>
+            <a:ext cx="7498080" cy="822960"/>
+          </a:xfrm>
+          <a:prstGeom prst="rect">
+            <a:avLst/>
+          </a:prstGeom>
+          <a:noFill/>
+          <a:ln/>
+        </p:spPr>
+        <p:txBody>
+          <a:bodyPr wrap="square" rtlCol="0" anchor="ctr"/>
+          <a:lstStyle/>
+          <a:p>
             <a:pPr indent="0" marL="0">
               <a:buNone/>
             </a:pPr>
             <a:r>
-              <a:rPr lang="en-US" sz="1400" i="1" dirty="0">
-                <a:solidFill>
-                  <a:srgbClr val="FFFFFF"/>
+              <a:rPr lang="en-US" sz="1300" b="1" dirty="0">
+                <a:solidFill>
+                  <a:srgbClr val="1E2761"/>
                 </a:solidFill>
                 <a:latin typeface="Calibri" pitchFamily="34" charset="0"/>
                 <a:ea typeface="Calibri" pitchFamily="34" charset="-122"/>
                 <a:cs typeface="Calibri" pitchFamily="34" charset="-120"/>
               </a:rPr>
-              <a:t>Can a sub-3,000-line agent framework support autonomous multi-tool reasoning while integrating free LLM APIs?</a:t>
-            </a:r>
-            <a:endParaRPr lang="en-US" sz="1400" dirty="0"/>
+              <a:t>5 Contributions: </a:t>
+            </a:r>
+            <a:pPr indent="0" marL="0">
+              <a:buNone/>
+            </a:pPr>
+            <a:r>
+              <a:rPr lang="en-US" sz="1200" dirty="0">
+                <a:solidFill>
+                  <a:srgbClr val="1E293B"/>
+                </a:solidFill>
+                <a:latin typeface="Calibri" pitchFamily="34" charset="0"/>
+                <a:ea typeface="Calibri" pitchFamily="34" charset="-122"/>
+                <a:cs typeface="Calibri" pitchFamily="34" charset="-120"/>
+              </a:rPr>
+              <a:t>Single-decision JSON architecture | Multi-provider LLM (free) | 4 local tools | AuthZ permission wall | WhatsApp + cron reminders</a:t>
+            </a:r>
+            <a:endParaRPr lang="en-US" sz="1300" dirty="0"/>
           </a:p>
         </p:txBody>
       </p:sp>
@@ -2933,7 +2951,7 @@
                 <a:ea typeface="Georgia" pitchFamily="34" charset="-122"/>
                 <a:cs typeface="Georgia" pitchFamily="34" charset="-120"/>
               </a:rPr>
-              <a:t>What is LiteClaw?</a:t>
+              <a:t>Problem Statement</a:t>
             </a:r>
             <a:endParaRPr lang="en-US" sz="2800" dirty="0"/>
           </a:p>
@@ -3006,37 +3024,10 @@
         </p:nvSpPr>
         <p:spPr>
           <a:xfrm>
-            <a:off x="548640" y="1097280"/>
-            <a:ext cx="2560320" cy="1371600"/>
-          </a:xfrm>
-          <a:prstGeom prst="rect">
-            <a:avLst/>
-          </a:prstGeom>
-          <a:solidFill>
-            <a:srgbClr val="F0F4FF"/>
-          </a:solidFill>
-          <a:ln/>
-          <a:effectLst>
-            <a:outerShdw sx="100000" sy="100000" kx="0" ky="0" algn="bl" rotWithShape="0" blurRad="50800" dist="25400" dir="8100000">
-              <a:srgbClr val="000000">
-                <a:alpha val="12000"/>
-              </a:srgbClr>
-            </a:outerShdw>
-          </a:effectLst>
-        </p:spPr>
-      </p:sp>
-      <p:sp>
-        <p:nvSpPr>
-          <p:cNvPr id="7" name="Shape 5"/>
-          <p:cNvSpPr/>
-          <p:nvPr/>
-        </p:nvSpPr>
-        <p:spPr>
-          <a:xfrm>
-            <a:off x="548640" y="1097280"/>
-            <a:ext cx="54864" cy="1371600"/>
-          </a:xfrm>
-          <a:prstGeom prst="rect">
+            <a:off x="640080" y="1097280"/>
+            <a:ext cx="457200" cy="457200"/>
+          </a:xfrm>
+          <a:prstGeom prst="ellipse">
             <a:avLst/>
           </a:prstGeom>
           <a:solidFill>
@@ -3047,14 +3038,14 @@
       </p:sp>
       <p:sp>
         <p:nvSpPr>
-          <p:cNvPr id="8" name="Text 6"/>
-          <p:cNvSpPr/>
-          <p:nvPr/>
-        </p:nvSpPr>
-        <p:spPr>
-          <a:xfrm>
-            <a:off x="731520" y="1234440"/>
-            <a:ext cx="2194560" cy="457200"/>
+          <p:cNvPr id="7" name="Text 5"/>
+          <p:cNvSpPr/>
+          <p:nvPr/>
+        </p:nvSpPr>
+        <p:spPr>
+          <a:xfrm>
+            <a:off x="640080" y="1097280"/>
+            <a:ext cx="457200" cy="457200"/>
           </a:xfrm>
           <a:prstGeom prst="rect">
             <a:avLst/>
@@ -3066,21 +3057,60 @@
           <a:bodyPr wrap="square" lIns="0" tIns="0" rIns="0" bIns="0" rtlCol="0" anchor="ctr"/>
           <a:lstStyle/>
           <a:p>
-            <a:pPr indent="0" marL="0">
-              <a:buNone/>
-            </a:pPr>
-            <a:r>
-              <a:rPr lang="en-US" sz="1800" b="1" dirty="0">
-                <a:solidFill>
-                  <a:srgbClr val="1E2761"/>
+            <a:pPr algn="ctr" indent="0" marL="0">
+              <a:buNone/>
+            </a:pPr>
+            <a:r>
+              <a:rPr lang="en-US" sz="1600" b="1" dirty="0">
+                <a:solidFill>
+                  <a:srgbClr val="FFFFFF"/>
                 </a:solidFill>
                 <a:latin typeface="Georgia" pitchFamily="34" charset="0"/>
                 <a:ea typeface="Georgia" pitchFamily="34" charset="-122"/>
                 <a:cs typeface="Georgia" pitchFamily="34" charset="-120"/>
               </a:rPr>
-              <a:t>~2,000 Lines</a:t>
-            </a:r>
-            <a:endParaRPr lang="en-US" sz="1800" dirty="0"/>
+              <a:t>1</a:t>
+            </a:r>
+            <a:endParaRPr lang="en-US" sz="1600" dirty="0"/>
+          </a:p>
+        </p:txBody>
+      </p:sp>
+      <p:sp>
+        <p:nvSpPr>
+          <p:cNvPr id="8" name="Text 6"/>
+          <p:cNvSpPr/>
+          <p:nvPr/>
+        </p:nvSpPr>
+        <p:spPr>
+          <a:xfrm>
+            <a:off x="1280160" y="1051560"/>
+            <a:ext cx="1828800" cy="320040"/>
+          </a:xfrm>
+          <a:prstGeom prst="rect">
+            <a:avLst/>
+          </a:prstGeom>
+          <a:noFill/>
+          <a:ln/>
+        </p:spPr>
+        <p:txBody>
+          <a:bodyPr wrap="square" lIns="0" tIns="0" rIns="0" bIns="0" rtlCol="0" anchor="ctr"/>
+          <a:lstStyle/>
+          <a:p>
+            <a:pPr indent="0" marL="0">
+              <a:buNone/>
+            </a:pPr>
+            <a:r>
+              <a:rPr lang="en-US" sz="1500" b="1" dirty="0">
+                <a:solidFill>
+                  <a:srgbClr val="1E2761"/>
+                </a:solidFill>
+                <a:latin typeface="Georgia" pitchFamily="34" charset="0"/>
+                <a:ea typeface="Georgia" pitchFamily="34" charset="-122"/>
+                <a:cs typeface="Georgia" pitchFamily="34" charset="-120"/>
+              </a:rPr>
+              <a:t>Complexity</a:t>
+            </a:r>
+            <a:endParaRPr lang="en-US" sz="1500" dirty="0"/>
           </a:p>
         </p:txBody>
       </p:sp>
@@ -3092,8 +3122,8 @@
         </p:nvSpPr>
         <p:spPr>
           <a:xfrm>
-            <a:off x="731520" y="1737360"/>
-            <a:ext cx="2194560" cy="548640"/>
+            <a:off x="1280160" y="1325880"/>
+            <a:ext cx="6858000" cy="320040"/>
           </a:xfrm>
           <a:prstGeom prst="rect">
             <a:avLst/>
@@ -3117,7 +3147,7 @@
                 <a:ea typeface="Calibri" pitchFamily="34" charset="-122"/>
                 <a:cs typeface="Calibri" pitchFamily="34" charset="-120"/>
               </a:rPr>
-              <a:t>Lightweight TypeScript codebase</a:t>
+              <a:t>OpenClaw: 500K LOC, 70+ deps. Weeks to understand.</a:t>
             </a:r>
             <a:endParaRPr lang="en-US" sz="1200" dirty="0"/>
           </a:p>
@@ -3131,37 +3161,10 @@
         </p:nvSpPr>
         <p:spPr>
           <a:xfrm>
-            <a:off x="3383280" y="1097280"/>
-            <a:ext cx="2560320" cy="1371600"/>
-          </a:xfrm>
-          <a:prstGeom prst="rect">
-            <a:avLst/>
-          </a:prstGeom>
-          <a:solidFill>
-            <a:srgbClr val="F0F4FF"/>
-          </a:solidFill>
-          <a:ln/>
-          <a:effectLst>
-            <a:outerShdw sx="100000" sy="100000" kx="0" ky="0" algn="bl" rotWithShape="0" blurRad="50800" dist="25400" dir="8100000">
-              <a:srgbClr val="000000">
-                <a:alpha val="12000"/>
-              </a:srgbClr>
-            </a:outerShdw>
-          </a:effectLst>
-        </p:spPr>
-      </p:sp>
-      <p:sp>
-        <p:nvSpPr>
-          <p:cNvPr id="11" name="Shape 9"/>
-          <p:cNvSpPr/>
-          <p:nvPr/>
-        </p:nvSpPr>
-        <p:spPr>
-          <a:xfrm>
-            <a:off x="3383280" y="1097280"/>
-            <a:ext cx="54864" cy="1371600"/>
-          </a:xfrm>
-          <a:prstGeom prst="rect">
+            <a:off x="640080" y="1755648"/>
+            <a:ext cx="457200" cy="457200"/>
+          </a:xfrm>
+          <a:prstGeom prst="ellipse">
             <a:avLst/>
           </a:prstGeom>
           <a:solidFill>
@@ -3172,14 +3175,14 @@
       </p:sp>
       <p:sp>
         <p:nvSpPr>
-          <p:cNvPr id="12" name="Text 10"/>
-          <p:cNvSpPr/>
-          <p:nvPr/>
-        </p:nvSpPr>
-        <p:spPr>
-          <a:xfrm>
-            <a:off x="3566160" y="1234440"/>
-            <a:ext cx="2194560" cy="457200"/>
+          <p:cNvPr id="11" name="Text 9"/>
+          <p:cNvSpPr/>
+          <p:nvPr/>
+        </p:nvSpPr>
+        <p:spPr>
+          <a:xfrm>
+            <a:off x="640080" y="1755648"/>
+            <a:ext cx="457200" cy="457200"/>
           </a:xfrm>
           <a:prstGeom prst="rect">
             <a:avLst/>
@@ -3191,21 +3194,60 @@
           <a:bodyPr wrap="square" lIns="0" tIns="0" rIns="0" bIns="0" rtlCol="0" anchor="ctr"/>
           <a:lstStyle/>
           <a:p>
-            <a:pPr indent="0" marL="0">
-              <a:buNone/>
-            </a:pPr>
-            <a:r>
-              <a:rPr lang="en-US" sz="1800" b="1" dirty="0">
-                <a:solidFill>
-                  <a:srgbClr val="1E2761"/>
+            <a:pPr algn="ctr" indent="0" marL="0">
+              <a:buNone/>
+            </a:pPr>
+            <a:r>
+              <a:rPr lang="en-US" sz="1600" b="1" dirty="0">
+                <a:solidFill>
+                  <a:srgbClr val="FFFFFF"/>
                 </a:solidFill>
                 <a:latin typeface="Georgia" pitchFamily="34" charset="0"/>
                 <a:ea typeface="Georgia" pitchFamily="34" charset="-122"/>
                 <a:cs typeface="Georgia" pitchFamily="34" charset="-120"/>
               </a:rPr>
-              <a:t>4 Tools</a:t>
-            </a:r>
-            <a:endParaRPr lang="en-US" sz="1800" dirty="0"/>
+              <a:t>2</a:t>
+            </a:r>
+            <a:endParaRPr lang="en-US" sz="1600" dirty="0"/>
+          </a:p>
+        </p:txBody>
+      </p:sp>
+      <p:sp>
+        <p:nvSpPr>
+          <p:cNvPr id="12" name="Text 10"/>
+          <p:cNvSpPr/>
+          <p:nvPr/>
+        </p:nvSpPr>
+        <p:spPr>
+          <a:xfrm>
+            <a:off x="1280160" y="1709928"/>
+            <a:ext cx="1828800" cy="320040"/>
+          </a:xfrm>
+          <a:prstGeom prst="rect">
+            <a:avLst/>
+          </a:prstGeom>
+          <a:noFill/>
+          <a:ln/>
+        </p:spPr>
+        <p:txBody>
+          <a:bodyPr wrap="square" lIns="0" tIns="0" rIns="0" bIns="0" rtlCol="0" anchor="ctr"/>
+          <a:lstStyle/>
+          <a:p>
+            <a:pPr indent="0" marL="0">
+              <a:buNone/>
+            </a:pPr>
+            <a:r>
+              <a:rPr lang="en-US" sz="1500" b="1" dirty="0">
+                <a:solidFill>
+                  <a:srgbClr val="1E2761"/>
+                </a:solidFill>
+                <a:latin typeface="Georgia" pitchFamily="34" charset="0"/>
+                <a:ea typeface="Georgia" pitchFamily="34" charset="-122"/>
+                <a:cs typeface="Georgia" pitchFamily="34" charset="-120"/>
+              </a:rPr>
+              <a:t>Safety</a:t>
+            </a:r>
+            <a:endParaRPr lang="en-US" sz="1500" dirty="0"/>
           </a:p>
         </p:txBody>
       </p:sp>
@@ -3217,8 +3259,8 @@
         </p:nvSpPr>
         <p:spPr>
           <a:xfrm>
-            <a:off x="3566160" y="1737360"/>
-            <a:ext cx="2194560" cy="548640"/>
+            <a:off x="1280160" y="1984248"/>
+            <a:ext cx="6858000" cy="320040"/>
           </a:xfrm>
           <a:prstGeom prst="rect">
             <a:avLst/>
@@ -3242,7 +3284,7 @@
                 <a:ea typeface="Calibri" pitchFamily="34" charset="-122"/>
                 <a:cs typeface="Calibri" pitchFamily="34" charset="-120"/>
               </a:rPr>
-              <a:t>Shell, File Ops, Web, Memory</a:t>
+              <a:t>Shell/web tools risk destructive ops via hallucination.</a:t>
             </a:r>
             <a:endParaRPr lang="en-US" sz="1200" dirty="0"/>
           </a:p>
@@ -3256,37 +3298,10 @@
         </p:nvSpPr>
         <p:spPr>
           <a:xfrm>
-            <a:off x="6217920" y="1097280"/>
-            <a:ext cx="2560320" cy="1371600"/>
-          </a:xfrm>
-          <a:prstGeom prst="rect">
-            <a:avLst/>
-          </a:prstGeom>
-          <a:solidFill>
-            <a:srgbClr val="F0F4FF"/>
-          </a:solidFill>
-          <a:ln/>
-          <a:effectLst>
-            <a:outerShdw sx="100000" sy="100000" kx="0" ky="0" algn="bl" rotWithShape="0" blurRad="50800" dist="25400" dir="8100000">
-              <a:srgbClr val="000000">
-                <a:alpha val="12000"/>
-              </a:srgbClr>
-            </a:outerShdw>
-          </a:effectLst>
-        </p:spPr>
-      </p:sp>
-      <p:sp>
-        <p:nvSpPr>
-          <p:cNvPr id="15" name="Shape 13"/>
-          <p:cNvSpPr/>
-          <p:nvPr/>
-        </p:nvSpPr>
-        <p:spPr>
-          <a:xfrm>
-            <a:off x="6217920" y="1097280"/>
-            <a:ext cx="54864" cy="1371600"/>
-          </a:xfrm>
-          <a:prstGeom prst="rect">
+            <a:off x="640080" y="2414016"/>
+            <a:ext cx="457200" cy="457200"/>
+          </a:xfrm>
+          <a:prstGeom prst="ellipse">
             <a:avLst/>
           </a:prstGeom>
           <a:solidFill>
@@ -3297,14 +3312,14 @@
       </p:sp>
       <p:sp>
         <p:nvSpPr>
-          <p:cNvPr id="16" name="Text 14"/>
-          <p:cNvSpPr/>
-          <p:nvPr/>
-        </p:nvSpPr>
-        <p:spPr>
-          <a:xfrm>
-            <a:off x="6400800" y="1234440"/>
-            <a:ext cx="2194560" cy="457200"/>
+          <p:cNvPr id="15" name="Text 13"/>
+          <p:cNvSpPr/>
+          <p:nvPr/>
+        </p:nvSpPr>
+        <p:spPr>
+          <a:xfrm>
+            <a:off x="640080" y="2414016"/>
+            <a:ext cx="457200" cy="457200"/>
           </a:xfrm>
           <a:prstGeom prst="rect">
             <a:avLst/>
@@ -3316,21 +3331,60 @@
           <a:bodyPr wrap="square" lIns="0" tIns="0" rIns="0" bIns="0" rtlCol="0" anchor="ctr"/>
           <a:lstStyle/>
           <a:p>
-            <a:pPr indent="0" marL="0">
-              <a:buNone/>
-            </a:pPr>
-            <a:r>
-              <a:rPr lang="en-US" sz="1800" b="1" dirty="0">
-                <a:solidFill>
-                  <a:srgbClr val="1E2761"/>
+            <a:pPr algn="ctr" indent="0" marL="0">
+              <a:buNone/>
+            </a:pPr>
+            <a:r>
+              <a:rPr lang="en-US" sz="1600" b="1" dirty="0">
+                <a:solidFill>
+                  <a:srgbClr val="FFFFFF"/>
                 </a:solidFill>
                 <a:latin typeface="Georgia" pitchFamily="34" charset="0"/>
                 <a:ea typeface="Georgia" pitchFamily="34" charset="-122"/>
                 <a:cs typeface="Georgia" pitchFamily="34" charset="-120"/>
               </a:rPr>
-              <a:t>4 Providers</a:t>
-            </a:r>
-            <a:endParaRPr lang="en-US" sz="1800" dirty="0"/>
+              <a:t>3</a:t>
+            </a:r>
+            <a:endParaRPr lang="en-US" sz="1600" dirty="0"/>
+          </a:p>
+        </p:txBody>
+      </p:sp>
+      <p:sp>
+        <p:nvSpPr>
+          <p:cNvPr id="16" name="Text 14"/>
+          <p:cNvSpPr/>
+          <p:nvPr/>
+        </p:nvSpPr>
+        <p:spPr>
+          <a:xfrm>
+            <a:off x="1280160" y="2368296"/>
+            <a:ext cx="1828800" cy="320040"/>
+          </a:xfrm>
+          <a:prstGeom prst="rect">
+            <a:avLst/>
+          </a:prstGeom>
+          <a:noFill/>
+          <a:ln/>
+        </p:spPr>
+        <p:txBody>
+          <a:bodyPr wrap="square" lIns="0" tIns="0" rIns="0" bIns="0" rtlCol="0" anchor="ctr"/>
+          <a:lstStyle/>
+          <a:p>
+            <a:pPr indent="0" marL="0">
+              <a:buNone/>
+            </a:pPr>
+            <a:r>
+              <a:rPr lang="en-US" sz="1500" b="1" dirty="0">
+                <a:solidFill>
+                  <a:srgbClr val="1E2761"/>
+                </a:solidFill>
+                <a:latin typeface="Georgia" pitchFamily="34" charset="0"/>
+                <a:ea typeface="Georgia" pitchFamily="34" charset="-122"/>
+                <a:cs typeface="Georgia" pitchFamily="34" charset="-120"/>
+              </a:rPr>
+              <a:t>Accessibility</a:t>
+            </a:r>
+            <a:endParaRPr lang="en-US" sz="1500" dirty="0"/>
           </a:p>
         </p:txBody>
       </p:sp>
@@ -3342,8 +3396,8 @@
         </p:nvSpPr>
         <p:spPr>
           <a:xfrm>
-            <a:off x="6400800" y="1737360"/>
-            <a:ext cx="2194560" cy="548640"/>
+            <a:off x="1280160" y="2642616"/>
+            <a:ext cx="6858000" cy="320040"/>
           </a:xfrm>
           <a:prstGeom prst="rect">
             <a:avLst/>
@@ -3367,7 +3421,7 @@
                 <a:ea typeface="Calibri" pitchFamily="34" charset="-122"/>
                 <a:cs typeface="Calibri" pitchFamily="34" charset="-120"/>
               </a:rPr>
-              <a:t>Groq &amp; Gemini free, DeepSeek &amp; Anthropic</a:t>
+              <a:t>Web/CLI agents need a computer. Not mobile-native.</a:t>
             </a:r>
             <a:endParaRPr lang="en-US" sz="1200" dirty="0"/>
           </a:p>
@@ -3381,37 +3435,10 @@
         </p:nvSpPr>
         <p:spPr>
           <a:xfrm>
-            <a:off x="548640" y="2834640"/>
-            <a:ext cx="2560320" cy="1371600"/>
-          </a:xfrm>
-          <a:prstGeom prst="rect">
-            <a:avLst/>
-          </a:prstGeom>
-          <a:solidFill>
-            <a:srgbClr val="F0F4FF"/>
-          </a:solidFill>
-          <a:ln/>
-          <a:effectLst>
-            <a:outerShdw sx="100000" sy="100000" kx="0" ky="0" algn="bl" rotWithShape="0" blurRad="50800" dist="25400" dir="8100000">
-              <a:srgbClr val="000000">
-                <a:alpha val="12000"/>
-              </a:srgbClr>
-            </a:outerShdw>
-          </a:effectLst>
-        </p:spPr>
-      </p:sp>
-      <p:sp>
-        <p:nvSpPr>
-          <p:cNvPr id="19" name="Shape 17"/>
-          <p:cNvSpPr/>
-          <p:nvPr/>
-        </p:nvSpPr>
-        <p:spPr>
-          <a:xfrm>
-            <a:off x="548640" y="2834640"/>
-            <a:ext cx="54864" cy="1371600"/>
-          </a:xfrm>
-          <a:prstGeom prst="rect">
+            <a:off x="640080" y="3072384"/>
+            <a:ext cx="457200" cy="457200"/>
+          </a:xfrm>
+          <a:prstGeom prst="ellipse">
             <a:avLst/>
           </a:prstGeom>
           <a:solidFill>
@@ -3422,14 +3449,14 @@
       </p:sp>
       <p:sp>
         <p:nvSpPr>
-          <p:cNvPr id="20" name="Text 18"/>
-          <p:cNvSpPr/>
-          <p:nvPr/>
-        </p:nvSpPr>
-        <p:spPr>
-          <a:xfrm>
-            <a:off x="731520" y="2971800"/>
-            <a:ext cx="2194560" cy="457200"/>
+          <p:cNvPr id="19" name="Text 17"/>
+          <p:cNvSpPr/>
+          <p:nvPr/>
+        </p:nvSpPr>
+        <p:spPr>
+          <a:xfrm>
+            <a:off x="640080" y="3072384"/>
+            <a:ext cx="457200" cy="457200"/>
           </a:xfrm>
           <a:prstGeom prst="rect">
             <a:avLst/>
@@ -3441,21 +3468,60 @@
           <a:bodyPr wrap="square" lIns="0" tIns="0" rIns="0" bIns="0" rtlCol="0" anchor="ctr"/>
           <a:lstStyle/>
           <a:p>
-            <a:pPr indent="0" marL="0">
-              <a:buNone/>
-            </a:pPr>
-            <a:r>
-              <a:rPr lang="en-US" sz="1800" b="1" dirty="0">
-                <a:solidFill>
-                  <a:srgbClr val="1E2761"/>
+            <a:pPr algn="ctr" indent="0" marL="0">
+              <a:buNone/>
+            </a:pPr>
+            <a:r>
+              <a:rPr lang="en-US" sz="1600" b="1" dirty="0">
+                <a:solidFill>
+                  <a:srgbClr val="FFFFFF"/>
                 </a:solidFill>
                 <a:latin typeface="Georgia" pitchFamily="34" charset="0"/>
                 <a:ea typeface="Georgia" pitchFamily="34" charset="-122"/>
                 <a:cs typeface="Georgia" pitchFamily="34" charset="-120"/>
               </a:rPr>
-              <a:t>Web UI</a:t>
-            </a:r>
-            <a:endParaRPr lang="en-US" sz="1800" dirty="0"/>
+              <a:t>4</a:t>
+            </a:r>
+            <a:endParaRPr lang="en-US" sz="1600" dirty="0"/>
+          </a:p>
+        </p:txBody>
+      </p:sp>
+      <p:sp>
+        <p:nvSpPr>
+          <p:cNvPr id="20" name="Text 18"/>
+          <p:cNvSpPr/>
+          <p:nvPr/>
+        </p:nvSpPr>
+        <p:spPr>
+          <a:xfrm>
+            <a:off x="1280160" y="3026664"/>
+            <a:ext cx="1828800" cy="320040"/>
+          </a:xfrm>
+          <a:prstGeom prst="rect">
+            <a:avLst/>
+          </a:prstGeom>
+          <a:noFill/>
+          <a:ln/>
+        </p:spPr>
+        <p:txBody>
+          <a:bodyPr wrap="square" lIns="0" tIns="0" rIns="0" bIns="0" rtlCol="0" anchor="ctr"/>
+          <a:lstStyle/>
+          <a:p>
+            <a:pPr indent="0" marL="0">
+              <a:buNone/>
+            </a:pPr>
+            <a:r>
+              <a:rPr lang="en-US" sz="1500" b="1" dirty="0">
+                <a:solidFill>
+                  <a:srgbClr val="1E2761"/>
+                </a:solidFill>
+                <a:latin typeface="Georgia" pitchFamily="34" charset="0"/>
+                <a:ea typeface="Georgia" pitchFamily="34" charset="-122"/>
+                <a:cs typeface="Georgia" pitchFamily="34" charset="-120"/>
+              </a:rPr>
+              <a:t>Cost</a:t>
+            </a:r>
+            <a:endParaRPr lang="en-US" sz="1500" dirty="0"/>
           </a:p>
         </p:txBody>
       </p:sp>
@@ -3467,8 +3533,8 @@
         </p:nvSpPr>
         <p:spPr>
           <a:xfrm>
-            <a:off x="731520" y="3474720"/>
-            <a:ext cx="2194560" cy="548640"/>
+            <a:off x="1280160" y="3300984"/>
+            <a:ext cx="6858000" cy="320040"/>
           </a:xfrm>
           <a:prstGeom prst="rect">
             <a:avLst/>
@@ -3492,7 +3558,7 @@
                 <a:ea typeface="Calibri" pitchFamily="34" charset="-122"/>
                 <a:cs typeface="Calibri" pitchFamily="34" charset="-120"/>
               </a:rPr>
-              <a:t>React + WebSocket streaming</a:t>
+              <a:t>Most frameworks require paid APIs (OpenAI/Anthropic).</a:t>
             </a:r>
             <a:endParaRPr lang="en-US" sz="1200" dirty="0"/>
           </a:p>
@@ -3506,245 +3572,68 @@
         </p:nvSpPr>
         <p:spPr>
           <a:xfrm>
-            <a:off x="3383280" y="2834640"/>
-            <a:ext cx="2560320" cy="1371600"/>
+            <a:off x="548640" y="3794760"/>
+            <a:ext cx="8046720" cy="731520"/>
           </a:xfrm>
           <a:prstGeom prst="rect">
             <a:avLst/>
           </a:prstGeom>
           <a:solidFill>
-            <a:srgbClr val="F0F4FF"/>
+            <a:srgbClr val="1E2761"/>
           </a:solidFill>
           <a:ln/>
-          <a:effectLst>
-            <a:outerShdw sx="100000" sy="100000" kx="0" ky="0" algn="bl" rotWithShape="0" blurRad="50800" dist="25400" dir="8100000">
-              <a:srgbClr val="000000">
-                <a:alpha val="12000"/>
-              </a:srgbClr>
-            </a:outerShdw>
-          </a:effectLst>
-        </p:spPr>
-      </p:sp>
-      <p:sp>
-        <p:nvSpPr>
-          <p:cNvPr id="23" name="Shape 21"/>
-          <p:cNvSpPr/>
-          <p:nvPr/>
-        </p:nvSpPr>
-        <p:spPr>
-          <a:xfrm>
-            <a:off x="3383280" y="2834640"/>
-            <a:ext cx="54864" cy="1371600"/>
-          </a:xfrm>
-          <a:prstGeom prst="rect">
-            <a:avLst/>
-          </a:prstGeom>
-          <a:solidFill>
-            <a:srgbClr val="3B82F6"/>
-          </a:solidFill>
-          <a:ln/>
-        </p:spPr>
-      </p:sp>
-      <p:sp>
-        <p:nvSpPr>
-          <p:cNvPr id="24" name="Text 22"/>
-          <p:cNvSpPr/>
-          <p:nvPr/>
-        </p:nvSpPr>
-        <p:spPr>
-          <a:xfrm>
-            <a:off x="3566160" y="2971800"/>
-            <a:ext cx="2194560" cy="457200"/>
-          </a:xfrm>
-          <a:prstGeom prst="rect">
-            <a:avLst/>
-          </a:prstGeom>
-          <a:noFill/>
-          <a:ln/>
-        </p:spPr>
-        <p:txBody>
-          <a:bodyPr wrap="square" lIns="0" tIns="0" rIns="0" bIns="0" rtlCol="0" anchor="ctr"/>
+        </p:spPr>
+      </p:sp>
+      <p:sp>
+        <p:nvSpPr>
+          <p:cNvPr id="23" name="Text 21"/>
+          <p:cNvSpPr/>
+          <p:nvPr/>
+        </p:nvSpPr>
+        <p:spPr>
+          <a:xfrm>
+            <a:off x="822960" y="3840480"/>
+            <a:ext cx="7498080" cy="640080"/>
+          </a:xfrm>
+          <a:prstGeom prst="rect">
+            <a:avLst/>
+          </a:prstGeom>
+          <a:noFill/>
+          <a:ln/>
+        </p:spPr>
+        <p:txBody>
+          <a:bodyPr wrap="square" rtlCol="0" anchor="ctr"/>
           <a:lstStyle/>
           <a:p>
             <a:pPr indent="0" marL="0">
               <a:buNone/>
             </a:pPr>
             <a:r>
-              <a:rPr lang="en-US" sz="1800" b="1" dirty="0">
-                <a:solidFill>
-                  <a:srgbClr val="1E2761"/>
-                </a:solidFill>
-                <a:latin typeface="Georgia" pitchFamily="34" charset="0"/>
-                <a:ea typeface="Georgia" pitchFamily="34" charset="-122"/>
-                <a:cs typeface="Georgia" pitchFamily="34" charset="-120"/>
-              </a:rPr>
-              <a:t>Memory</a:t>
-            </a:r>
-            <a:endParaRPr lang="en-US" sz="1800" dirty="0"/>
-          </a:p>
-        </p:txBody>
-      </p:sp>
-      <p:sp>
-        <p:nvSpPr>
-          <p:cNvPr id="25" name="Text 23"/>
-          <p:cNvSpPr/>
-          <p:nvPr/>
-        </p:nvSpPr>
-        <p:spPr>
-          <a:xfrm>
-            <a:off x="3566160" y="3474720"/>
-            <a:ext cx="2194560" cy="548640"/>
-          </a:xfrm>
-          <a:prstGeom prst="rect">
-            <a:avLst/>
-          </a:prstGeom>
-          <a:noFill/>
-          <a:ln/>
-        </p:spPr>
-        <p:txBody>
-          <a:bodyPr wrap="square" lIns="0" tIns="0" rIns="0" bIns="0" rtlCol="0" anchor="ctr"/>
-          <a:lstStyle/>
-          <a:p>
-            <a:pPr indent="0" marL="0">
-              <a:buNone/>
-            </a:pPr>
-            <a:r>
-              <a:rPr lang="en-US" sz="1200" dirty="0">
-                <a:solidFill>
-                  <a:srgbClr val="64748B"/>
+              <a:rPr lang="en-US" sz="1400" b="1" dirty="0">
+                <a:solidFill>
+                  <a:srgbClr val="CADCFC"/>
                 </a:solidFill>
                 <a:latin typeface="Calibri" pitchFamily="34" charset="0"/>
                 <a:ea typeface="Calibri" pitchFamily="34" charset="-122"/>
                 <a:cs typeface="Calibri" pitchFamily="34" charset="-120"/>
               </a:rPr>
-              <a:t>Persistent markdown-based storage</a:t>
-            </a:r>
-            <a:endParaRPr lang="en-US" sz="1200" dirty="0"/>
-          </a:p>
-        </p:txBody>
-      </p:sp>
-      <p:sp>
-        <p:nvSpPr>
-          <p:cNvPr id="26" name="Shape 24"/>
-          <p:cNvSpPr/>
-          <p:nvPr/>
-        </p:nvSpPr>
-        <p:spPr>
-          <a:xfrm>
-            <a:off x="6217920" y="2834640"/>
-            <a:ext cx="2560320" cy="1371600"/>
-          </a:xfrm>
-          <a:prstGeom prst="rect">
-            <a:avLst/>
-          </a:prstGeom>
-          <a:solidFill>
-            <a:srgbClr val="F0F4FF"/>
-          </a:solidFill>
-          <a:ln/>
-          <a:effectLst>
-            <a:outerShdw sx="100000" sy="100000" kx="0" ky="0" algn="bl" rotWithShape="0" blurRad="50800" dist="25400" dir="8100000">
-              <a:srgbClr val="000000">
-                <a:alpha val="12000"/>
-              </a:srgbClr>
-            </a:outerShdw>
-          </a:effectLst>
-        </p:spPr>
-      </p:sp>
-      <p:sp>
-        <p:nvSpPr>
-          <p:cNvPr id="27" name="Shape 25"/>
-          <p:cNvSpPr/>
-          <p:nvPr/>
-        </p:nvSpPr>
-        <p:spPr>
-          <a:xfrm>
-            <a:off x="6217920" y="2834640"/>
-            <a:ext cx="54864" cy="1371600"/>
-          </a:xfrm>
-          <a:prstGeom prst="rect">
-            <a:avLst/>
-          </a:prstGeom>
-          <a:solidFill>
-            <a:srgbClr val="3B82F6"/>
-          </a:solidFill>
-          <a:ln/>
-        </p:spPr>
-      </p:sp>
-      <p:sp>
-        <p:nvSpPr>
-          <p:cNvPr id="28" name="Text 26"/>
-          <p:cNvSpPr/>
-          <p:nvPr/>
-        </p:nvSpPr>
-        <p:spPr>
-          <a:xfrm>
-            <a:off x="6400800" y="2971800"/>
-            <a:ext cx="2194560" cy="457200"/>
-          </a:xfrm>
-          <a:prstGeom prst="rect">
-            <a:avLst/>
-          </a:prstGeom>
-          <a:noFill/>
-          <a:ln/>
-        </p:spPr>
-        <p:txBody>
-          <a:bodyPr wrap="square" lIns="0" tIns="0" rIns="0" bIns="0" rtlCol="0" anchor="ctr"/>
-          <a:lstStyle/>
-          <a:p>
+              <a:t>Research Question: </a:t>
+            </a:r>
             <a:pPr indent="0" marL="0">
               <a:buNone/>
             </a:pPr>
             <a:r>
-              <a:rPr lang="en-US" sz="1800" b="1" dirty="0">
-                <a:solidFill>
-                  <a:srgbClr val="1E2761"/>
-                </a:solidFill>
-                <a:latin typeface="Georgia" pitchFamily="34" charset="0"/>
-                <a:ea typeface="Georgia" pitchFamily="34" charset="-122"/>
-                <a:cs typeface="Georgia" pitchFamily="34" charset="-120"/>
-              </a:rPr>
-              <a:t>Skills</a:t>
-            </a:r>
-            <a:endParaRPr lang="en-US" sz="1800" dirty="0"/>
-          </a:p>
-        </p:txBody>
-      </p:sp>
-      <p:sp>
-        <p:nvSpPr>
-          <p:cNvPr id="29" name="Text 27"/>
-          <p:cNvSpPr/>
-          <p:nvPr/>
-        </p:nvSpPr>
-        <p:spPr>
-          <a:xfrm>
-            <a:off x="6400800" y="3474720"/>
-            <a:ext cx="2194560" cy="548640"/>
-          </a:xfrm>
-          <a:prstGeom prst="rect">
-            <a:avLst/>
-          </a:prstGeom>
-          <a:noFill/>
-          <a:ln/>
-        </p:spPr>
-        <p:txBody>
-          <a:bodyPr wrap="square" lIns="0" tIns="0" rIns="0" bIns="0" rtlCol="0" anchor="ctr"/>
-          <a:lstStyle/>
-          <a:p>
-            <a:pPr indent="0" marL="0">
-              <a:buNone/>
-            </a:pPr>
-            <a:r>
-              <a:rPr lang="en-US" sz="1200" dirty="0">
-                <a:solidFill>
-                  <a:srgbClr val="64748B"/>
+              <a:rPr lang="en-US" sz="1400" i="1" dirty="0">
+                <a:solidFill>
+                  <a:srgbClr val="FFFFFF"/>
                 </a:solidFill>
                 <a:latin typeface="Calibri" pitchFamily="34" charset="0"/>
                 <a:ea typeface="Calibri" pitchFamily="34" charset="-122"/>
                 <a:cs typeface="Calibri" pitchFamily="34" charset="-120"/>
               </a:rPr>
-              <a:t>Extensible via markdown, no code</a:t>
-            </a:r>
-            <a:endParaRPr lang="en-US" sz="1200" dirty="0"/>
+              <a:t>Can a sub-2,000-line agent framework deliver secure, WhatsApp-native personal AI assistance with free LLM support?</a:t>
+            </a:r>
+            <a:endParaRPr lang="en-US" sz="1400" dirty="0"/>
           </a:p>
         </p:txBody>
       </p:sp>
@@ -3833,7 +3722,7 @@
                 <a:ea typeface="Georgia" pitchFamily="34" charset="-122"/>
                 <a:cs typeface="Georgia" pitchFamily="34" charset="-120"/>
               </a:rPr>
-              <a:t>Architecture Overview</a:t>
+              <a:t>Proposed Agent: Overview</a:t>
             </a:r>
             <a:endParaRPr lang="en-US" sz="2800" dirty="0"/>
           </a:p>
@@ -3906,21 +3795,16 @@
         </p:nvSpPr>
         <p:spPr>
           <a:xfrm>
-            <a:off x="640080" y="1188720"/>
-            <a:ext cx="2377440" cy="1188720"/>
+            <a:off x="548640" y="1097280"/>
+            <a:ext cx="2560320" cy="1371600"/>
           </a:xfrm>
           <a:prstGeom prst="rect">
             <a:avLst/>
           </a:prstGeom>
           <a:solidFill>
-            <a:srgbClr val="FFFFFF"/>
+            <a:srgbClr val="F0F4FF"/>
           </a:solidFill>
-          <a:ln w="19050">
-            <a:solidFill>
-              <a:srgbClr val="3B82F6"/>
-            </a:solidFill>
-            <a:prstDash val="solid"/>
-          </a:ln>
+          <a:ln/>
           <a:effectLst>
             <a:outerShdw sx="100000" sy="100000" kx="0" ky="0" algn="bl" rotWithShape="0" blurRad="50800" dist="25400" dir="8100000">
               <a:srgbClr val="000000">
@@ -3932,14 +3816,34 @@
       </p:sp>
       <p:sp>
         <p:nvSpPr>
-          <p:cNvPr id="7" name="Text 5"/>
-          <p:cNvSpPr/>
-          <p:nvPr/>
-        </p:nvSpPr>
-        <p:spPr>
-          <a:xfrm>
-            <a:off x="640080" y="1325880"/>
-            <a:ext cx="2377440" cy="457200"/>
+          <p:cNvPr id="7" name="Shape 5"/>
+          <p:cNvSpPr/>
+          <p:nvPr/>
+        </p:nvSpPr>
+        <p:spPr>
+          <a:xfrm>
+            <a:off x="548640" y="1097280"/>
+            <a:ext cx="54864" cy="1371600"/>
+          </a:xfrm>
+          <a:prstGeom prst="rect">
+            <a:avLst/>
+          </a:prstGeom>
+          <a:solidFill>
+            <a:srgbClr val="3B82F6"/>
+          </a:solidFill>
+          <a:ln/>
+        </p:spPr>
+      </p:sp>
+      <p:sp>
+        <p:nvSpPr>
+          <p:cNvPr id="8" name="Text 6"/>
+          <p:cNvSpPr/>
+          <p:nvPr/>
+        </p:nvSpPr>
+        <p:spPr>
+          <a:xfrm>
+            <a:off x="731520" y="1234440"/>
+            <a:ext cx="2194560" cy="457200"/>
           </a:xfrm>
           <a:prstGeom prst="rect">
             <a:avLst/>
@@ -3951,11 +3855,11 @@
           <a:bodyPr wrap="square" lIns="0" tIns="0" rIns="0" bIns="0" rtlCol="0" anchor="ctr"/>
           <a:lstStyle/>
           <a:p>
-            <a:pPr algn="ctr" indent="0" marL="0">
-              <a:buNone/>
-            </a:pPr>
-            <a:r>
-              <a:rPr lang="en-US" sz="1500" b="1" dirty="0">
+            <a:pPr indent="0" marL="0">
+              <a:buNone/>
+            </a:pPr>
+            <a:r>
+              <a:rPr lang="en-US" sz="1800" b="1" dirty="0">
                 <a:solidFill>
                   <a:srgbClr val="1E2761"/>
                 </a:solidFill>
@@ -3963,22 +3867,22 @@
                 <a:ea typeface="Georgia" pitchFamily="34" charset="-122"/>
                 <a:cs typeface="Georgia" pitchFamily="34" charset="-120"/>
               </a:rPr>
-              <a:t>Agent Loop</a:t>
-            </a:r>
-            <a:endParaRPr lang="en-US" sz="1500" dirty="0"/>
-          </a:p>
-        </p:txBody>
-      </p:sp>
-      <p:sp>
-        <p:nvSpPr>
-          <p:cNvPr id="8" name="Text 6"/>
-          <p:cNvSpPr/>
-          <p:nvPr/>
-        </p:nvSpPr>
-        <p:spPr>
-          <a:xfrm>
-            <a:off x="640080" y="1783080"/>
-            <a:ext cx="2377440" cy="365760"/>
+              <a:t>~1,800 Lines</a:t>
+            </a:r>
+            <a:endParaRPr lang="en-US" sz="1800" dirty="0"/>
+          </a:p>
+        </p:txBody>
+      </p:sp>
+      <p:sp>
+        <p:nvSpPr>
+          <p:cNvPr id="9" name="Text 7"/>
+          <p:cNvSpPr/>
+          <p:nvPr/>
+        </p:nvSpPr>
+        <p:spPr>
+          <a:xfrm>
+            <a:off x="731520" y="1737360"/>
+            <a:ext cx="2194560" cy="548640"/>
           </a:xfrm>
           <a:prstGeom prst="rect">
             <a:avLst/>
@@ -3990,11 +3894,11 @@
           <a:bodyPr wrap="square" lIns="0" tIns="0" rIns="0" bIns="0" rtlCol="0" anchor="ctr"/>
           <a:lstStyle/>
           <a:p>
-            <a:pPr algn="ctr" indent="0" marL="0">
-              <a:buNone/>
-            </a:pPr>
-            <a:r>
-              <a:rPr lang="en-US" sz="1100" dirty="0">
+            <a:pPr indent="0" marL="0">
+              <a:buNone/>
+            </a:pPr>
+            <a:r>
+              <a:rPr lang="en-US" sz="1200" dirty="0">
                 <a:solidFill>
                   <a:srgbClr val="64748B"/>
                 </a:solidFill>
@@ -4002,35 +3906,30 @@
                 <a:ea typeface="Calibri" pitchFamily="34" charset="-122"/>
                 <a:cs typeface="Calibri" pitchFamily="34" charset="-120"/>
               </a:rPr>
-              <a:t>ReAct reasoning engine</a:t>
-            </a:r>
-            <a:endParaRPr lang="en-US" sz="1100" dirty="0"/>
-          </a:p>
-        </p:txBody>
-      </p:sp>
-      <p:sp>
-        <p:nvSpPr>
-          <p:cNvPr id="9" name="Shape 7"/>
-          <p:cNvSpPr/>
-          <p:nvPr/>
-        </p:nvSpPr>
-        <p:spPr>
-          <a:xfrm>
-            <a:off x="3291840" y="1188720"/>
-            <a:ext cx="2377440" cy="1188720"/>
+              <a:t>Lightweight TypeScript codebase, 20 source files</a:t>
+            </a:r>
+            <a:endParaRPr lang="en-US" sz="1200" dirty="0"/>
+          </a:p>
+        </p:txBody>
+      </p:sp>
+      <p:sp>
+        <p:nvSpPr>
+          <p:cNvPr id="10" name="Shape 8"/>
+          <p:cNvSpPr/>
+          <p:nvPr/>
+        </p:nvSpPr>
+        <p:spPr>
+          <a:xfrm>
+            <a:off x="3383280" y="1097280"/>
+            <a:ext cx="2560320" cy="1371600"/>
           </a:xfrm>
           <a:prstGeom prst="rect">
             <a:avLst/>
           </a:prstGeom>
           <a:solidFill>
-            <a:srgbClr val="FFFFFF"/>
+            <a:srgbClr val="F0F4FF"/>
           </a:solidFill>
-          <a:ln w="19050">
-            <a:solidFill>
-              <a:srgbClr val="3B82F6"/>
-            </a:solidFill>
-            <a:prstDash val="solid"/>
-          </a:ln>
+          <a:ln/>
           <a:effectLst>
             <a:outerShdw sx="100000" sy="100000" kx="0" ky="0" algn="bl" rotWithShape="0" blurRad="50800" dist="25400" dir="8100000">
               <a:srgbClr val="000000">
@@ -4042,14 +3941,34 @@
       </p:sp>
       <p:sp>
         <p:nvSpPr>
-          <p:cNvPr id="10" name="Text 8"/>
-          <p:cNvSpPr/>
-          <p:nvPr/>
-        </p:nvSpPr>
-        <p:spPr>
-          <a:xfrm>
-            <a:off x="3291840" y="1325880"/>
-            <a:ext cx="2377440" cy="457200"/>
+          <p:cNvPr id="11" name="Shape 9"/>
+          <p:cNvSpPr/>
+          <p:nvPr/>
+        </p:nvSpPr>
+        <p:spPr>
+          <a:xfrm>
+            <a:off x="3383280" y="1097280"/>
+            <a:ext cx="54864" cy="1371600"/>
+          </a:xfrm>
+          <a:prstGeom prst="rect">
+            <a:avLst/>
+          </a:prstGeom>
+          <a:solidFill>
+            <a:srgbClr val="3B82F6"/>
+          </a:solidFill>
+          <a:ln/>
+        </p:spPr>
+      </p:sp>
+      <p:sp>
+        <p:nvSpPr>
+          <p:cNvPr id="12" name="Text 10"/>
+          <p:cNvSpPr/>
+          <p:nvPr/>
+        </p:nvSpPr>
+        <p:spPr>
+          <a:xfrm>
+            <a:off x="3566160" y="1234440"/>
+            <a:ext cx="2194560" cy="457200"/>
           </a:xfrm>
           <a:prstGeom prst="rect">
             <a:avLst/>
@@ -4061,11 +3980,11 @@
           <a:bodyPr wrap="square" lIns="0" tIns="0" rIns="0" bIns="0" rtlCol="0" anchor="ctr"/>
           <a:lstStyle/>
           <a:p>
-            <a:pPr algn="ctr" indent="0" marL="0">
-              <a:buNone/>
-            </a:pPr>
-            <a:r>
-              <a:rPr lang="en-US" sz="1500" b="1" dirty="0">
+            <a:pPr indent="0" marL="0">
+              <a:buNone/>
+            </a:pPr>
+            <a:r>
+              <a:rPr lang="en-US" sz="1800" b="1" dirty="0">
                 <a:solidFill>
                   <a:srgbClr val="1E2761"/>
                 </a:solidFill>
@@ -4073,22 +3992,22 @@
                 <a:ea typeface="Georgia" pitchFamily="34" charset="-122"/>
                 <a:cs typeface="Georgia" pitchFamily="34" charset="-120"/>
               </a:rPr>
-              <a:t>LLM Client</a:t>
-            </a:r>
-            <a:endParaRPr lang="en-US" sz="1500" dirty="0"/>
-          </a:p>
-        </p:txBody>
-      </p:sp>
-      <p:sp>
-        <p:nvSpPr>
-          <p:cNvPr id="11" name="Text 9"/>
-          <p:cNvSpPr/>
-          <p:nvPr/>
-        </p:nvSpPr>
-        <p:spPr>
-          <a:xfrm>
-            <a:off x="3291840" y="1783080"/>
-            <a:ext cx="2377440" cy="365760"/>
+              <a:t>4 Tools</a:t>
+            </a:r>
+            <a:endParaRPr lang="en-US" sz="1800" dirty="0"/>
+          </a:p>
+        </p:txBody>
+      </p:sp>
+      <p:sp>
+        <p:nvSpPr>
+          <p:cNvPr id="13" name="Text 11"/>
+          <p:cNvSpPr/>
+          <p:nvPr/>
+        </p:nvSpPr>
+        <p:spPr>
+          <a:xfrm>
+            <a:off x="3566160" y="1737360"/>
+            <a:ext cx="2194560" cy="548640"/>
           </a:xfrm>
           <a:prstGeom prst="rect">
             <a:avLst/>
@@ -4100,11 +4019,11 @@
           <a:bodyPr wrap="square" lIns="0" tIns="0" rIns="0" bIns="0" rtlCol="0" anchor="ctr"/>
           <a:lstStyle/>
           <a:p>
-            <a:pPr algn="ctr" indent="0" marL="0">
-              <a:buNone/>
-            </a:pPr>
-            <a:r>
-              <a:rPr lang="en-US" sz="1100" dirty="0">
+            <a:pPr indent="0" marL="0">
+              <a:buNone/>
+            </a:pPr>
+            <a:r>
+              <a:rPr lang="en-US" sz="1200" dirty="0">
                 <a:solidFill>
                   <a:srgbClr val="64748B"/>
                 </a:solidFill>
@@ -4112,35 +4031,30 @@
                 <a:ea typeface="Calibri" pitchFamily="34" charset="-122"/>
                 <a:cs typeface="Calibri" pitchFamily="34" charset="-120"/>
               </a:rPr>
-              <a:t>Multi-provider adapter</a:t>
-            </a:r>
-            <a:endParaRPr lang="en-US" sz="1100" dirty="0"/>
-          </a:p>
-        </p:txBody>
-      </p:sp>
-      <p:sp>
-        <p:nvSpPr>
-          <p:cNvPr id="12" name="Shape 10"/>
-          <p:cNvSpPr/>
-          <p:nvPr/>
-        </p:nvSpPr>
-        <p:spPr>
-          <a:xfrm>
-            <a:off x="5943600" y="1188720"/>
-            <a:ext cx="2377440" cy="1188720"/>
+              <a:t>File Ops, Todo, Notes, Time — all local-only</a:t>
+            </a:r>
+            <a:endParaRPr lang="en-US" sz="1200" dirty="0"/>
+          </a:p>
+        </p:txBody>
+      </p:sp>
+      <p:sp>
+        <p:nvSpPr>
+          <p:cNvPr id="14" name="Shape 12"/>
+          <p:cNvSpPr/>
+          <p:nvPr/>
+        </p:nvSpPr>
+        <p:spPr>
+          <a:xfrm>
+            <a:off x="6217920" y="1097280"/>
+            <a:ext cx="2560320" cy="1371600"/>
           </a:xfrm>
           <a:prstGeom prst="rect">
             <a:avLst/>
           </a:prstGeom>
           <a:solidFill>
-            <a:srgbClr val="FFFFFF"/>
+            <a:srgbClr val="F0F4FF"/>
           </a:solidFill>
-          <a:ln w="19050">
-            <a:solidFill>
-              <a:srgbClr val="3B82F6"/>
-            </a:solidFill>
-            <a:prstDash val="solid"/>
-          </a:ln>
+          <a:ln/>
           <a:effectLst>
             <a:outerShdw sx="100000" sy="100000" kx="0" ky="0" algn="bl" rotWithShape="0" blurRad="50800" dist="25400" dir="8100000">
               <a:srgbClr val="000000">
@@ -4152,14 +4066,34 @@
       </p:sp>
       <p:sp>
         <p:nvSpPr>
-          <p:cNvPr id="13" name="Text 11"/>
-          <p:cNvSpPr/>
-          <p:nvPr/>
-        </p:nvSpPr>
-        <p:spPr>
-          <a:xfrm>
-            <a:off x="5943600" y="1325880"/>
-            <a:ext cx="2377440" cy="457200"/>
+          <p:cNvPr id="15" name="Shape 13"/>
+          <p:cNvSpPr/>
+          <p:nvPr/>
+        </p:nvSpPr>
+        <p:spPr>
+          <a:xfrm>
+            <a:off x="6217920" y="1097280"/>
+            <a:ext cx="54864" cy="1371600"/>
+          </a:xfrm>
+          <a:prstGeom prst="rect">
+            <a:avLst/>
+          </a:prstGeom>
+          <a:solidFill>
+            <a:srgbClr val="3B82F6"/>
+          </a:solidFill>
+          <a:ln/>
+        </p:spPr>
+      </p:sp>
+      <p:sp>
+        <p:nvSpPr>
+          <p:cNvPr id="16" name="Text 14"/>
+          <p:cNvSpPr/>
+          <p:nvPr/>
+        </p:nvSpPr>
+        <p:spPr>
+          <a:xfrm>
+            <a:off x="6400800" y="1234440"/>
+            <a:ext cx="2194560" cy="457200"/>
           </a:xfrm>
           <a:prstGeom prst="rect">
             <a:avLst/>
@@ -4171,11 +4105,11 @@
           <a:bodyPr wrap="square" lIns="0" tIns="0" rIns="0" bIns="0" rtlCol="0" anchor="ctr"/>
           <a:lstStyle/>
           <a:p>
-            <a:pPr algn="ctr" indent="0" marL="0">
-              <a:buNone/>
-            </a:pPr>
-            <a:r>
-              <a:rPr lang="en-US" sz="1500" b="1" dirty="0">
+            <a:pPr indent="0" marL="0">
+              <a:buNone/>
+            </a:pPr>
+            <a:r>
+              <a:rPr lang="en-US" sz="1800" b="1" dirty="0">
                 <a:solidFill>
                   <a:srgbClr val="1E2761"/>
                 </a:solidFill>
@@ -4183,22 +4117,22 @@
                 <a:ea typeface="Georgia" pitchFamily="34" charset="-122"/>
                 <a:cs typeface="Georgia" pitchFamily="34" charset="-120"/>
               </a:rPr>
-              <a:t>Tool Registry</a:t>
-            </a:r>
-            <a:endParaRPr lang="en-US" sz="1500" dirty="0"/>
-          </a:p>
-        </p:txBody>
-      </p:sp>
-      <p:sp>
-        <p:nvSpPr>
-          <p:cNvPr id="14" name="Text 12"/>
-          <p:cNvSpPr/>
-          <p:nvPr/>
-        </p:nvSpPr>
-        <p:spPr>
-          <a:xfrm>
-            <a:off x="5943600" y="1783080"/>
-            <a:ext cx="2377440" cy="365760"/>
+              <a:t>3 Providers</a:t>
+            </a:r>
+            <a:endParaRPr lang="en-US" sz="1800" dirty="0"/>
+          </a:p>
+        </p:txBody>
+      </p:sp>
+      <p:sp>
+        <p:nvSpPr>
+          <p:cNvPr id="17" name="Text 15"/>
+          <p:cNvSpPr/>
+          <p:nvPr/>
+        </p:nvSpPr>
+        <p:spPr>
+          <a:xfrm>
+            <a:off x="6400800" y="1737360"/>
+            <a:ext cx="2194560" cy="548640"/>
           </a:xfrm>
           <a:prstGeom prst="rect">
             <a:avLst/>
@@ -4210,11 +4144,11 @@
           <a:bodyPr wrap="square" lIns="0" tIns="0" rIns="0" bIns="0" rtlCol="0" anchor="ctr"/>
           <a:lstStyle/>
           <a:p>
-            <a:pPr algn="ctr" indent="0" marL="0">
-              <a:buNone/>
-            </a:pPr>
-            <a:r>
-              <a:rPr lang="en-US" sz="1100" dirty="0">
+            <a:pPr indent="0" marL="0">
+              <a:buNone/>
+            </a:pPr>
+            <a:r>
+              <a:rPr lang="en-US" sz="1200" dirty="0">
                 <a:solidFill>
                   <a:srgbClr val="64748B"/>
                 </a:solidFill>
@@ -4222,35 +4156,30 @@
                 <a:ea typeface="Calibri" pitchFamily="34" charset="-122"/>
                 <a:cs typeface="Calibri" pitchFamily="34" charset="-120"/>
               </a:rPr>
-              <a:t>Tool discovery &amp; dispatch</a:t>
-            </a:r>
-            <a:endParaRPr lang="en-US" sz="1100" dirty="0"/>
-          </a:p>
-        </p:txBody>
-      </p:sp>
-      <p:sp>
-        <p:nvSpPr>
-          <p:cNvPr id="15" name="Shape 13"/>
-          <p:cNvSpPr/>
-          <p:nvPr/>
-        </p:nvSpPr>
-        <p:spPr>
-          <a:xfrm>
-            <a:off x="640080" y="2743200"/>
-            <a:ext cx="2377440" cy="1188720"/>
+              <a:t>Groq &amp; Gemini (free), Anthropic (paid)</a:t>
+            </a:r>
+            <a:endParaRPr lang="en-US" sz="1200" dirty="0"/>
+          </a:p>
+        </p:txBody>
+      </p:sp>
+      <p:sp>
+        <p:nvSpPr>
+          <p:cNvPr id="18" name="Shape 16"/>
+          <p:cNvSpPr/>
+          <p:nvPr/>
+        </p:nvSpPr>
+        <p:spPr>
+          <a:xfrm>
+            <a:off x="548640" y="2834640"/>
+            <a:ext cx="2560320" cy="1371600"/>
           </a:xfrm>
           <a:prstGeom prst="rect">
             <a:avLst/>
           </a:prstGeom>
           <a:solidFill>
-            <a:srgbClr val="FFFFFF"/>
+            <a:srgbClr val="F0F4FF"/>
           </a:solidFill>
-          <a:ln w="19050">
-            <a:solidFill>
-              <a:srgbClr val="3B82F6"/>
-            </a:solidFill>
-            <a:prstDash val="solid"/>
-          </a:ln>
+          <a:ln/>
           <a:effectLst>
             <a:outerShdw sx="100000" sy="100000" kx="0" ky="0" algn="bl" rotWithShape="0" blurRad="50800" dist="25400" dir="8100000">
               <a:srgbClr val="000000">
@@ -4262,14 +4191,34 @@
       </p:sp>
       <p:sp>
         <p:nvSpPr>
-          <p:cNvPr id="16" name="Text 14"/>
-          <p:cNvSpPr/>
-          <p:nvPr/>
-        </p:nvSpPr>
-        <p:spPr>
-          <a:xfrm>
-            <a:off x="640080" y="2880360"/>
-            <a:ext cx="2377440" cy="457200"/>
+          <p:cNvPr id="19" name="Shape 17"/>
+          <p:cNvSpPr/>
+          <p:nvPr/>
+        </p:nvSpPr>
+        <p:spPr>
+          <a:xfrm>
+            <a:off x="548640" y="2834640"/>
+            <a:ext cx="54864" cy="1371600"/>
+          </a:xfrm>
+          <a:prstGeom prst="rect">
+            <a:avLst/>
+          </a:prstGeom>
+          <a:solidFill>
+            <a:srgbClr val="3B82F6"/>
+          </a:solidFill>
+          <a:ln/>
+        </p:spPr>
+      </p:sp>
+      <p:sp>
+        <p:nvSpPr>
+          <p:cNvPr id="20" name="Text 18"/>
+          <p:cNvSpPr/>
+          <p:nvPr/>
+        </p:nvSpPr>
+        <p:spPr>
+          <a:xfrm>
+            <a:off x="731520" y="2971800"/>
+            <a:ext cx="2194560" cy="457200"/>
           </a:xfrm>
           <a:prstGeom prst="rect">
             <a:avLst/>
@@ -4281,11 +4230,11 @@
           <a:bodyPr wrap="square" lIns="0" tIns="0" rIns="0" bIns="0" rtlCol="0" anchor="ctr"/>
           <a:lstStyle/>
           <a:p>
-            <a:pPr algn="ctr" indent="0" marL="0">
-              <a:buNone/>
-            </a:pPr>
-            <a:r>
-              <a:rPr lang="en-US" sz="1500" b="1" dirty="0">
+            <a:pPr indent="0" marL="0">
+              <a:buNone/>
+            </a:pPr>
+            <a:r>
+              <a:rPr lang="en-US" sz="1800" b="1" dirty="0">
                 <a:solidFill>
                   <a:srgbClr val="1E2761"/>
                 </a:solidFill>
@@ -4293,22 +4242,22 @@
                 <a:ea typeface="Georgia" pitchFamily="34" charset="-122"/>
                 <a:cs typeface="Georgia" pitchFamily="34" charset="-120"/>
               </a:rPr>
-              <a:t>Memory Mgr</a:t>
-            </a:r>
-            <a:endParaRPr lang="en-US" sz="1500" dirty="0"/>
-          </a:p>
-        </p:txBody>
-      </p:sp>
-      <p:sp>
-        <p:nvSpPr>
-          <p:cNvPr id="17" name="Text 15"/>
-          <p:cNvSpPr/>
-          <p:nvPr/>
-        </p:nvSpPr>
-        <p:spPr>
-          <a:xfrm>
-            <a:off x="640080" y="3337560"/>
-            <a:ext cx="2377440" cy="365760"/>
+              <a:t>WhatsApp</a:t>
+            </a:r>
+            <a:endParaRPr lang="en-US" sz="1800" dirty="0"/>
+          </a:p>
+        </p:txBody>
+      </p:sp>
+      <p:sp>
+        <p:nvSpPr>
+          <p:cNvPr id="21" name="Text 19"/>
+          <p:cNvSpPr/>
+          <p:nvPr/>
+        </p:nvSpPr>
+        <p:spPr>
+          <a:xfrm>
+            <a:off x="731520" y="3474720"/>
+            <a:ext cx="2194560" cy="548640"/>
           </a:xfrm>
           <a:prstGeom prst="rect">
             <a:avLst/>
@@ -4320,11 +4269,11 @@
           <a:bodyPr wrap="square" lIns="0" tIns="0" rIns="0" bIns="0" rtlCol="0" anchor="ctr"/>
           <a:lstStyle/>
           <a:p>
-            <a:pPr algn="ctr" indent="0" marL="0">
-              <a:buNone/>
-            </a:pPr>
-            <a:r>
-              <a:rPr lang="en-US" sz="1100" dirty="0">
+            <a:pPr indent="0" marL="0">
+              <a:buNone/>
+            </a:pPr>
+            <a:r>
+              <a:rPr lang="en-US" sz="1200" dirty="0">
                 <a:solidFill>
                   <a:srgbClr val="64748B"/>
                 </a:solidFill>
@@ -4332,35 +4281,30 @@
                 <a:ea typeface="Calibri" pitchFamily="34" charset="-122"/>
                 <a:cs typeface="Calibri" pitchFamily="34" charset="-120"/>
               </a:rPr>
-              <a:t>Markdown persistence</a:t>
-            </a:r>
-            <a:endParaRPr lang="en-US" sz="1100" dirty="0"/>
-          </a:p>
-        </p:txBody>
-      </p:sp>
-      <p:sp>
-        <p:nvSpPr>
-          <p:cNvPr id="18" name="Shape 16"/>
-          <p:cNvSpPr/>
-          <p:nvPr/>
-        </p:nvSpPr>
-        <p:spPr>
-          <a:xfrm>
-            <a:off x="3291840" y="2743200"/>
-            <a:ext cx="2377440" cy="1188720"/>
+              <a:t>Baileys multi-device, QR auth, allowlist</a:t>
+            </a:r>
+            <a:endParaRPr lang="en-US" sz="1200" dirty="0"/>
+          </a:p>
+        </p:txBody>
+      </p:sp>
+      <p:sp>
+        <p:nvSpPr>
+          <p:cNvPr id="22" name="Shape 20"/>
+          <p:cNvSpPr/>
+          <p:nvPr/>
+        </p:nvSpPr>
+        <p:spPr>
+          <a:xfrm>
+            <a:off x="3383280" y="2834640"/>
+            <a:ext cx="2560320" cy="1371600"/>
           </a:xfrm>
           <a:prstGeom prst="rect">
             <a:avLst/>
           </a:prstGeom>
           <a:solidFill>
-            <a:srgbClr val="FFFFFF"/>
+            <a:srgbClr val="F0F4FF"/>
           </a:solidFill>
-          <a:ln w="19050">
-            <a:solidFill>
-              <a:srgbClr val="3B82F6"/>
-            </a:solidFill>
-            <a:prstDash val="solid"/>
-          </a:ln>
+          <a:ln/>
           <a:effectLst>
             <a:outerShdw sx="100000" sy="100000" kx="0" ky="0" algn="bl" rotWithShape="0" blurRad="50800" dist="25400" dir="8100000">
               <a:srgbClr val="000000">
@@ -4372,14 +4316,34 @@
       </p:sp>
       <p:sp>
         <p:nvSpPr>
-          <p:cNvPr id="19" name="Text 17"/>
-          <p:cNvSpPr/>
-          <p:nvPr/>
-        </p:nvSpPr>
-        <p:spPr>
-          <a:xfrm>
-            <a:off x="3291840" y="2880360"/>
-            <a:ext cx="2377440" cy="457200"/>
+          <p:cNvPr id="23" name="Shape 21"/>
+          <p:cNvSpPr/>
+          <p:nvPr/>
+        </p:nvSpPr>
+        <p:spPr>
+          <a:xfrm>
+            <a:off x="3383280" y="2834640"/>
+            <a:ext cx="54864" cy="1371600"/>
+          </a:xfrm>
+          <a:prstGeom prst="rect">
+            <a:avLst/>
+          </a:prstGeom>
+          <a:solidFill>
+            <a:srgbClr val="3B82F6"/>
+          </a:solidFill>
+          <a:ln/>
+        </p:spPr>
+      </p:sp>
+      <p:sp>
+        <p:nvSpPr>
+          <p:cNvPr id="24" name="Text 22"/>
+          <p:cNvSpPr/>
+          <p:nvPr/>
+        </p:nvSpPr>
+        <p:spPr>
+          <a:xfrm>
+            <a:off x="3566160" y="2971800"/>
+            <a:ext cx="2194560" cy="457200"/>
           </a:xfrm>
           <a:prstGeom prst="rect">
             <a:avLst/>
@@ -4391,11 +4355,11 @@
           <a:bodyPr wrap="square" lIns="0" tIns="0" rIns="0" bIns="0" rtlCol="0" anchor="ctr"/>
           <a:lstStyle/>
           <a:p>
-            <a:pPr algn="ctr" indent="0" marL="0">
-              <a:buNone/>
-            </a:pPr>
-            <a:r>
-              <a:rPr lang="en-US" sz="1500" b="1" dirty="0">
+            <a:pPr indent="0" marL="0">
+              <a:buNone/>
+            </a:pPr>
+            <a:r>
+              <a:rPr lang="en-US" sz="1800" b="1" dirty="0">
                 <a:solidFill>
                   <a:srgbClr val="1E2761"/>
                 </a:solidFill>
@@ -4403,22 +4367,22 @@
                 <a:ea typeface="Georgia" pitchFamily="34" charset="-122"/>
                 <a:cs typeface="Georgia" pitchFamily="34" charset="-120"/>
               </a:rPr>
-              <a:t>Skill Loader</a:t>
-            </a:r>
-            <a:endParaRPr lang="en-US" sz="1500" dirty="0"/>
-          </a:p>
-        </p:txBody>
-      </p:sp>
-      <p:sp>
-        <p:nvSpPr>
-          <p:cNvPr id="20" name="Text 18"/>
-          <p:cNvSpPr/>
-          <p:nvPr/>
-        </p:nvSpPr>
-        <p:spPr>
-          <a:xfrm>
-            <a:off x="3291840" y="3337560"/>
-            <a:ext cx="2377440" cy="365760"/>
+              <a:t>AuthZ Wall</a:t>
+            </a:r>
+            <a:endParaRPr lang="en-US" sz="1800" dirty="0"/>
+          </a:p>
+        </p:txBody>
+      </p:sp>
+      <p:sp>
+        <p:nvSpPr>
+          <p:cNvPr id="25" name="Text 23"/>
+          <p:cNvSpPr/>
+          <p:nvPr/>
+        </p:nvSpPr>
+        <p:spPr>
+          <a:xfrm>
+            <a:off x="3566160" y="3474720"/>
+            <a:ext cx="2194560" cy="548640"/>
           </a:xfrm>
           <a:prstGeom prst="rect">
             <a:avLst/>
@@ -4430,11 +4394,11 @@
           <a:bodyPr wrap="square" lIns="0" tIns="0" rIns="0" bIns="0" rtlCol="0" anchor="ctr"/>
           <a:lstStyle/>
           <a:p>
-            <a:pPr algn="ctr" indent="0" marL="0">
-              <a:buNone/>
-            </a:pPr>
-            <a:r>
-              <a:rPr lang="en-US" sz="1100" dirty="0">
+            <a:pPr indent="0" marL="0">
+              <a:buNone/>
+            </a:pPr>
+            <a:r>
+              <a:rPr lang="en-US" sz="1200" dirty="0">
                 <a:solidFill>
                   <a:srgbClr val="64748B"/>
                 </a:solidFill>
@@ -4442,35 +4406,30 @@
                 <a:ea typeface="Calibri" pitchFamily="34" charset="-122"/>
                 <a:cs typeface="Calibri" pitchFamily="34" charset="-120"/>
               </a:rPr>
-              <a:t>Markdown plugins</a:t>
-            </a:r>
-            <a:endParaRPr lang="en-US" sz="1100" dirty="0"/>
-          </a:p>
-        </p:txBody>
-      </p:sp>
-      <p:sp>
-        <p:nvSpPr>
-          <p:cNvPr id="21" name="Shape 19"/>
-          <p:cNvSpPr/>
-          <p:nvPr/>
-        </p:nvSpPr>
-        <p:spPr>
-          <a:xfrm>
-            <a:off x="5943600" y="2743200"/>
-            <a:ext cx="2377440" cy="1188720"/>
+              <a:t>Default-deny, category + path validation</a:t>
+            </a:r>
+            <a:endParaRPr lang="en-US" sz="1200" dirty="0"/>
+          </a:p>
+        </p:txBody>
+      </p:sp>
+      <p:sp>
+        <p:nvSpPr>
+          <p:cNvPr id="26" name="Shape 24"/>
+          <p:cNvSpPr/>
+          <p:nvPr/>
+        </p:nvSpPr>
+        <p:spPr>
+          <a:xfrm>
+            <a:off x="6217920" y="2834640"/>
+            <a:ext cx="2560320" cy="1371600"/>
           </a:xfrm>
           <a:prstGeom prst="rect">
             <a:avLst/>
           </a:prstGeom>
           <a:solidFill>
-            <a:srgbClr val="FFFFFF"/>
+            <a:srgbClr val="F0F4FF"/>
           </a:solidFill>
-          <a:ln w="19050">
-            <a:solidFill>
-              <a:srgbClr val="3B82F6"/>
-            </a:solidFill>
-            <a:prstDash val="solid"/>
-          </a:ln>
+          <a:ln/>
           <a:effectLst>
             <a:outerShdw sx="100000" sy="100000" kx="0" ky="0" algn="bl" rotWithShape="0" blurRad="50800" dist="25400" dir="8100000">
               <a:srgbClr val="000000">
@@ -4482,14 +4441,34 @@
       </p:sp>
       <p:sp>
         <p:nvSpPr>
-          <p:cNvPr id="22" name="Text 20"/>
-          <p:cNvSpPr/>
-          <p:nvPr/>
-        </p:nvSpPr>
-        <p:spPr>
-          <a:xfrm>
-            <a:off x="5943600" y="2880360"/>
-            <a:ext cx="2377440" cy="457200"/>
+          <p:cNvPr id="27" name="Shape 25"/>
+          <p:cNvSpPr/>
+          <p:nvPr/>
+        </p:nvSpPr>
+        <p:spPr>
+          <a:xfrm>
+            <a:off x="6217920" y="2834640"/>
+            <a:ext cx="54864" cy="1371600"/>
+          </a:xfrm>
+          <a:prstGeom prst="rect">
+            <a:avLst/>
+          </a:prstGeom>
+          <a:solidFill>
+            <a:srgbClr val="3B82F6"/>
+          </a:solidFill>
+          <a:ln/>
+        </p:spPr>
+      </p:sp>
+      <p:sp>
+        <p:nvSpPr>
+          <p:cNvPr id="28" name="Text 26"/>
+          <p:cNvSpPr/>
+          <p:nvPr/>
+        </p:nvSpPr>
+        <p:spPr>
+          <a:xfrm>
+            <a:off x="6400800" y="2971800"/>
+            <a:ext cx="2194560" cy="457200"/>
           </a:xfrm>
           <a:prstGeom prst="rect">
             <a:avLst/>
@@ -4501,11 +4480,11 @@
           <a:bodyPr wrap="square" lIns="0" tIns="0" rIns="0" bIns="0" rtlCol="0" anchor="ctr"/>
           <a:lstStyle/>
           <a:p>
-            <a:pPr algn="ctr" indent="0" marL="0">
-              <a:buNone/>
-            </a:pPr>
-            <a:r>
-              <a:rPr lang="en-US" sz="1500" b="1" dirty="0">
+            <a:pPr indent="0" marL="0">
+              <a:buNone/>
+            </a:pPr>
+            <a:r>
+              <a:rPr lang="en-US" sz="1800" b="1" dirty="0">
                 <a:solidFill>
                   <a:srgbClr val="1E2761"/>
                 </a:solidFill>
@@ -4513,22 +4492,22 @@
                 <a:ea typeface="Georgia" pitchFamily="34" charset="-122"/>
                 <a:cs typeface="Georgia" pitchFamily="34" charset="-120"/>
               </a:rPr>
-              <a:t>Channels</a:t>
-            </a:r>
-            <a:endParaRPr lang="en-US" sz="1500" dirty="0"/>
-          </a:p>
-        </p:txBody>
-      </p:sp>
-      <p:sp>
-        <p:nvSpPr>
-          <p:cNvPr id="23" name="Text 21"/>
-          <p:cNvSpPr/>
-          <p:nvPr/>
-        </p:nvSpPr>
-        <p:spPr>
-          <a:xfrm>
-            <a:off x="5943600" y="3337560"/>
-            <a:ext cx="2377440" cy="365760"/>
+              <a:t>Scheduler</a:t>
+            </a:r>
+            <a:endParaRPr lang="en-US" sz="1800" dirty="0"/>
+          </a:p>
+        </p:txBody>
+      </p:sp>
+      <p:sp>
+        <p:nvSpPr>
+          <p:cNvPr id="29" name="Text 27"/>
+          <p:cNvSpPr/>
+          <p:nvPr/>
+        </p:nvSpPr>
+        <p:spPr>
+          <a:xfrm>
+            <a:off x="6400800" y="3474720"/>
+            <a:ext cx="2194560" cy="548640"/>
           </a:xfrm>
           <a:prstGeom prst="rect">
             <a:avLst/>
@@ -4540,11 +4519,11 @@
           <a:bodyPr wrap="square" lIns="0" tIns="0" rIns="0" bIns="0" rtlCol="0" anchor="ctr"/>
           <a:lstStyle/>
           <a:p>
-            <a:pPr algn="ctr" indent="0" marL="0">
-              <a:buNone/>
-            </a:pPr>
-            <a:r>
-              <a:rPr lang="en-US" sz="1100" dirty="0">
+            <a:pPr indent="0" marL="0">
+              <a:buNone/>
+            </a:pPr>
+            <a:r>
+              <a:rPr lang="en-US" sz="1200" dirty="0">
                 <a:solidFill>
                   <a:srgbClr val="64748B"/>
                 </a:solidFill>
@@ -4552,92 +4531,7 @@
                 <a:ea typeface="Calibri" pitchFamily="34" charset="-122"/>
                 <a:cs typeface="Calibri" pitchFamily="34" charset="-120"/>
               </a:rPr>
-              <a:t>CLI + Web interface</a:t>
-            </a:r>
-            <a:endParaRPr lang="en-US" sz="1100" dirty="0"/>
-          </a:p>
-        </p:txBody>
-      </p:sp>
-      <p:sp>
-        <p:nvSpPr>
-          <p:cNvPr id="24" name="Shape 22"/>
-          <p:cNvSpPr/>
-          <p:nvPr/>
-        </p:nvSpPr>
-        <p:spPr>
-          <a:xfrm>
-            <a:off x="3017520" y="1783080"/>
-            <a:ext cx="274320" cy="0"/>
-          </a:xfrm>
-          <a:prstGeom prst="line">
-            <a:avLst/>
-          </a:prstGeom>
-          <a:noFill/>
-          <a:ln w="19050">
-            <a:solidFill>
-              <a:srgbClr val="94A3B8"/>
-            </a:solidFill>
-            <a:prstDash val="solid"/>
-          </a:ln>
-        </p:spPr>
-      </p:sp>
-      <p:sp>
-        <p:nvSpPr>
-          <p:cNvPr id="25" name="Shape 23"/>
-          <p:cNvSpPr/>
-          <p:nvPr/>
-        </p:nvSpPr>
-        <p:spPr>
-          <a:xfrm>
-            <a:off x="5669280" y="1783080"/>
-            <a:ext cx="274320" cy="0"/>
-          </a:xfrm>
-          <a:prstGeom prst="line">
-            <a:avLst/>
-          </a:prstGeom>
-          <a:noFill/>
-          <a:ln w="19050">
-            <a:solidFill>
-              <a:srgbClr val="94A3B8"/>
-            </a:solidFill>
-            <a:prstDash val="solid"/>
-          </a:ln>
-        </p:spPr>
-      </p:sp>
-      <p:sp>
-        <p:nvSpPr>
-          <p:cNvPr id="26" name="Text 24"/>
-          <p:cNvSpPr/>
-          <p:nvPr/>
-        </p:nvSpPr>
-        <p:spPr>
-          <a:xfrm>
-            <a:off x="640080" y="4206240"/>
-            <a:ext cx="7863840" cy="365760"/>
-          </a:xfrm>
-          <a:prstGeom prst="rect">
-            <a:avLst/>
-          </a:prstGeom>
-          <a:noFill/>
-          <a:ln/>
-        </p:spPr>
-        <p:txBody>
-          <a:bodyPr wrap="square" rtlCol="0" anchor="ctr"/>
-          <a:lstStyle/>
-          <a:p>
-            <a:pPr algn="ctr" indent="0" marL="0">
-              <a:buNone/>
-            </a:pPr>
-            <a:r>
-              <a:rPr lang="en-US" sz="1200" i="1" dirty="0">
-                <a:solidFill>
-                  <a:srgbClr val="64748B"/>
-                </a:solidFill>
-                <a:latin typeface="Calibri" pitchFamily="34" charset="0"/>
-                <a:ea typeface="Calibri" pitchFamily="34" charset="-122"/>
-                <a:cs typeface="Calibri" pitchFamily="34" charset="-120"/>
-              </a:rPr>
-              <a:t>Tools = TypeScript classes  |  Skills = Markdown prompts  |  Memory = Markdown files (no database)</a:t>
+              <a:t>Cron-based reminders via WhatsApp</a:t>
             </a:r>
             <a:endParaRPr lang="en-US" sz="1200" dirty="0"/>
           </a:p>
@@ -4728,7 +4622,7 @@
                 <a:ea typeface="Georgia" pitchFamily="34" charset="-122"/>
                 <a:cs typeface="Georgia" pitchFamily="34" charset="-120"/>
               </a:rPr>
-              <a:t>The Agentic Loop (ReAct Pattern)</a:t>
+              <a:t>Proposed Agent: Decision Model</a:t>
             </a:r>
             <a:endParaRPr lang="en-US" sz="2800" dirty="0"/>
           </a:p>
@@ -4801,8 +4695,8 @@
         </p:nvSpPr>
         <p:spPr>
           <a:xfrm>
-            <a:off x="274320" y="1188720"/>
-            <a:ext cx="1463040" cy="640080"/>
+            <a:off x="182880" y="1097280"/>
+            <a:ext cx="1371600" cy="640080"/>
           </a:xfrm>
           <a:prstGeom prst="rect">
             <a:avLst/>
@@ -4821,8 +4715,8 @@
         </p:nvSpPr>
         <p:spPr>
           <a:xfrm>
-            <a:off x="274320" y="1216152"/>
-            <a:ext cx="1463040" cy="594360"/>
+            <a:off x="182880" y="1115568"/>
+            <a:ext cx="1371600" cy="603504"/>
           </a:xfrm>
           <a:prstGeom prst="rect">
             <a:avLst/>
@@ -4838,7 +4732,7 @@
               <a:buNone/>
             </a:pPr>
             <a:r>
-              <a:rPr lang="en-US" sz="1100" b="1" dirty="0">
+              <a:rPr lang="en-US" sz="1000" b="1" dirty="0">
                 <a:solidFill>
                   <a:srgbClr val="FFFFFF"/>
                 </a:solidFill>
@@ -4846,9 +4740,26 @@
                 <a:ea typeface="Calibri" pitchFamily="34" charset="-122"/>
                 <a:cs typeface="Calibri" pitchFamily="34" charset="-120"/>
               </a:rPr>
-              <a:t>User Message</a:t>
-            </a:r>
-            <a:endParaRPr lang="en-US" sz="1100" dirty="0"/>
+              <a:t>WhatsApp</a:t>
+            </a:r>
+            <a:endParaRPr lang="en-US" sz="1000" dirty="0"/>
+          </a:p>
+          <a:p>
+            <a:pPr algn="ctr" indent="0" marL="0">
+              <a:buNone/>
+            </a:pPr>
+            <a:r>
+              <a:rPr lang="en-US" sz="1000" b="1" dirty="0">
+                <a:solidFill>
+                  <a:srgbClr val="FFFFFF"/>
+                </a:solidFill>
+                <a:latin typeface="Calibri" pitchFamily="34" charset="0"/>
+                <a:ea typeface="Calibri" pitchFamily="34" charset="-122"/>
+                <a:cs typeface="Calibri" pitchFamily="34" charset="-120"/>
+              </a:rPr>
+              <a:t>Message</a:t>
+            </a:r>
+            <a:endParaRPr lang="en-US" sz="1000" dirty="0"/>
           </a:p>
         </p:txBody>
       </p:sp>
@@ -4860,8 +4771,84 @@
         </p:nvSpPr>
         <p:spPr>
           <a:xfrm>
-            <a:off x="2194560" y="1188720"/>
-            <a:ext cx="1463040" cy="640080"/>
+            <a:off x="1828800" y="1097280"/>
+            <a:ext cx="1371600" cy="640080"/>
+          </a:xfrm>
+          <a:prstGeom prst="rect">
+            <a:avLst/>
+          </a:prstGeom>
+          <a:solidFill>
+            <a:srgbClr val="8B5CF6"/>
+          </a:solidFill>
+          <a:ln/>
+        </p:spPr>
+      </p:sp>
+      <p:sp>
+        <p:nvSpPr>
+          <p:cNvPr id="9" name="Text 7"/>
+          <p:cNvSpPr/>
+          <p:nvPr/>
+        </p:nvSpPr>
+        <p:spPr>
+          <a:xfrm>
+            <a:off x="1828800" y="1115568"/>
+            <a:ext cx="1371600" cy="603504"/>
+          </a:xfrm>
+          <a:prstGeom prst="rect">
+            <a:avLst/>
+          </a:prstGeom>
+          <a:noFill/>
+          <a:ln/>
+        </p:spPr>
+        <p:txBody>
+          <a:bodyPr wrap="square" lIns="0" tIns="0" rIns="0" bIns="0" rtlCol="0" anchor="ctr"/>
+          <a:lstStyle/>
+          <a:p>
+            <a:pPr algn="ctr" indent="0" marL="0">
+              <a:buNone/>
+            </a:pPr>
+            <a:r>
+              <a:rPr lang="en-US" sz="1000" b="1" dirty="0">
+                <a:solidFill>
+                  <a:srgbClr val="FFFFFF"/>
+                </a:solidFill>
+                <a:latin typeface="Calibri" pitchFamily="34" charset="0"/>
+                <a:ea typeface="Calibri" pitchFamily="34" charset="-122"/>
+                <a:cs typeface="Calibri" pitchFamily="34" charset="-120"/>
+              </a:rPr>
+              <a:t>Context</a:t>
+            </a:r>
+            <a:endParaRPr lang="en-US" sz="1000" dirty="0"/>
+          </a:p>
+          <a:p>
+            <a:pPr algn="ctr" indent="0" marL="0">
+              <a:buNone/>
+            </a:pPr>
+            <a:r>
+              <a:rPr lang="en-US" sz="1000" b="1" dirty="0">
+                <a:solidFill>
+                  <a:srgbClr val="FFFFFF"/>
+                </a:solidFill>
+                <a:latin typeface="Calibri" pitchFamily="34" charset="0"/>
+                <a:ea typeface="Calibri" pitchFamily="34" charset="-122"/>
+                <a:cs typeface="Calibri" pitchFamily="34" charset="-120"/>
+              </a:rPr>
+              <a:t>Loader</a:t>
+            </a:r>
+            <a:endParaRPr lang="en-US" sz="1000" dirty="0"/>
+          </a:p>
+        </p:txBody>
+      </p:sp>
+      <p:sp>
+        <p:nvSpPr>
+          <p:cNvPr id="10" name="Shape 8"/>
+          <p:cNvSpPr/>
+          <p:nvPr/>
+        </p:nvSpPr>
+        <p:spPr>
+          <a:xfrm>
+            <a:off x="3474720" y="1097280"/>
+            <a:ext cx="1371600" cy="640080"/>
           </a:xfrm>
           <a:prstGeom prst="rect">
             <a:avLst/>
@@ -4874,14 +4861,14 @@
       </p:sp>
       <p:sp>
         <p:nvSpPr>
-          <p:cNvPr id="9" name="Text 7"/>
-          <p:cNvSpPr/>
-          <p:nvPr/>
-        </p:nvSpPr>
-        <p:spPr>
-          <a:xfrm>
-            <a:off x="2194560" y="1216152"/>
-            <a:ext cx="1463040" cy="594360"/>
+          <p:cNvPr id="11" name="Text 9"/>
+          <p:cNvSpPr/>
+          <p:nvPr/>
+        </p:nvSpPr>
+        <p:spPr>
+          <a:xfrm>
+            <a:off x="3474720" y="1115568"/>
+            <a:ext cx="1371600" cy="603504"/>
           </a:xfrm>
           <a:prstGeom prst="rect">
             <a:avLst/>
@@ -4897,7 +4884,7 @@
               <a:buNone/>
             </a:pPr>
             <a:r>
-              <a:rPr lang="en-US" sz="1100" b="1" dirty="0">
+              <a:rPr lang="en-US" sz="1000" b="1" dirty="0">
                 <a:solidFill>
                   <a:srgbClr val="FFFFFF"/>
                 </a:solidFill>
@@ -4907,20 +4894,20 @@
               </a:rPr>
               <a:t>LLM Call</a:t>
             </a:r>
-            <a:endParaRPr lang="en-US" sz="1100" dirty="0"/>
-          </a:p>
-        </p:txBody>
-      </p:sp>
-      <p:sp>
-        <p:nvSpPr>
-          <p:cNvPr id="10" name="Shape 8"/>
-          <p:cNvSpPr/>
-          <p:nvPr/>
-        </p:nvSpPr>
-        <p:spPr>
-          <a:xfrm>
-            <a:off x="4114800" y="1188720"/>
-            <a:ext cx="1463040" cy="640080"/>
+            <a:endParaRPr lang="en-US" sz="1000" dirty="0"/>
+          </a:p>
+        </p:txBody>
+      </p:sp>
+      <p:sp>
+        <p:nvSpPr>
+          <p:cNvPr id="12" name="Shape 10"/>
+          <p:cNvSpPr/>
+          <p:nvPr/>
+        </p:nvSpPr>
+        <p:spPr>
+          <a:xfrm>
+            <a:off x="5120640" y="1097280"/>
+            <a:ext cx="1371600" cy="640080"/>
           </a:xfrm>
           <a:prstGeom prst="rect">
             <a:avLst/>
@@ -4933,14 +4920,14 @@
       </p:sp>
       <p:sp>
         <p:nvSpPr>
-          <p:cNvPr id="11" name="Text 9"/>
-          <p:cNvSpPr/>
-          <p:nvPr/>
-        </p:nvSpPr>
-        <p:spPr>
-          <a:xfrm>
-            <a:off x="4114800" y="1216152"/>
-            <a:ext cx="1463040" cy="594360"/>
+          <p:cNvPr id="13" name="Text 11"/>
+          <p:cNvSpPr/>
+          <p:nvPr/>
+        </p:nvSpPr>
+        <p:spPr>
+          <a:xfrm>
+            <a:off x="5120640" y="1115568"/>
+            <a:ext cx="1371600" cy="603504"/>
           </a:xfrm>
           <a:prstGeom prst="rect">
             <a:avLst/>
@@ -4956,7 +4943,7 @@
               <a:buNone/>
             </a:pPr>
             <a:r>
-              <a:rPr lang="en-US" sz="1100" b="1" dirty="0">
+              <a:rPr lang="en-US" sz="1000" b="1" dirty="0">
                 <a:solidFill>
                   <a:srgbClr val="FFFFFF"/>
                 </a:solidFill>
@@ -4964,58 +4951,16 @@
                 <a:ea typeface="Calibri" pitchFamily="34" charset="-122"/>
                 <a:cs typeface="Calibri" pitchFamily="34" charset="-120"/>
               </a:rPr>
-              <a:t>Tool Calls?</a:t>
-            </a:r>
-            <a:endParaRPr lang="en-US" sz="1100" dirty="0"/>
-          </a:p>
-        </p:txBody>
-      </p:sp>
-      <p:sp>
-        <p:nvSpPr>
-          <p:cNvPr id="12" name="Shape 10"/>
-          <p:cNvSpPr/>
-          <p:nvPr/>
-        </p:nvSpPr>
-        <p:spPr>
-          <a:xfrm>
-            <a:off x="6035040" y="1188720"/>
-            <a:ext cx="1463040" cy="640080"/>
-          </a:xfrm>
-          <a:prstGeom prst="rect">
-            <a:avLst/>
-          </a:prstGeom>
-          <a:solidFill>
-            <a:srgbClr val="10B981"/>
-          </a:solidFill>
-          <a:ln/>
-        </p:spPr>
-      </p:sp>
-      <p:sp>
-        <p:nvSpPr>
-          <p:cNvPr id="13" name="Text 11"/>
-          <p:cNvSpPr/>
-          <p:nvPr/>
-        </p:nvSpPr>
-        <p:spPr>
-          <a:xfrm>
-            <a:off x="6035040" y="1216152"/>
-            <a:ext cx="1463040" cy="594360"/>
-          </a:xfrm>
-          <a:prstGeom prst="rect">
-            <a:avLst/>
-          </a:prstGeom>
-          <a:noFill/>
-          <a:ln/>
-        </p:spPr>
-        <p:txBody>
-          <a:bodyPr wrap="square" lIns="0" tIns="0" rIns="0" bIns="0" rtlCol="0" anchor="ctr"/>
-          <a:lstStyle/>
+              <a:t>Decision</a:t>
+            </a:r>
+            <a:endParaRPr lang="en-US" sz="1000" dirty="0"/>
+          </a:p>
           <a:p>
             <a:pPr algn="ctr" indent="0" marL="0">
               <a:buNone/>
             </a:pPr>
             <a:r>
-              <a:rPr lang="en-US" sz="1100" b="1" dirty="0">
+              <a:rPr lang="en-US" sz="1000" b="1" dirty="0">
                 <a:solidFill>
                   <a:srgbClr val="FFFFFF"/>
                 </a:solidFill>
@@ -5023,9 +4968,9 @@
                 <a:ea typeface="Calibri" pitchFamily="34" charset="-122"/>
                 <a:cs typeface="Calibri" pitchFamily="34" charset="-120"/>
               </a:rPr>
-              <a:t>Execute Tools</a:t>
-            </a:r>
-            <a:endParaRPr lang="en-US" sz="1100" dirty="0"/>
+              <a:t>Parser</a:t>
+            </a:r>
+            <a:endParaRPr lang="en-US" sz="1000" dirty="0"/>
           </a:p>
         </p:txBody>
       </p:sp>
@@ -5037,14 +4982,14 @@
         </p:nvSpPr>
         <p:spPr>
           <a:xfrm>
-            <a:off x="7772400" y="1188720"/>
-            <a:ext cx="1463040" cy="640080"/>
+            <a:off x="6766560" y="1097280"/>
+            <a:ext cx="1371600" cy="640080"/>
           </a:xfrm>
           <a:prstGeom prst="rect">
             <a:avLst/>
           </a:prstGeom>
           <a:solidFill>
-            <a:srgbClr val="1E2761"/>
+            <a:srgbClr val="EF4444"/>
           </a:solidFill>
           <a:ln/>
         </p:spPr>
@@ -5057,8 +5002,8 @@
         </p:nvSpPr>
         <p:spPr>
           <a:xfrm>
-            <a:off x="7772400" y="1216152"/>
-            <a:ext cx="1463040" cy="594360"/>
+            <a:off x="6766560" y="1115568"/>
+            <a:ext cx="1371600" cy="603504"/>
           </a:xfrm>
           <a:prstGeom prst="rect">
             <a:avLst/>
@@ -5074,7 +5019,7 @@
               <a:buNone/>
             </a:pPr>
             <a:r>
-              <a:rPr lang="en-US" sz="1100" b="1" dirty="0">
+              <a:rPr lang="en-US" sz="1000" b="1" dirty="0">
                 <a:solidFill>
                   <a:srgbClr val="FFFFFF"/>
                 </a:solidFill>
@@ -5082,9 +5027,26 @@
                 <a:ea typeface="Calibri" pitchFamily="34" charset="-122"/>
                 <a:cs typeface="Calibri" pitchFamily="34" charset="-120"/>
               </a:rPr>
-              <a:t>Response</a:t>
-            </a:r>
-            <a:endParaRPr lang="en-US" sz="1100" dirty="0"/>
+              <a:t>AuthZ</a:t>
+            </a:r>
+            <a:endParaRPr lang="en-US" sz="1000" dirty="0"/>
+          </a:p>
+          <a:p>
+            <a:pPr algn="ctr" indent="0" marL="0">
+              <a:buNone/>
+            </a:pPr>
+            <a:r>
+              <a:rPr lang="en-US" sz="1000" b="1" dirty="0">
+                <a:solidFill>
+                  <a:srgbClr val="FFFFFF"/>
+                </a:solidFill>
+                <a:latin typeface="Calibri" pitchFamily="34" charset="0"/>
+                <a:ea typeface="Calibri" pitchFamily="34" charset="-122"/>
+                <a:cs typeface="Calibri" pitchFamily="34" charset="-120"/>
+              </a:rPr>
+              <a:t>Check</a:t>
+            </a:r>
+            <a:endParaRPr lang="en-US" sz="1000" dirty="0"/>
           </a:p>
         </p:txBody>
       </p:sp>
@@ -5096,8 +5058,8 @@
         </p:nvSpPr>
         <p:spPr>
           <a:xfrm>
-            <a:off x="1737360" y="1508760"/>
-            <a:ext cx="365760" cy="0"/>
+            <a:off x="1554480" y="1417320"/>
+            <a:ext cx="274320" cy="0"/>
           </a:xfrm>
           <a:prstGeom prst="line">
             <a:avLst/>
@@ -5119,8 +5081,8 @@
         </p:nvSpPr>
         <p:spPr>
           <a:xfrm>
-            <a:off x="3657600" y="1508760"/>
-            <a:ext cx="365760" cy="0"/>
+            <a:off x="3200400" y="1417320"/>
+            <a:ext cx="274320" cy="0"/>
           </a:xfrm>
           <a:prstGeom prst="line">
             <a:avLst/>
@@ -5142,8 +5104,8 @@
         </p:nvSpPr>
         <p:spPr>
           <a:xfrm>
-            <a:off x="5577840" y="1508760"/>
-            <a:ext cx="365760" cy="0"/>
+            <a:off x="4846320" y="1417320"/>
+            <a:ext cx="274320" cy="0"/>
           </a:xfrm>
           <a:prstGeom prst="line">
             <a:avLst/>
@@ -5165,8 +5127,8 @@
         </p:nvSpPr>
         <p:spPr>
           <a:xfrm>
-            <a:off x="7498080" y="1508760"/>
-            <a:ext cx="365760" cy="0"/>
+            <a:off x="6492240" y="1417320"/>
+            <a:ext cx="274320" cy="0"/>
           </a:xfrm>
           <a:prstGeom prst="line">
             <a:avLst/>
@@ -5182,14 +5144,61 @@
       </p:sp>
       <p:sp>
         <p:nvSpPr>
-          <p:cNvPr id="20" name="Text 18"/>
-          <p:cNvSpPr/>
-          <p:nvPr/>
-        </p:nvSpPr>
-        <p:spPr>
-          <a:xfrm>
-            <a:off x="4114800" y="2011680"/>
-            <a:ext cx="3383280" cy="365760"/>
+          <p:cNvPr id="20" name="Shape 18"/>
+          <p:cNvSpPr/>
+          <p:nvPr/>
+        </p:nvSpPr>
+        <p:spPr>
+          <a:xfrm>
+            <a:off x="548640" y="2103120"/>
+            <a:ext cx="2560320" cy="777240"/>
+          </a:xfrm>
+          <a:prstGeom prst="rect">
+            <a:avLst/>
+          </a:prstGeom>
+          <a:solidFill>
+            <a:srgbClr val="F0F4FF"/>
+          </a:solidFill>
+          <a:ln/>
+          <a:effectLst>
+            <a:outerShdw sx="100000" sy="100000" kx="0" ky="0" algn="bl" rotWithShape="0" blurRad="50800" dist="25400" dir="8100000">
+              <a:srgbClr val="000000">
+                <a:alpha val="12000"/>
+              </a:srgbClr>
+            </a:outerShdw>
+          </a:effectLst>
+        </p:spPr>
+      </p:sp>
+      <p:sp>
+        <p:nvSpPr>
+          <p:cNvPr id="21" name="Shape 19"/>
+          <p:cNvSpPr/>
+          <p:nvPr/>
+        </p:nvSpPr>
+        <p:spPr>
+          <a:xfrm>
+            <a:off x="548640" y="2103120"/>
+            <a:ext cx="54864" cy="777240"/>
+          </a:xfrm>
+          <a:prstGeom prst="rect">
+            <a:avLst/>
+          </a:prstGeom>
+          <a:solidFill>
+            <a:srgbClr val="10B981"/>
+          </a:solidFill>
+          <a:ln/>
+        </p:spPr>
+      </p:sp>
+      <p:sp>
+        <p:nvSpPr>
+          <p:cNvPr id="22" name="Text 20"/>
+          <p:cNvSpPr/>
+          <p:nvPr/>
+        </p:nvSpPr>
+        <p:spPr>
+          <a:xfrm>
+            <a:off x="685800" y="2130552"/>
+            <a:ext cx="2286000" cy="320040"/>
           </a:xfrm>
           <a:prstGeom prst="rect">
             <a:avLst/>
@@ -5201,11 +5210,50 @@
           <a:bodyPr wrap="square" lIns="0" tIns="0" rIns="0" bIns="0" rtlCol="0" anchor="ctr"/>
           <a:lstStyle/>
           <a:p>
-            <a:pPr algn="ctr" indent="0" marL="0">
-              <a:buNone/>
-            </a:pPr>
-            <a:r>
-              <a:rPr lang="en-US" sz="1100" i="1" dirty="0">
+            <a:pPr indent="0" marL="0">
+              <a:buNone/>
+            </a:pPr>
+            <a:r>
+              <a:rPr lang="en-US" sz="1400" b="1" dirty="0">
+                <a:solidFill>
+                  <a:srgbClr val="1E2761"/>
+                </a:solidFill>
+                <a:latin typeface="Georgia" pitchFamily="34" charset="0"/>
+                <a:ea typeface="Georgia" pitchFamily="34" charset="-122"/>
+                <a:cs typeface="Georgia" pitchFamily="34" charset="-120"/>
+              </a:rPr>
+              <a:t>reply</a:t>
+            </a:r>
+            <a:endParaRPr lang="en-US" sz="1400" dirty="0"/>
+          </a:p>
+        </p:txBody>
+      </p:sp>
+      <p:sp>
+        <p:nvSpPr>
+          <p:cNvPr id="23" name="Text 21"/>
+          <p:cNvSpPr/>
+          <p:nvPr/>
+        </p:nvSpPr>
+        <p:spPr>
+          <a:xfrm>
+            <a:off x="685800" y="2450592"/>
+            <a:ext cx="2286000" cy="365760"/>
+          </a:xfrm>
+          <a:prstGeom prst="rect">
+            <a:avLst/>
+          </a:prstGeom>
+          <a:noFill/>
+          <a:ln/>
+        </p:spPr>
+        <p:txBody>
+          <a:bodyPr wrap="square" lIns="0" tIns="0" rIns="0" bIns="0" rtlCol="0" anchor="ctr"/>
+          <a:lstStyle/>
+          <a:p>
+            <a:pPr indent="0" marL="0">
+              <a:buNone/>
+            </a:pPr>
+            <a:r>
+              <a:rPr lang="en-US" sz="1000" dirty="0">
                 <a:solidFill>
                   <a:srgbClr val="64748B"/>
                 </a:solidFill>
@@ -5213,22 +5261,272 @@
                 <a:ea typeface="Calibri" pitchFamily="34" charset="-122"/>
                 <a:cs typeface="Calibri" pitchFamily="34" charset="-120"/>
               </a:rPr>
-              <a:t>Loop back if tools present</a:t>
-            </a:r>
-            <a:endParaRPr lang="en-US" sz="1100" dirty="0"/>
-          </a:p>
-        </p:txBody>
-      </p:sp>
-      <p:sp>
-        <p:nvSpPr>
-          <p:cNvPr id="21" name="Text 19"/>
-          <p:cNvSpPr/>
-          <p:nvPr/>
-        </p:nvSpPr>
-        <p:spPr>
-          <a:xfrm>
-            <a:off x="640080" y="2468880"/>
-            <a:ext cx="7863840" cy="2377440"/>
+              <a:t>{"type":"reply","text":"..."}</a:t>
+            </a:r>
+            <a:endParaRPr lang="en-US" sz="1000" dirty="0"/>
+          </a:p>
+        </p:txBody>
+      </p:sp>
+      <p:sp>
+        <p:nvSpPr>
+          <p:cNvPr id="24" name="Shape 22"/>
+          <p:cNvSpPr/>
+          <p:nvPr/>
+        </p:nvSpPr>
+        <p:spPr>
+          <a:xfrm>
+            <a:off x="3474720" y="2103120"/>
+            <a:ext cx="2560320" cy="777240"/>
+          </a:xfrm>
+          <a:prstGeom prst="rect">
+            <a:avLst/>
+          </a:prstGeom>
+          <a:solidFill>
+            <a:srgbClr val="F0F4FF"/>
+          </a:solidFill>
+          <a:ln/>
+          <a:effectLst>
+            <a:outerShdw sx="100000" sy="100000" kx="0" ky="0" algn="bl" rotWithShape="0" blurRad="50800" dist="25400" dir="8100000">
+              <a:srgbClr val="000000">
+                <a:alpha val="12000"/>
+              </a:srgbClr>
+            </a:outerShdw>
+          </a:effectLst>
+        </p:spPr>
+      </p:sp>
+      <p:sp>
+        <p:nvSpPr>
+          <p:cNvPr id="25" name="Shape 23"/>
+          <p:cNvSpPr/>
+          <p:nvPr/>
+        </p:nvSpPr>
+        <p:spPr>
+          <a:xfrm>
+            <a:off x="3474720" y="2103120"/>
+            <a:ext cx="54864" cy="777240"/>
+          </a:xfrm>
+          <a:prstGeom prst="rect">
+            <a:avLst/>
+          </a:prstGeom>
+          <a:solidFill>
+            <a:srgbClr val="3B82F6"/>
+          </a:solidFill>
+          <a:ln/>
+        </p:spPr>
+      </p:sp>
+      <p:sp>
+        <p:nvSpPr>
+          <p:cNvPr id="26" name="Text 24"/>
+          <p:cNvSpPr/>
+          <p:nvPr/>
+        </p:nvSpPr>
+        <p:spPr>
+          <a:xfrm>
+            <a:off x="3611880" y="2130552"/>
+            <a:ext cx="2286000" cy="320040"/>
+          </a:xfrm>
+          <a:prstGeom prst="rect">
+            <a:avLst/>
+          </a:prstGeom>
+          <a:noFill/>
+          <a:ln/>
+        </p:spPr>
+        <p:txBody>
+          <a:bodyPr wrap="square" lIns="0" tIns="0" rIns="0" bIns="0" rtlCol="0" anchor="ctr"/>
+          <a:lstStyle/>
+          <a:p>
+            <a:pPr indent="0" marL="0">
+              <a:buNone/>
+            </a:pPr>
+            <a:r>
+              <a:rPr lang="en-US" sz="1400" b="1" dirty="0">
+                <a:solidFill>
+                  <a:srgbClr val="1E2761"/>
+                </a:solidFill>
+                <a:latin typeface="Georgia" pitchFamily="34" charset="0"/>
+                <a:ea typeface="Georgia" pitchFamily="34" charset="-122"/>
+                <a:cs typeface="Georgia" pitchFamily="34" charset="-120"/>
+              </a:rPr>
+              <a:t>tool_call</a:t>
+            </a:r>
+            <a:endParaRPr lang="en-US" sz="1400" dirty="0"/>
+          </a:p>
+        </p:txBody>
+      </p:sp>
+      <p:sp>
+        <p:nvSpPr>
+          <p:cNvPr id="27" name="Text 25"/>
+          <p:cNvSpPr/>
+          <p:nvPr/>
+        </p:nvSpPr>
+        <p:spPr>
+          <a:xfrm>
+            <a:off x="3611880" y="2450592"/>
+            <a:ext cx="2286000" cy="365760"/>
+          </a:xfrm>
+          <a:prstGeom prst="rect">
+            <a:avLst/>
+          </a:prstGeom>
+          <a:noFill/>
+          <a:ln/>
+        </p:spPr>
+        <p:txBody>
+          <a:bodyPr wrap="square" lIns="0" tIns="0" rIns="0" bIns="0" rtlCol="0" anchor="ctr"/>
+          <a:lstStyle/>
+          <a:p>
+            <a:pPr indent="0" marL="0">
+              <a:buNone/>
+            </a:pPr>
+            <a:r>
+              <a:rPr lang="en-US" sz="1000" dirty="0">
+                <a:solidFill>
+                  <a:srgbClr val="64748B"/>
+                </a:solidFill>
+                <a:latin typeface="Calibri" pitchFamily="34" charset="0"/>
+                <a:ea typeface="Calibri" pitchFamily="34" charset="-122"/>
+                <a:cs typeface="Calibri" pitchFamily="34" charset="-120"/>
+              </a:rPr>
+              <a:t>{"type":"tool_call","tool":"...","args":{}}</a:t>
+            </a:r>
+            <a:endParaRPr lang="en-US" sz="1000" dirty="0"/>
+          </a:p>
+        </p:txBody>
+      </p:sp>
+      <p:sp>
+        <p:nvSpPr>
+          <p:cNvPr id="28" name="Shape 26"/>
+          <p:cNvSpPr/>
+          <p:nvPr/>
+        </p:nvSpPr>
+        <p:spPr>
+          <a:xfrm>
+            <a:off x="6400800" y="2103120"/>
+            <a:ext cx="2560320" cy="777240"/>
+          </a:xfrm>
+          <a:prstGeom prst="rect">
+            <a:avLst/>
+          </a:prstGeom>
+          <a:solidFill>
+            <a:srgbClr val="F0F4FF"/>
+          </a:solidFill>
+          <a:ln/>
+          <a:effectLst>
+            <a:outerShdw sx="100000" sy="100000" kx="0" ky="0" algn="bl" rotWithShape="0" blurRad="50800" dist="25400" dir="8100000">
+              <a:srgbClr val="000000">
+                <a:alpha val="12000"/>
+              </a:srgbClr>
+            </a:outerShdw>
+          </a:effectLst>
+        </p:spPr>
+      </p:sp>
+      <p:sp>
+        <p:nvSpPr>
+          <p:cNvPr id="29" name="Shape 27"/>
+          <p:cNvSpPr/>
+          <p:nvPr/>
+        </p:nvSpPr>
+        <p:spPr>
+          <a:xfrm>
+            <a:off x="6400800" y="2103120"/>
+            <a:ext cx="54864" cy="777240"/>
+          </a:xfrm>
+          <a:prstGeom prst="rect">
+            <a:avLst/>
+          </a:prstGeom>
+          <a:solidFill>
+            <a:srgbClr val="8B5CF6"/>
+          </a:solidFill>
+          <a:ln/>
+        </p:spPr>
+      </p:sp>
+      <p:sp>
+        <p:nvSpPr>
+          <p:cNvPr id="30" name="Text 28"/>
+          <p:cNvSpPr/>
+          <p:nvPr/>
+        </p:nvSpPr>
+        <p:spPr>
+          <a:xfrm>
+            <a:off x="6537960" y="2130552"/>
+            <a:ext cx="2286000" cy="320040"/>
+          </a:xfrm>
+          <a:prstGeom prst="rect">
+            <a:avLst/>
+          </a:prstGeom>
+          <a:noFill/>
+          <a:ln/>
+        </p:spPr>
+        <p:txBody>
+          <a:bodyPr wrap="square" lIns="0" tIns="0" rIns="0" bIns="0" rtlCol="0" anchor="ctr"/>
+          <a:lstStyle/>
+          <a:p>
+            <a:pPr indent="0" marL="0">
+              <a:buNone/>
+            </a:pPr>
+            <a:r>
+              <a:rPr lang="en-US" sz="1400" b="1" dirty="0">
+                <a:solidFill>
+                  <a:srgbClr val="1E2761"/>
+                </a:solidFill>
+                <a:latin typeface="Georgia" pitchFamily="34" charset="0"/>
+                <a:ea typeface="Georgia" pitchFamily="34" charset="-122"/>
+                <a:cs typeface="Georgia" pitchFamily="34" charset="-120"/>
+              </a:rPr>
+              <a:t>schedule</a:t>
+            </a:r>
+            <a:endParaRPr lang="en-US" sz="1400" dirty="0"/>
+          </a:p>
+        </p:txBody>
+      </p:sp>
+      <p:sp>
+        <p:nvSpPr>
+          <p:cNvPr id="31" name="Text 29"/>
+          <p:cNvSpPr/>
+          <p:nvPr/>
+        </p:nvSpPr>
+        <p:spPr>
+          <a:xfrm>
+            <a:off x="6537960" y="2450592"/>
+            <a:ext cx="2286000" cy="365760"/>
+          </a:xfrm>
+          <a:prstGeom prst="rect">
+            <a:avLst/>
+          </a:prstGeom>
+          <a:noFill/>
+          <a:ln/>
+        </p:spPr>
+        <p:txBody>
+          <a:bodyPr wrap="square" lIns="0" tIns="0" rIns="0" bIns="0" rtlCol="0" anchor="ctr"/>
+          <a:lstStyle/>
+          <a:p>
+            <a:pPr indent="0" marL="0">
+              <a:buNone/>
+            </a:pPr>
+            <a:r>
+              <a:rPr lang="en-US" sz="1000" dirty="0">
+                <a:solidFill>
+                  <a:srgbClr val="64748B"/>
+                </a:solidFill>
+                <a:latin typeface="Calibri" pitchFamily="34" charset="0"/>
+                <a:ea typeface="Calibri" pitchFamily="34" charset="-122"/>
+                <a:cs typeface="Calibri" pitchFamily="34" charset="-120"/>
+              </a:rPr>
+              <a:t>{"type":"schedule","job":{...}}</a:t>
+            </a:r>
+            <a:endParaRPr lang="en-US" sz="1000" dirty="0"/>
+          </a:p>
+        </p:txBody>
+      </p:sp>
+      <p:sp>
+        <p:nvSpPr>
+          <p:cNvPr id="32" name="Text 30"/>
+          <p:cNvSpPr/>
+          <p:nvPr/>
+        </p:nvSpPr>
+        <p:spPr>
+          <a:xfrm>
+            <a:off x="640080" y="3200400"/>
+            <a:ext cx="7863840" cy="1828800"/>
           </a:xfrm>
           <a:prstGeom prst="rect">
             <a:avLst/>
@@ -5242,7 +5540,7 @@
           <a:p>
             <a:pPr marL="342900" indent="-342900">
               <a:spcAft>
-                <a:spcPts val="600"/>
+                <a:spcPts val="800"/>
               </a:spcAft>
               <a:buSzPct val="100000"/>
               <a:buChar char="•"/>
@@ -5256,14 +5554,14 @@
                 <a:ea typeface="Calibri" pitchFamily="34" charset="-122"/>
                 <a:cs typeface="Calibri" pitchFamily="34" charset="-120"/>
               </a:rPr>
-              <a:t>Step 1: Send conversation history + tool definitions to LLM</a:t>
+              <a:t>LLM outputs exactly ONE JSON decision per turn (Zod validated)</a:t>
             </a:r>
             <a:endParaRPr lang="en-US" sz="1300" dirty="0"/>
           </a:p>
           <a:p>
             <a:pPr marL="342900" indent="-342900">
               <a:spcAft>
-                <a:spcPts val="600"/>
+                <a:spcPts val="800"/>
               </a:spcAft>
               <a:buSzPct val="100000"/>
               <a:buChar char="•"/>
@@ -5277,14 +5575,14 @@
                 <a:ea typeface="Calibri" pitchFamily="34" charset="-122"/>
                 <a:cs typeface="Calibri" pitchFamily="34" charset="-120"/>
               </a:rPr>
-              <a:t>Step 2: Parse response for text blocks and tool_use blocks</a:t>
+              <a:t>Benefits: predictable execution, auditable, bounded resource usage</a:t>
             </a:r>
             <a:endParaRPr lang="en-US" sz="1300" dirty="0"/>
           </a:p>
           <a:p>
             <a:pPr marL="342900" indent="-342900">
               <a:spcAft>
-                <a:spcPts val="600"/>
+                <a:spcPts val="800"/>
               </a:spcAft>
               <a:buSzPct val="100000"/>
               <a:buChar char="•"/>
@@ -5298,14 +5596,14 @@
                 <a:ea typeface="Calibri" pitchFamily="34" charset="-122"/>
                 <a:cs typeface="Calibri" pitchFamily="34" charset="-120"/>
               </a:rPr>
-              <a:t>Step 3: If tools requested, execute sequentially and append results</a:t>
+              <a:t>DecisionParseError → safe fallback reply (never crashes)</a:t>
             </a:r>
             <a:endParaRPr lang="en-US" sz="1300" dirty="0"/>
           </a:p>
           <a:p>
             <a:pPr marL="342900" indent="-342900">
               <a:spcAft>
-                <a:spcPts val="600"/>
+                <a:spcPts val="800"/>
               </a:spcAft>
               <a:buSzPct val="100000"/>
               <a:buChar char="•"/>
@@ -5319,25 +5617,7 @@
                 <a:ea typeface="Calibri" pitchFamily="34" charset="-122"/>
                 <a:cs typeface="Calibri" pitchFamily="34" charset="-120"/>
               </a:rPr>
-              <a:t>Step 4: If no tools, return text response to user</a:t>
-            </a:r>
-            <a:endParaRPr lang="en-US" sz="1300" dirty="0"/>
-          </a:p>
-          <a:p>
-            <a:pPr marL="342900" indent="-342900">
-              <a:buSzPct val="100000"/>
-              <a:buChar char="•"/>
-            </a:pPr>
-            <a:r>
-              <a:rPr lang="en-US" sz="1300" dirty="0">
-                <a:solidFill>
-                  <a:srgbClr val="1E293B"/>
-                </a:solidFill>
-                <a:latin typeface="Calibri" pitchFamily="34" charset="0"/>
-                <a:ea typeface="Calibri" pitchFamily="34" charset="-122"/>
-                <a:cs typeface="Calibri" pitchFamily="34" charset="-120"/>
-              </a:rPr>
-              <a:t>Max 10 iterations (configurable) with 4-state machine: idle, thinking, tool_execution, responding</a:t>
+              <a:t>No multi-turn loop — each message = 1 LLM call + at most 1 tool</a:t>
             </a:r>
             <a:endParaRPr lang="en-US" sz="1300" dirty="0"/>
           </a:p>
@@ -5428,7 +5708,7 @@
                 <a:ea typeface="Georgia" pitchFamily="34" charset="-122"/>
                 <a:cs typeface="Georgia" pitchFamily="34" charset="-120"/>
               </a:rPr>
-              <a:t>Tool System</a:t>
+              <a:t>System Design: Architecture</a:t>
             </a:r>
             <a:endParaRPr lang="en-US" sz="2800" dirty="0"/>
           </a:p>
@@ -5501,48 +5781,40 @@
         </p:nvSpPr>
         <p:spPr>
           <a:xfrm>
-            <a:off x="548640" y="1097280"/>
-            <a:ext cx="73152" cy="777240"/>
+            <a:off x="365760" y="1188720"/>
+            <a:ext cx="1645920" cy="1280160"/>
           </a:xfrm>
           <a:prstGeom prst="rect">
             <a:avLst/>
           </a:prstGeom>
           <a:solidFill>
-            <a:srgbClr val="EF4444"/>
+            <a:srgbClr val="FFFFFF"/>
           </a:solidFill>
-          <a:ln/>
-        </p:spPr>
-      </p:sp>
-      <p:sp>
-        <p:nvSpPr>
-          <p:cNvPr id="7" name="Shape 5"/>
-          <p:cNvSpPr/>
-          <p:nvPr/>
-        </p:nvSpPr>
-        <p:spPr>
-          <a:xfrm>
-            <a:off x="621792" y="1097280"/>
-            <a:ext cx="7973568" cy="777240"/>
-          </a:xfrm>
-          <a:prstGeom prst="rect">
-            <a:avLst/>
-          </a:prstGeom>
-          <a:solidFill>
-            <a:srgbClr val="F0F4FF"/>
-          </a:solidFill>
-          <a:ln/>
-        </p:spPr>
-      </p:sp>
-      <p:sp>
-        <p:nvSpPr>
-          <p:cNvPr id="8" name="Text 6"/>
-          <p:cNvSpPr/>
-          <p:nvPr/>
-        </p:nvSpPr>
-        <p:spPr>
-          <a:xfrm>
-            <a:off x="822960" y="1143000"/>
-            <a:ext cx="2286000" cy="320040"/>
+          <a:ln w="25400">
+            <a:solidFill>
+              <a:srgbClr val="10B981"/>
+            </a:solidFill>
+            <a:prstDash val="solid"/>
+          </a:ln>
+          <a:effectLst>
+            <a:outerShdw sx="100000" sy="100000" kx="0" ky="0" algn="bl" rotWithShape="0" blurRad="50800" dist="25400" dir="8100000">
+              <a:srgbClr val="000000">
+                <a:alpha val="12000"/>
+              </a:srgbClr>
+            </a:outerShdw>
+          </a:effectLst>
+        </p:spPr>
+      </p:sp>
+      <p:sp>
+        <p:nvSpPr>
+          <p:cNvPr id="7" name="Text 5"/>
+          <p:cNvSpPr/>
+          <p:nvPr/>
+        </p:nvSpPr>
+        <p:spPr>
+          <a:xfrm>
+            <a:off x="365760" y="1280160"/>
+            <a:ext cx="1645920" cy="548640"/>
           </a:xfrm>
           <a:prstGeom prst="rect">
             <a:avLst/>
@@ -5554,11 +5826,11 @@
           <a:bodyPr wrap="square" lIns="0" tIns="0" rIns="0" bIns="0" rtlCol="0" anchor="ctr"/>
           <a:lstStyle/>
           <a:p>
-            <a:pPr indent="0" marL="0">
-              <a:buNone/>
-            </a:pPr>
-            <a:r>
-              <a:rPr lang="en-US" sz="1500" b="1" dirty="0">
+            <a:pPr algn="ctr" indent="0" marL="0">
+              <a:buNone/>
+            </a:pPr>
+            <a:r>
+              <a:rPr lang="en-US" sz="1200" b="1" dirty="0">
                 <a:solidFill>
                   <a:srgbClr val="1E2761"/>
                 </a:solidFill>
@@ -5566,22 +5838,39 @@
                 <a:ea typeface="Georgia" pitchFamily="34" charset="-122"/>
                 <a:cs typeface="Georgia" pitchFamily="34" charset="-120"/>
               </a:rPr>
-              <a:t>Shell Tool</a:t>
-            </a:r>
-            <a:endParaRPr lang="en-US" sz="1500" dirty="0"/>
-          </a:p>
-        </p:txBody>
-      </p:sp>
-      <p:sp>
-        <p:nvSpPr>
-          <p:cNvPr id="9" name="Text 7"/>
-          <p:cNvSpPr/>
-          <p:nvPr/>
-        </p:nvSpPr>
-        <p:spPr>
-          <a:xfrm>
-            <a:off x="822960" y="1417320"/>
-            <a:ext cx="7589520" cy="457200"/>
+              <a:t>WhatsApp</a:t>
+            </a:r>
+            <a:endParaRPr lang="en-US" sz="1200" dirty="0"/>
+          </a:p>
+          <a:p>
+            <a:pPr algn="ctr" indent="0" marL="0">
+              <a:buNone/>
+            </a:pPr>
+            <a:r>
+              <a:rPr lang="en-US" sz="1200" b="1" dirty="0">
+                <a:solidFill>
+                  <a:srgbClr val="1E2761"/>
+                </a:solidFill>
+                <a:latin typeface="Georgia" pitchFamily="34" charset="0"/>
+                <a:ea typeface="Georgia" pitchFamily="34" charset="-122"/>
+                <a:cs typeface="Georgia" pitchFamily="34" charset="-120"/>
+              </a:rPr>
+              <a:t>Channel</a:t>
+            </a:r>
+            <a:endParaRPr lang="en-US" sz="1200" dirty="0"/>
+          </a:p>
+        </p:txBody>
+      </p:sp>
+      <p:sp>
+        <p:nvSpPr>
+          <p:cNvPr id="8" name="Text 6"/>
+          <p:cNvSpPr/>
+          <p:nvPr/>
+        </p:nvSpPr>
+        <p:spPr>
+          <a:xfrm>
+            <a:off x="365760" y="1874520"/>
+            <a:ext cx="1645920" cy="365760"/>
           </a:xfrm>
           <a:prstGeom prst="rect">
             <a:avLst/>
@@ -5593,11 +5882,11 @@
           <a:bodyPr wrap="square" lIns="0" tIns="0" rIns="0" bIns="0" rtlCol="0" anchor="ctr"/>
           <a:lstStyle/>
           <a:p>
-            <a:pPr indent="0" marL="0">
-              <a:buNone/>
-            </a:pPr>
-            <a:r>
-              <a:rPr lang="en-US" sz="1200" dirty="0">
+            <a:pPr algn="ctr" indent="0" marL="0">
+              <a:buNone/>
+            </a:pPr>
+            <a:r>
+              <a:rPr lang="en-US" sz="1000" dirty="0">
                 <a:solidFill>
                   <a:srgbClr val="64748B"/>
                 </a:solidFill>
@@ -5605,16 +5894,126 @@
                 <a:ea typeface="Calibri" pitchFamily="34" charset="-122"/>
                 <a:cs typeface="Calibri" pitchFamily="34" charset="-120"/>
               </a:rPr>
-              <a:t>Execute commands safely</a:t>
+              <a:t>Baileys, QR auth</a:t>
+            </a:r>
+            <a:endParaRPr lang="en-US" sz="1000" dirty="0"/>
+          </a:p>
+        </p:txBody>
+      </p:sp>
+      <p:sp>
+        <p:nvSpPr>
+          <p:cNvPr id="9" name="Shape 7"/>
+          <p:cNvSpPr/>
+          <p:nvPr/>
+        </p:nvSpPr>
+        <p:spPr>
+          <a:xfrm>
+            <a:off x="2286000" y="1188720"/>
+            <a:ext cx="1645920" cy="1280160"/>
+          </a:xfrm>
+          <a:prstGeom prst="rect">
+            <a:avLst/>
+          </a:prstGeom>
+          <a:solidFill>
+            <a:srgbClr val="FFFFFF"/>
+          </a:solidFill>
+          <a:ln w="25400">
+            <a:solidFill>
+              <a:srgbClr val="3B82F6"/>
+            </a:solidFill>
+            <a:prstDash val="solid"/>
+          </a:ln>
+          <a:effectLst>
+            <a:outerShdw sx="100000" sy="100000" kx="0" ky="0" algn="bl" rotWithShape="0" blurRad="50800" dist="25400" dir="8100000">
+              <a:srgbClr val="000000">
+                <a:alpha val="12000"/>
+              </a:srgbClr>
+            </a:outerShdw>
+          </a:effectLst>
+        </p:spPr>
+      </p:sp>
+      <p:sp>
+        <p:nvSpPr>
+          <p:cNvPr id="10" name="Text 8"/>
+          <p:cNvSpPr/>
+          <p:nvPr/>
+        </p:nvSpPr>
+        <p:spPr>
+          <a:xfrm>
+            <a:off x="2286000" y="1280160"/>
+            <a:ext cx="1645920" cy="548640"/>
+          </a:xfrm>
+          <a:prstGeom prst="rect">
+            <a:avLst/>
+          </a:prstGeom>
+          <a:noFill/>
+          <a:ln/>
+        </p:spPr>
+        <p:txBody>
+          <a:bodyPr wrap="square" lIns="0" tIns="0" rIns="0" bIns="0" rtlCol="0" anchor="ctr"/>
+          <a:lstStyle/>
+          <a:p>
+            <a:pPr algn="ctr" indent="0" marL="0">
+              <a:buNone/>
+            </a:pPr>
+            <a:r>
+              <a:rPr lang="en-US" sz="1200" b="1" dirty="0">
+                <a:solidFill>
+                  <a:srgbClr val="1E2761"/>
+                </a:solidFill>
+                <a:latin typeface="Georgia" pitchFamily="34" charset="0"/>
+                <a:ea typeface="Georgia" pitchFamily="34" charset="-122"/>
+                <a:cs typeface="Georgia" pitchFamily="34" charset="-120"/>
+              </a:rPr>
+              <a:t>Agent</a:t>
             </a:r>
             <a:endParaRPr lang="en-US" sz="1200" dirty="0"/>
           </a:p>
           <a:p>
-            <a:pPr indent="0" marL="0">
-              <a:buNone/>
-            </a:pPr>
-            <a:r>
-              <a:rPr lang="en-US" sz="1200" dirty="0">
+            <a:pPr algn="ctr" indent="0" marL="0">
+              <a:buNone/>
+            </a:pPr>
+            <a:r>
+              <a:rPr lang="en-US" sz="1200" b="1" dirty="0">
+                <a:solidFill>
+                  <a:srgbClr val="1E2761"/>
+                </a:solidFill>
+                <a:latin typeface="Georgia" pitchFamily="34" charset="0"/>
+                <a:ea typeface="Georgia" pitchFamily="34" charset="-122"/>
+                <a:cs typeface="Georgia" pitchFamily="34" charset="-120"/>
+              </a:rPr>
+              <a:t>Core</a:t>
+            </a:r>
+            <a:endParaRPr lang="en-US" sz="1200" dirty="0"/>
+          </a:p>
+        </p:txBody>
+      </p:sp>
+      <p:sp>
+        <p:nvSpPr>
+          <p:cNvPr id="11" name="Text 9"/>
+          <p:cNvSpPr/>
+          <p:nvPr/>
+        </p:nvSpPr>
+        <p:spPr>
+          <a:xfrm>
+            <a:off x="2286000" y="1874520"/>
+            <a:ext cx="1645920" cy="365760"/>
+          </a:xfrm>
+          <a:prstGeom prst="rect">
+            <a:avLst/>
+          </a:prstGeom>
+          <a:noFill/>
+          <a:ln/>
+        </p:spPr>
+        <p:txBody>
+          <a:bodyPr wrap="square" lIns="0" tIns="0" rIns="0" bIns="0" rtlCol="0" anchor="ctr"/>
+          <a:lstStyle/>
+          <a:p>
+            <a:pPr algn="ctr" indent="0" marL="0">
+              <a:buNone/>
+            </a:pPr>
+            <a:r>
+              <a:rPr lang="en-US" sz="1000" dirty="0">
                 <a:solidFill>
                   <a:srgbClr val="64748B"/>
                 </a:solidFill>
@@ -5622,62 +6021,54 @@
                 <a:ea typeface="Calibri" pitchFamily="34" charset="-122"/>
                 <a:cs typeface="Calibri" pitchFamily="34" charset="-120"/>
               </a:rPr>
-              <a:t>Denylist, 15s timeout, 10K cap</a:t>
-            </a:r>
-            <a:endParaRPr lang="en-US" sz="1200" dirty="0"/>
-          </a:p>
-        </p:txBody>
-      </p:sp>
-      <p:sp>
-        <p:nvSpPr>
-          <p:cNvPr id="10" name="Shape 8"/>
-          <p:cNvSpPr/>
-          <p:nvPr/>
-        </p:nvSpPr>
-        <p:spPr>
-          <a:xfrm>
-            <a:off x="548640" y="2103120"/>
-            <a:ext cx="73152" cy="777240"/>
+              <a:t>Decision flow</a:t>
+            </a:r>
+            <a:endParaRPr lang="en-US" sz="1000" dirty="0"/>
+          </a:p>
+        </p:txBody>
+      </p:sp>
+      <p:sp>
+        <p:nvSpPr>
+          <p:cNvPr id="12" name="Shape 10"/>
+          <p:cNvSpPr/>
+          <p:nvPr/>
+        </p:nvSpPr>
+        <p:spPr>
+          <a:xfrm>
+            <a:off x="4206240" y="1188720"/>
+            <a:ext cx="1645920" cy="1280160"/>
           </a:xfrm>
           <a:prstGeom prst="rect">
             <a:avLst/>
           </a:prstGeom>
           <a:solidFill>
-            <a:srgbClr val="3B82F6"/>
+            <a:srgbClr val="FFFFFF"/>
           </a:solidFill>
-          <a:ln/>
-        </p:spPr>
-      </p:sp>
-      <p:sp>
-        <p:nvSpPr>
-          <p:cNvPr id="11" name="Shape 9"/>
-          <p:cNvSpPr/>
-          <p:nvPr/>
-        </p:nvSpPr>
-        <p:spPr>
-          <a:xfrm>
-            <a:off x="621792" y="2103120"/>
-            <a:ext cx="7973568" cy="777240"/>
-          </a:xfrm>
-          <a:prstGeom prst="rect">
-            <a:avLst/>
-          </a:prstGeom>
-          <a:solidFill>
-            <a:srgbClr val="F0F4FF"/>
-          </a:solidFill>
-          <a:ln/>
-        </p:spPr>
-      </p:sp>
-      <p:sp>
-        <p:nvSpPr>
-          <p:cNvPr id="12" name="Text 10"/>
-          <p:cNvSpPr/>
-          <p:nvPr/>
-        </p:nvSpPr>
-        <p:spPr>
-          <a:xfrm>
-            <a:off x="822960" y="2148840"/>
-            <a:ext cx="2286000" cy="320040"/>
+          <a:ln w="25400">
+            <a:solidFill>
+              <a:srgbClr val="EF4444"/>
+            </a:solidFill>
+            <a:prstDash val="solid"/>
+          </a:ln>
+          <a:effectLst>
+            <a:outerShdw sx="100000" sy="100000" kx="0" ky="0" algn="bl" rotWithShape="0" blurRad="50800" dist="25400" dir="8100000">
+              <a:srgbClr val="000000">
+                <a:alpha val="12000"/>
+              </a:srgbClr>
+            </a:outerShdw>
+          </a:effectLst>
+        </p:spPr>
+      </p:sp>
+      <p:sp>
+        <p:nvSpPr>
+          <p:cNvPr id="13" name="Text 11"/>
+          <p:cNvSpPr/>
+          <p:nvPr/>
+        </p:nvSpPr>
+        <p:spPr>
+          <a:xfrm>
+            <a:off x="4206240" y="1280160"/>
+            <a:ext cx="1645920" cy="548640"/>
           </a:xfrm>
           <a:prstGeom prst="rect">
             <a:avLst/>
@@ -5689,11 +6080,11 @@
           <a:bodyPr wrap="square" lIns="0" tIns="0" rIns="0" bIns="0" rtlCol="0" anchor="ctr"/>
           <a:lstStyle/>
           <a:p>
-            <a:pPr indent="0" marL="0">
-              <a:buNone/>
-            </a:pPr>
-            <a:r>
-              <a:rPr lang="en-US" sz="1500" b="1" dirty="0">
+            <a:pPr algn="ctr" indent="0" marL="0">
+              <a:buNone/>
+            </a:pPr>
+            <a:r>
+              <a:rPr lang="en-US" sz="1200" b="1" dirty="0">
                 <a:solidFill>
                   <a:srgbClr val="1E2761"/>
                 </a:solidFill>
@@ -5701,22 +6092,39 @@
                 <a:ea typeface="Georgia" pitchFamily="34" charset="-122"/>
                 <a:cs typeface="Georgia" pitchFamily="34" charset="-120"/>
               </a:rPr>
-              <a:t>File Ops Tool</a:t>
-            </a:r>
-            <a:endParaRPr lang="en-US" sz="1500" dirty="0"/>
-          </a:p>
-        </p:txBody>
-      </p:sp>
-      <p:sp>
-        <p:nvSpPr>
-          <p:cNvPr id="13" name="Text 11"/>
-          <p:cNvSpPr/>
-          <p:nvPr/>
-        </p:nvSpPr>
-        <p:spPr>
-          <a:xfrm>
-            <a:off x="822960" y="2423160"/>
-            <a:ext cx="7589520" cy="457200"/>
+              <a:t>AuthZ</a:t>
+            </a:r>
+            <a:endParaRPr lang="en-US" sz="1200" dirty="0"/>
+          </a:p>
+          <a:p>
+            <a:pPr algn="ctr" indent="0" marL="0">
+              <a:buNone/>
+            </a:pPr>
+            <a:r>
+              <a:rPr lang="en-US" sz="1200" b="1" dirty="0">
+                <a:solidFill>
+                  <a:srgbClr val="1E2761"/>
+                </a:solidFill>
+                <a:latin typeface="Georgia" pitchFamily="34" charset="0"/>
+                <a:ea typeface="Georgia" pitchFamily="34" charset="-122"/>
+                <a:cs typeface="Georgia" pitchFamily="34" charset="-120"/>
+              </a:rPr>
+              <a:t>Wall</a:t>
+            </a:r>
+            <a:endParaRPr lang="en-US" sz="1200" dirty="0"/>
+          </a:p>
+        </p:txBody>
+      </p:sp>
+      <p:sp>
+        <p:nvSpPr>
+          <p:cNvPr id="14" name="Text 12"/>
+          <p:cNvSpPr/>
+          <p:nvPr/>
+        </p:nvSpPr>
+        <p:spPr>
+          <a:xfrm>
+            <a:off x="4206240" y="1874520"/>
+            <a:ext cx="1645920" cy="365760"/>
           </a:xfrm>
           <a:prstGeom prst="rect">
             <a:avLst/>
@@ -5728,11 +6136,11 @@
           <a:bodyPr wrap="square" lIns="0" tIns="0" rIns="0" bIns="0" rtlCol="0" anchor="ctr"/>
           <a:lstStyle/>
           <a:p>
-            <a:pPr indent="0" marL="0">
-              <a:buNone/>
-            </a:pPr>
-            <a:r>
-              <a:rPr lang="en-US" sz="1200" dirty="0">
+            <a:pPr algn="ctr" indent="0" marL="0">
+              <a:buNone/>
+            </a:pPr>
+            <a:r>
+              <a:rPr lang="en-US" sz="1000" dirty="0">
                 <a:solidFill>
                   <a:srgbClr val="64748B"/>
                 </a:solidFill>
@@ -5740,16 +6148,126 @@
                 <a:ea typeface="Calibri" pitchFamily="34" charset="-122"/>
                 <a:cs typeface="Calibri" pitchFamily="34" charset="-120"/>
               </a:rPr>
-              <a:t>Read/write/search files</a:t>
+              <a:t>Default-deny</a:t>
+            </a:r>
+            <a:endParaRPr lang="en-US" sz="1000" dirty="0"/>
+          </a:p>
+        </p:txBody>
+      </p:sp>
+      <p:sp>
+        <p:nvSpPr>
+          <p:cNvPr id="15" name="Shape 13"/>
+          <p:cNvSpPr/>
+          <p:nvPr/>
+        </p:nvSpPr>
+        <p:spPr>
+          <a:xfrm>
+            <a:off x="6126480" y="1188720"/>
+            <a:ext cx="1645920" cy="1280160"/>
+          </a:xfrm>
+          <a:prstGeom prst="rect">
+            <a:avLst/>
+          </a:prstGeom>
+          <a:solidFill>
+            <a:srgbClr val="FFFFFF"/>
+          </a:solidFill>
+          <a:ln w="25400">
+            <a:solidFill>
+              <a:srgbClr val="8B5CF6"/>
+            </a:solidFill>
+            <a:prstDash val="solid"/>
+          </a:ln>
+          <a:effectLst>
+            <a:outerShdw sx="100000" sy="100000" kx="0" ky="0" algn="bl" rotWithShape="0" blurRad="50800" dist="25400" dir="8100000">
+              <a:srgbClr val="000000">
+                <a:alpha val="12000"/>
+              </a:srgbClr>
+            </a:outerShdw>
+          </a:effectLst>
+        </p:spPr>
+      </p:sp>
+      <p:sp>
+        <p:nvSpPr>
+          <p:cNvPr id="16" name="Text 14"/>
+          <p:cNvSpPr/>
+          <p:nvPr/>
+        </p:nvSpPr>
+        <p:spPr>
+          <a:xfrm>
+            <a:off x="6126480" y="1280160"/>
+            <a:ext cx="1645920" cy="548640"/>
+          </a:xfrm>
+          <a:prstGeom prst="rect">
+            <a:avLst/>
+          </a:prstGeom>
+          <a:noFill/>
+          <a:ln/>
+        </p:spPr>
+        <p:txBody>
+          <a:bodyPr wrap="square" lIns="0" tIns="0" rIns="0" bIns="0" rtlCol="0" anchor="ctr"/>
+          <a:lstStyle/>
+          <a:p>
+            <a:pPr algn="ctr" indent="0" marL="0">
+              <a:buNone/>
+            </a:pPr>
+            <a:r>
+              <a:rPr lang="en-US" sz="1200" b="1" dirty="0">
+                <a:solidFill>
+                  <a:srgbClr val="1E2761"/>
+                </a:solidFill>
+                <a:latin typeface="Georgia" pitchFamily="34" charset="0"/>
+                <a:ea typeface="Georgia" pitchFamily="34" charset="-122"/>
+                <a:cs typeface="Georgia" pitchFamily="34" charset="-120"/>
+              </a:rPr>
+              <a:t>Tool</a:t>
             </a:r>
             <a:endParaRPr lang="en-US" sz="1200" dirty="0"/>
           </a:p>
           <a:p>
-            <a:pPr indent="0" marL="0">
-              <a:buNone/>
-            </a:pPr>
-            <a:r>
-              <a:rPr lang="en-US" sz="1200" dirty="0">
+            <a:pPr algn="ctr" indent="0" marL="0">
+              <a:buNone/>
+            </a:pPr>
+            <a:r>
+              <a:rPr lang="en-US" sz="1200" b="1" dirty="0">
+                <a:solidFill>
+                  <a:srgbClr val="1E2761"/>
+                </a:solidFill>
+                <a:latin typeface="Georgia" pitchFamily="34" charset="0"/>
+                <a:ea typeface="Georgia" pitchFamily="34" charset="-122"/>
+                <a:cs typeface="Georgia" pitchFamily="34" charset="-120"/>
+              </a:rPr>
+              <a:t>Registry</a:t>
+            </a:r>
+            <a:endParaRPr lang="en-US" sz="1200" dirty="0"/>
+          </a:p>
+        </p:txBody>
+      </p:sp>
+      <p:sp>
+        <p:nvSpPr>
+          <p:cNvPr id="17" name="Text 15"/>
+          <p:cNvSpPr/>
+          <p:nvPr/>
+        </p:nvSpPr>
+        <p:spPr>
+          <a:xfrm>
+            <a:off x="6126480" y="1874520"/>
+            <a:ext cx="1645920" cy="365760"/>
+          </a:xfrm>
+          <a:prstGeom prst="rect">
+            <a:avLst/>
+          </a:prstGeom>
+          <a:noFill/>
+          <a:ln/>
+        </p:spPr>
+        <p:txBody>
+          <a:bodyPr wrap="square" lIns="0" tIns="0" rIns="0" bIns="0" rtlCol="0" anchor="ctr"/>
+          <a:lstStyle/>
+          <a:p>
+            <a:pPr algn="ctr" indent="0" marL="0">
+              <a:buNone/>
+            </a:pPr>
+            <a:r>
+              <a:rPr lang="en-US" sz="1000" dirty="0">
                 <a:solidFill>
                   <a:srgbClr val="64748B"/>
                 </a:solidFill>
@@ -5757,62 +6275,54 @@
                 <a:ea typeface="Calibri" pitchFamily="34" charset="-122"/>
                 <a:cs typeface="Calibri" pitchFamily="34" charset="-120"/>
               </a:rPr>
-              <a:t>Path traversal prevention</a:t>
-            </a:r>
-            <a:endParaRPr lang="en-US" sz="1200" dirty="0"/>
-          </a:p>
-        </p:txBody>
-      </p:sp>
-      <p:sp>
-        <p:nvSpPr>
-          <p:cNvPr id="14" name="Shape 12"/>
-          <p:cNvSpPr/>
-          <p:nvPr/>
-        </p:nvSpPr>
-        <p:spPr>
-          <a:xfrm>
-            <a:off x="548640" y="3108960"/>
-            <a:ext cx="73152" cy="777240"/>
+              <a:t>4 local tools</a:t>
+            </a:r>
+            <a:endParaRPr lang="en-US" sz="1000" dirty="0"/>
+          </a:p>
+        </p:txBody>
+      </p:sp>
+      <p:sp>
+        <p:nvSpPr>
+          <p:cNvPr id="18" name="Shape 16"/>
+          <p:cNvSpPr/>
+          <p:nvPr/>
+        </p:nvSpPr>
+        <p:spPr>
+          <a:xfrm>
+            <a:off x="365760" y="2834640"/>
+            <a:ext cx="1645920" cy="1280160"/>
           </a:xfrm>
           <a:prstGeom prst="rect">
             <a:avLst/>
           </a:prstGeom>
           <a:solidFill>
-            <a:srgbClr val="10B981"/>
+            <a:srgbClr val="FFFFFF"/>
           </a:solidFill>
-          <a:ln/>
-        </p:spPr>
-      </p:sp>
-      <p:sp>
-        <p:nvSpPr>
-          <p:cNvPr id="15" name="Shape 13"/>
-          <p:cNvSpPr/>
-          <p:nvPr/>
-        </p:nvSpPr>
-        <p:spPr>
-          <a:xfrm>
-            <a:off x="621792" y="3108960"/>
-            <a:ext cx="7973568" cy="777240"/>
-          </a:xfrm>
-          <a:prstGeom prst="rect">
-            <a:avLst/>
-          </a:prstGeom>
-          <a:solidFill>
-            <a:srgbClr val="F0F4FF"/>
-          </a:solidFill>
-          <a:ln/>
-        </p:spPr>
-      </p:sp>
-      <p:sp>
-        <p:nvSpPr>
-          <p:cNvPr id="16" name="Text 14"/>
-          <p:cNvSpPr/>
-          <p:nvPr/>
-        </p:nvSpPr>
-        <p:spPr>
-          <a:xfrm>
-            <a:off x="822960" y="3154680"/>
-            <a:ext cx="2286000" cy="320040"/>
+          <a:ln w="25400">
+            <a:solidFill>
+              <a:srgbClr val="F59E0B"/>
+            </a:solidFill>
+            <a:prstDash val="solid"/>
+          </a:ln>
+          <a:effectLst>
+            <a:outerShdw sx="100000" sy="100000" kx="0" ky="0" algn="bl" rotWithShape="0" blurRad="50800" dist="25400" dir="8100000">
+              <a:srgbClr val="000000">
+                <a:alpha val="12000"/>
+              </a:srgbClr>
+            </a:outerShdw>
+          </a:effectLst>
+        </p:spPr>
+      </p:sp>
+      <p:sp>
+        <p:nvSpPr>
+          <p:cNvPr id="19" name="Text 17"/>
+          <p:cNvSpPr/>
+          <p:nvPr/>
+        </p:nvSpPr>
+        <p:spPr>
+          <a:xfrm>
+            <a:off x="365760" y="2926080"/>
+            <a:ext cx="1645920" cy="548640"/>
           </a:xfrm>
           <a:prstGeom prst="rect">
             <a:avLst/>
@@ -5824,11 +6334,11 @@
           <a:bodyPr wrap="square" lIns="0" tIns="0" rIns="0" bIns="0" rtlCol="0" anchor="ctr"/>
           <a:lstStyle/>
           <a:p>
-            <a:pPr indent="0" marL="0">
-              <a:buNone/>
-            </a:pPr>
-            <a:r>
-              <a:rPr lang="en-US" sz="1500" b="1" dirty="0">
+            <a:pPr algn="ctr" indent="0" marL="0">
+              <a:buNone/>
+            </a:pPr>
+            <a:r>
+              <a:rPr lang="en-US" sz="1200" b="1" dirty="0">
                 <a:solidFill>
                   <a:srgbClr val="1E2761"/>
                 </a:solidFill>
@@ -5836,22 +6346,39 @@
                 <a:ea typeface="Georgia" pitchFamily="34" charset="-122"/>
                 <a:cs typeface="Georgia" pitchFamily="34" charset="-120"/>
               </a:rPr>
-              <a:t>Web Access Tool</a:t>
-            </a:r>
-            <a:endParaRPr lang="en-US" sz="1500" dirty="0"/>
-          </a:p>
-        </p:txBody>
-      </p:sp>
-      <p:sp>
-        <p:nvSpPr>
-          <p:cNvPr id="17" name="Text 15"/>
-          <p:cNvSpPr/>
-          <p:nvPr/>
-        </p:nvSpPr>
-        <p:spPr>
-          <a:xfrm>
-            <a:off x="822960" y="3429000"/>
-            <a:ext cx="7589520" cy="457200"/>
+              <a:t>Memory</a:t>
+            </a:r>
+            <a:endParaRPr lang="en-US" sz="1200" dirty="0"/>
+          </a:p>
+          <a:p>
+            <a:pPr algn="ctr" indent="0" marL="0">
+              <a:buNone/>
+            </a:pPr>
+            <a:r>
+              <a:rPr lang="en-US" sz="1200" b="1" dirty="0">
+                <a:solidFill>
+                  <a:srgbClr val="1E2761"/>
+                </a:solidFill>
+                <a:latin typeface="Georgia" pitchFamily="34" charset="0"/>
+                <a:ea typeface="Georgia" pitchFamily="34" charset="-122"/>
+                <a:cs typeface="Georgia" pitchFamily="34" charset="-120"/>
+              </a:rPr>
+              <a:t>Manager</a:t>
+            </a:r>
+            <a:endParaRPr lang="en-US" sz="1200" dirty="0"/>
+          </a:p>
+        </p:txBody>
+      </p:sp>
+      <p:sp>
+        <p:nvSpPr>
+          <p:cNvPr id="20" name="Text 18"/>
+          <p:cNvSpPr/>
+          <p:nvPr/>
+        </p:nvSpPr>
+        <p:spPr>
+          <a:xfrm>
+            <a:off x="365760" y="3520440"/>
+            <a:ext cx="1645920" cy="365760"/>
           </a:xfrm>
           <a:prstGeom prst="rect">
             <a:avLst/>
@@ -5863,11 +6390,11 @@
           <a:bodyPr wrap="square" lIns="0" tIns="0" rIns="0" bIns="0" rtlCol="0" anchor="ctr"/>
           <a:lstStyle/>
           <a:p>
-            <a:pPr indent="0" marL="0">
-              <a:buNone/>
-            </a:pPr>
-            <a:r>
-              <a:rPr lang="en-US" sz="1200" dirty="0">
+            <a:pPr algn="ctr" indent="0" marL="0">
+              <a:buNone/>
+            </a:pPr>
+            <a:r>
+              <a:rPr lang="en-US" sz="1000" dirty="0">
                 <a:solidFill>
                   <a:srgbClr val="64748B"/>
                 </a:solidFill>
@@ -5875,16 +6402,126 @@
                 <a:ea typeface="Calibri" pitchFamily="34" charset="-122"/>
                 <a:cs typeface="Calibri" pitchFamily="34" charset="-120"/>
               </a:rPr>
-              <a:t>Fetch URLs, HTML-to-text</a:t>
+              <a:t>Flat-file MD</a:t>
+            </a:r>
+            <a:endParaRPr lang="en-US" sz="1000" dirty="0"/>
+          </a:p>
+        </p:txBody>
+      </p:sp>
+      <p:sp>
+        <p:nvSpPr>
+          <p:cNvPr id="21" name="Shape 19"/>
+          <p:cNvSpPr/>
+          <p:nvPr/>
+        </p:nvSpPr>
+        <p:spPr>
+          <a:xfrm>
+            <a:off x="2286000" y="2834640"/>
+            <a:ext cx="1645920" cy="1280160"/>
+          </a:xfrm>
+          <a:prstGeom prst="rect">
+            <a:avLst/>
+          </a:prstGeom>
+          <a:solidFill>
+            <a:srgbClr val="FFFFFF"/>
+          </a:solidFill>
+          <a:ln w="25400">
+            <a:solidFill>
+              <a:srgbClr val="F59E0B"/>
+            </a:solidFill>
+            <a:prstDash val="solid"/>
+          </a:ln>
+          <a:effectLst>
+            <a:outerShdw sx="100000" sy="100000" kx="0" ky="0" algn="bl" rotWithShape="0" blurRad="50800" dist="25400" dir="8100000">
+              <a:srgbClr val="000000">
+                <a:alpha val="12000"/>
+              </a:srgbClr>
+            </a:outerShdw>
+          </a:effectLst>
+        </p:spPr>
+      </p:sp>
+      <p:sp>
+        <p:nvSpPr>
+          <p:cNvPr id="22" name="Text 20"/>
+          <p:cNvSpPr/>
+          <p:nvPr/>
+        </p:nvSpPr>
+        <p:spPr>
+          <a:xfrm>
+            <a:off x="2286000" y="2926080"/>
+            <a:ext cx="1645920" cy="548640"/>
+          </a:xfrm>
+          <a:prstGeom prst="rect">
+            <a:avLst/>
+          </a:prstGeom>
+          <a:noFill/>
+          <a:ln/>
+        </p:spPr>
+        <p:txBody>
+          <a:bodyPr wrap="square" lIns="0" tIns="0" rIns="0" bIns="0" rtlCol="0" anchor="ctr"/>
+          <a:lstStyle/>
+          <a:p>
+            <a:pPr algn="ctr" indent="0" marL="0">
+              <a:buNone/>
+            </a:pPr>
+            <a:r>
+              <a:rPr lang="en-US" sz="1200" b="1" dirty="0">
+                <a:solidFill>
+                  <a:srgbClr val="1E2761"/>
+                </a:solidFill>
+                <a:latin typeface="Georgia" pitchFamily="34" charset="0"/>
+                <a:ea typeface="Georgia" pitchFamily="34" charset="-122"/>
+                <a:cs typeface="Georgia" pitchFamily="34" charset="-120"/>
+              </a:rPr>
+              <a:t>Context</a:t>
             </a:r>
             <a:endParaRPr lang="en-US" sz="1200" dirty="0"/>
           </a:p>
           <a:p>
-            <a:pPr indent="0" marL="0">
-              <a:buNone/>
-            </a:pPr>
-            <a:r>
-              <a:rPr lang="en-US" sz="1200" dirty="0">
+            <a:pPr algn="ctr" indent="0" marL="0">
+              <a:buNone/>
+            </a:pPr>
+            <a:r>
+              <a:rPr lang="en-US" sz="1200" b="1" dirty="0">
+                <a:solidFill>
+                  <a:srgbClr val="1E2761"/>
+                </a:solidFill>
+                <a:latin typeface="Georgia" pitchFamily="34" charset="0"/>
+                <a:ea typeface="Georgia" pitchFamily="34" charset="-122"/>
+                <a:cs typeface="Georgia" pitchFamily="34" charset="-120"/>
+              </a:rPr>
+              <a:t>Loader</a:t>
+            </a:r>
+            <a:endParaRPr lang="en-US" sz="1200" dirty="0"/>
+          </a:p>
+        </p:txBody>
+      </p:sp>
+      <p:sp>
+        <p:nvSpPr>
+          <p:cNvPr id="23" name="Text 21"/>
+          <p:cNvSpPr/>
+          <p:nvPr/>
+        </p:nvSpPr>
+        <p:spPr>
+          <a:xfrm>
+            <a:off x="2286000" y="3520440"/>
+            <a:ext cx="1645920" cy="365760"/>
+          </a:xfrm>
+          <a:prstGeom prst="rect">
+            <a:avLst/>
+          </a:prstGeom>
+          <a:noFill/>
+          <a:ln/>
+        </p:spPr>
+        <p:txBody>
+          <a:bodyPr wrap="square" lIns="0" tIns="0" rIns="0" bIns="0" rtlCol="0" anchor="ctr"/>
+          <a:lstStyle/>
+          <a:p>
+            <a:pPr algn="ctr" indent="0" marL="0">
+              <a:buNone/>
+            </a:pPr>
+            <a:r>
+              <a:rPr lang="en-US" sz="1000" dirty="0">
                 <a:solidFill>
                   <a:srgbClr val="64748B"/>
                 </a:solidFill>
@@ -5892,62 +6529,54 @@
                 <a:ea typeface="Calibri" pitchFamily="34" charset="-122"/>
                 <a:cs typeface="Calibri" pitchFamily="34" charset="-120"/>
               </a:rPr>
-              <a:t>15s timeout, 8KB cap</a:t>
-            </a:r>
-            <a:endParaRPr lang="en-US" sz="1200" dirty="0"/>
-          </a:p>
-        </p:txBody>
-      </p:sp>
-      <p:sp>
-        <p:nvSpPr>
-          <p:cNvPr id="18" name="Shape 16"/>
-          <p:cNvSpPr/>
-          <p:nvPr/>
-        </p:nvSpPr>
-        <p:spPr>
-          <a:xfrm>
-            <a:off x="548640" y="4114800"/>
-            <a:ext cx="73152" cy="777240"/>
+              <a:t>Rich injection</a:t>
+            </a:r>
+            <a:endParaRPr lang="en-US" sz="1000" dirty="0"/>
+          </a:p>
+        </p:txBody>
+      </p:sp>
+      <p:sp>
+        <p:nvSpPr>
+          <p:cNvPr id="24" name="Shape 22"/>
+          <p:cNvSpPr/>
+          <p:nvPr/>
+        </p:nvSpPr>
+        <p:spPr>
+          <a:xfrm>
+            <a:off x="4206240" y="2834640"/>
+            <a:ext cx="1645920" cy="1280160"/>
           </a:xfrm>
           <a:prstGeom prst="rect">
             <a:avLst/>
           </a:prstGeom>
           <a:solidFill>
-            <a:srgbClr val="8B5CF6"/>
+            <a:srgbClr val="FFFFFF"/>
           </a:solidFill>
-          <a:ln/>
-        </p:spPr>
-      </p:sp>
-      <p:sp>
-        <p:nvSpPr>
-          <p:cNvPr id="19" name="Shape 17"/>
-          <p:cNvSpPr/>
-          <p:nvPr/>
-        </p:nvSpPr>
-        <p:spPr>
-          <a:xfrm>
-            <a:off x="621792" y="4114800"/>
-            <a:ext cx="7973568" cy="777240"/>
-          </a:xfrm>
-          <a:prstGeom prst="rect">
-            <a:avLst/>
-          </a:prstGeom>
-          <a:solidFill>
-            <a:srgbClr val="F0F4FF"/>
-          </a:solidFill>
-          <a:ln/>
-        </p:spPr>
-      </p:sp>
-      <p:sp>
-        <p:nvSpPr>
-          <p:cNvPr id="20" name="Text 18"/>
-          <p:cNvSpPr/>
-          <p:nvPr/>
-        </p:nvSpPr>
-        <p:spPr>
-          <a:xfrm>
-            <a:off x="822960" y="4160520"/>
-            <a:ext cx="2286000" cy="320040"/>
+          <a:ln w="25400">
+            <a:solidFill>
+              <a:srgbClr val="10B981"/>
+            </a:solidFill>
+            <a:prstDash val="solid"/>
+          </a:ln>
+          <a:effectLst>
+            <a:outerShdw sx="100000" sy="100000" kx="0" ky="0" algn="bl" rotWithShape="0" blurRad="50800" dist="25400" dir="8100000">
+              <a:srgbClr val="000000">
+                <a:alpha val="12000"/>
+              </a:srgbClr>
+            </a:outerShdw>
+          </a:effectLst>
+        </p:spPr>
+      </p:sp>
+      <p:sp>
+        <p:nvSpPr>
+          <p:cNvPr id="25" name="Text 23"/>
+          <p:cNvSpPr/>
+          <p:nvPr/>
+        </p:nvSpPr>
+        <p:spPr>
+          <a:xfrm>
+            <a:off x="4206240" y="2926080"/>
+            <a:ext cx="1645920" cy="548640"/>
           </a:xfrm>
           <a:prstGeom prst="rect">
             <a:avLst/>
@@ -5959,11 +6588,11 @@
           <a:bodyPr wrap="square" lIns="0" tIns="0" rIns="0" bIns="0" rtlCol="0" anchor="ctr"/>
           <a:lstStyle/>
           <a:p>
-            <a:pPr indent="0" marL="0">
-              <a:buNone/>
-            </a:pPr>
-            <a:r>
-              <a:rPr lang="en-US" sz="1500" b="1" dirty="0">
+            <a:pPr algn="ctr" indent="0" marL="0">
+              <a:buNone/>
+            </a:pPr>
+            <a:r>
+              <a:rPr lang="en-US" sz="1200" b="1" dirty="0">
                 <a:solidFill>
                   <a:srgbClr val="1E2761"/>
                 </a:solidFill>
@@ -5971,22 +6600,22 @@
                 <a:ea typeface="Georgia" pitchFamily="34" charset="-122"/>
                 <a:cs typeface="Georgia" pitchFamily="34" charset="-120"/>
               </a:rPr>
-              <a:t>Memory Tool</a:t>
-            </a:r>
-            <a:endParaRPr lang="en-US" sz="1500" dirty="0"/>
-          </a:p>
-        </p:txBody>
-      </p:sp>
-      <p:sp>
-        <p:nvSpPr>
-          <p:cNvPr id="21" name="Text 19"/>
-          <p:cNvSpPr/>
-          <p:nvPr/>
-        </p:nvSpPr>
-        <p:spPr>
-          <a:xfrm>
-            <a:off x="822960" y="4434840"/>
-            <a:ext cx="7589520" cy="457200"/>
+              <a:t>Scheduler</a:t>
+            </a:r>
+            <a:endParaRPr lang="en-US" sz="1200" dirty="0"/>
+          </a:p>
+        </p:txBody>
+      </p:sp>
+      <p:sp>
+        <p:nvSpPr>
+          <p:cNvPr id="26" name="Text 24"/>
+          <p:cNvSpPr/>
+          <p:nvPr/>
+        </p:nvSpPr>
+        <p:spPr>
+          <a:xfrm>
+            <a:off x="4206240" y="3520440"/>
+            <a:ext cx="1645920" cy="365760"/>
           </a:xfrm>
           <a:prstGeom prst="rect">
             <a:avLst/>
@@ -5998,11 +6627,11 @@
           <a:bodyPr wrap="square" lIns="0" tIns="0" rIns="0" bIns="0" rtlCol="0" anchor="ctr"/>
           <a:lstStyle/>
           <a:p>
-            <a:pPr indent="0" marL="0">
-              <a:buNone/>
-            </a:pPr>
-            <a:r>
-              <a:rPr lang="en-US" sz="1200" dirty="0">
+            <a:pPr algn="ctr" indent="0" marL="0">
+              <a:buNone/>
+            </a:pPr>
+            <a:r>
+              <a:rPr lang="en-US" sz="1000" dirty="0">
                 <a:solidFill>
                   <a:srgbClr val="64748B"/>
                 </a:solidFill>
@@ -6010,16 +6639,126 @@
                 <a:ea typeface="Calibri" pitchFamily="34" charset="-122"/>
                 <a:cs typeface="Calibri" pitchFamily="34" charset="-120"/>
               </a:rPr>
-              <a:t>Store facts, recall, list</a:t>
+              <a:t>node-cron jobs</a:t>
+            </a:r>
+            <a:endParaRPr lang="en-US" sz="1000" dirty="0"/>
+          </a:p>
+        </p:txBody>
+      </p:sp>
+      <p:sp>
+        <p:nvSpPr>
+          <p:cNvPr id="27" name="Shape 25"/>
+          <p:cNvSpPr/>
+          <p:nvPr/>
+        </p:nvSpPr>
+        <p:spPr>
+          <a:xfrm>
+            <a:off x="6126480" y="2834640"/>
+            <a:ext cx="1645920" cy="1280160"/>
+          </a:xfrm>
+          <a:prstGeom prst="rect">
+            <a:avLst/>
+          </a:prstGeom>
+          <a:solidFill>
+            <a:srgbClr val="FFFFFF"/>
+          </a:solidFill>
+          <a:ln w="25400">
+            <a:solidFill>
+              <a:srgbClr val="94A3B8"/>
+            </a:solidFill>
+            <a:prstDash val="solid"/>
+          </a:ln>
+          <a:effectLst>
+            <a:outerShdw sx="100000" sy="100000" kx="0" ky="0" algn="bl" rotWithShape="0" blurRad="50800" dist="25400" dir="8100000">
+              <a:srgbClr val="000000">
+                <a:alpha val="12000"/>
+              </a:srgbClr>
+            </a:outerShdw>
+          </a:effectLst>
+        </p:spPr>
+      </p:sp>
+      <p:sp>
+        <p:nvSpPr>
+          <p:cNvPr id="28" name="Text 26"/>
+          <p:cNvSpPr/>
+          <p:nvPr/>
+        </p:nvSpPr>
+        <p:spPr>
+          <a:xfrm>
+            <a:off x="6126480" y="2926080"/>
+            <a:ext cx="1645920" cy="548640"/>
+          </a:xfrm>
+          <a:prstGeom prst="rect">
+            <a:avLst/>
+          </a:prstGeom>
+          <a:noFill/>
+          <a:ln/>
+        </p:spPr>
+        <p:txBody>
+          <a:bodyPr wrap="square" lIns="0" tIns="0" rIns="0" bIns="0" rtlCol="0" anchor="ctr"/>
+          <a:lstStyle/>
+          <a:p>
+            <a:pPr algn="ctr" indent="0" marL="0">
+              <a:buNone/>
+            </a:pPr>
+            <a:r>
+              <a:rPr lang="en-US" sz="1200" b="1" dirty="0">
+                <a:solidFill>
+                  <a:srgbClr val="1E2761"/>
+                </a:solidFill>
+                <a:latin typeface="Georgia" pitchFamily="34" charset="0"/>
+                <a:ea typeface="Georgia" pitchFamily="34" charset="-122"/>
+                <a:cs typeface="Georgia" pitchFamily="34" charset="-120"/>
+              </a:rPr>
+              <a:t>Audit</a:t>
             </a:r>
             <a:endParaRPr lang="en-US" sz="1200" dirty="0"/>
           </a:p>
           <a:p>
-            <a:pPr indent="0" marL="0">
-              <a:buNone/>
-            </a:pPr>
-            <a:r>
-              <a:rPr lang="en-US" sz="1200" dirty="0">
+            <a:pPr algn="ctr" indent="0" marL="0">
+              <a:buNone/>
+            </a:pPr>
+            <a:r>
+              <a:rPr lang="en-US" sz="1200" b="1" dirty="0">
+                <a:solidFill>
+                  <a:srgbClr val="1E2761"/>
+                </a:solidFill>
+                <a:latin typeface="Georgia" pitchFamily="34" charset="0"/>
+                <a:ea typeface="Georgia" pitchFamily="34" charset="-122"/>
+                <a:cs typeface="Georgia" pitchFamily="34" charset="-120"/>
+              </a:rPr>
+              <a:t>Log</a:t>
+            </a:r>
+            <a:endParaRPr lang="en-US" sz="1200" dirty="0"/>
+          </a:p>
+        </p:txBody>
+      </p:sp>
+      <p:sp>
+        <p:nvSpPr>
+          <p:cNvPr id="29" name="Text 27"/>
+          <p:cNvSpPr/>
+          <p:nvPr/>
+        </p:nvSpPr>
+        <p:spPr>
+          <a:xfrm>
+            <a:off x="6126480" y="3520440"/>
+            <a:ext cx="1645920" cy="365760"/>
+          </a:xfrm>
+          <a:prstGeom prst="rect">
+            <a:avLst/>
+          </a:prstGeom>
+          <a:noFill/>
+          <a:ln/>
+        </p:spPr>
+        <p:txBody>
+          <a:bodyPr wrap="square" lIns="0" tIns="0" rIns="0" bIns="0" rtlCol="0" anchor="ctr"/>
+          <a:lstStyle/>
+          <a:p>
+            <a:pPr algn="ctr" indent="0" marL="0">
+              <a:buNone/>
+            </a:pPr>
+            <a:r>
+              <a:rPr lang="en-US" sz="1000" dirty="0">
                 <a:solidFill>
                   <a:srgbClr val="64748B"/>
                 </a:solidFill>
@@ -6027,7 +6766,115 @@
                 <a:ea typeface="Calibri" pitchFamily="34" charset="-122"/>
                 <a:cs typeface="Calibri" pitchFamily="34" charset="-120"/>
               </a:rPr>
-              <a:t>Markdown persistence</a:t>
+              <a:t>Append-only</a:t>
+            </a:r>
+            <a:endParaRPr lang="en-US" sz="1000" dirty="0"/>
+          </a:p>
+        </p:txBody>
+      </p:sp>
+      <p:sp>
+        <p:nvSpPr>
+          <p:cNvPr id="30" name="Shape 28"/>
+          <p:cNvSpPr/>
+          <p:nvPr/>
+        </p:nvSpPr>
+        <p:spPr>
+          <a:xfrm>
+            <a:off x="2011680" y="1828800"/>
+            <a:ext cx="274320" cy="0"/>
+          </a:xfrm>
+          <a:prstGeom prst="line">
+            <a:avLst/>
+          </a:prstGeom>
+          <a:noFill/>
+          <a:ln w="19050">
+            <a:solidFill>
+              <a:srgbClr val="94A3B8"/>
+            </a:solidFill>
+            <a:prstDash val="solid"/>
+          </a:ln>
+        </p:spPr>
+      </p:sp>
+      <p:sp>
+        <p:nvSpPr>
+          <p:cNvPr id="31" name="Shape 29"/>
+          <p:cNvSpPr/>
+          <p:nvPr/>
+        </p:nvSpPr>
+        <p:spPr>
+          <a:xfrm>
+            <a:off x="3931920" y="1828800"/>
+            <a:ext cx="274320" cy="0"/>
+          </a:xfrm>
+          <a:prstGeom prst="line">
+            <a:avLst/>
+          </a:prstGeom>
+          <a:noFill/>
+          <a:ln w="19050">
+            <a:solidFill>
+              <a:srgbClr val="94A3B8"/>
+            </a:solidFill>
+            <a:prstDash val="solid"/>
+          </a:ln>
+        </p:spPr>
+      </p:sp>
+      <p:sp>
+        <p:nvSpPr>
+          <p:cNvPr id="32" name="Shape 30"/>
+          <p:cNvSpPr/>
+          <p:nvPr/>
+        </p:nvSpPr>
+        <p:spPr>
+          <a:xfrm>
+            <a:off x="5852160" y="1828800"/>
+            <a:ext cx="274320" cy="0"/>
+          </a:xfrm>
+          <a:prstGeom prst="line">
+            <a:avLst/>
+          </a:prstGeom>
+          <a:noFill/>
+          <a:ln w="19050">
+            <a:solidFill>
+              <a:srgbClr val="94A3B8"/>
+            </a:solidFill>
+            <a:prstDash val="solid"/>
+          </a:ln>
+        </p:spPr>
+      </p:sp>
+      <p:sp>
+        <p:nvSpPr>
+          <p:cNvPr id="33" name="Text 31"/>
+          <p:cNvSpPr/>
+          <p:nvPr/>
+        </p:nvSpPr>
+        <p:spPr>
+          <a:xfrm>
+            <a:off x="365760" y="4297680"/>
+            <a:ext cx="8046720" cy="365760"/>
+          </a:xfrm>
+          <a:prstGeom prst="rect">
+            <a:avLst/>
+          </a:prstGeom>
+          <a:noFill/>
+          <a:ln/>
+        </p:spPr>
+        <p:txBody>
+          <a:bodyPr wrap="square" rtlCol="0" anchor="ctr"/>
+          <a:lstStyle/>
+          <a:p>
+            <a:pPr algn="ctr" indent="0" marL="0">
+              <a:buNone/>
+            </a:pPr>
+            <a:r>
+              <a:rPr lang="en-US" sz="1200" i="1" dirty="0">
+                <a:solidFill>
+                  <a:srgbClr val="64748B"/>
+                </a:solidFill>
+                <a:latin typeface="Calibri" pitchFamily="34" charset="0"/>
+                <a:ea typeface="Calibri" pitchFamily="34" charset="-122"/>
+                <a:cs typeface="Calibri" pitchFamily="34" charset="-120"/>
+              </a:rPr>
+              <a:t>Pipeline: Message → Agent → AuthZ → Tool → Response  |  20 files, ~1,800 LOC, 0 database</a:t>
             </a:r>
             <a:endParaRPr lang="en-US" sz="1200" dirty="0"/>
           </a:p>
@@ -6118,7 +6965,7 @@
                 <a:ea typeface="Georgia" pitchFamily="34" charset="-122"/>
                 <a:cs typeface="Georgia" pitchFamily="34" charset="-120"/>
               </a:rPr>
-              <a:t>Multi-Provider LLM Support</a:t>
+              <a:t>System Design: Tools &amp; Memory</a:t>
             </a:r>
             <a:endParaRPr lang="en-US" sz="2800" dirty="0"/>
           </a:p>
@@ -6183,9 +7030,1538 @@
           </a:p>
         </p:txBody>
       </p:sp>
+      <p:sp>
+        <p:nvSpPr>
+          <p:cNvPr id="6" name="Shape 4"/>
+          <p:cNvSpPr/>
+          <p:nvPr/>
+        </p:nvSpPr>
+        <p:spPr>
+          <a:xfrm>
+            <a:off x="548640" y="1051560"/>
+            <a:ext cx="73152" cy="685800"/>
+          </a:xfrm>
+          <a:prstGeom prst="rect">
+            <a:avLst/>
+          </a:prstGeom>
+          <a:solidFill>
+            <a:srgbClr val="3B82F6"/>
+          </a:solidFill>
+          <a:ln/>
+        </p:spPr>
+      </p:sp>
+      <p:sp>
+        <p:nvSpPr>
+          <p:cNvPr id="7" name="Shape 5"/>
+          <p:cNvSpPr/>
+          <p:nvPr/>
+        </p:nvSpPr>
+        <p:spPr>
+          <a:xfrm>
+            <a:off x="621792" y="1051560"/>
+            <a:ext cx="4407408" cy="685800"/>
+          </a:xfrm>
+          <a:prstGeom prst="rect">
+            <a:avLst/>
+          </a:prstGeom>
+          <a:solidFill>
+            <a:srgbClr val="F0F4FF"/>
+          </a:solidFill>
+          <a:ln/>
+        </p:spPr>
+      </p:sp>
+      <p:sp>
+        <p:nvSpPr>
+          <p:cNvPr id="8" name="Text 6"/>
+          <p:cNvSpPr/>
+          <p:nvPr/>
+        </p:nvSpPr>
+        <p:spPr>
+          <a:xfrm>
+            <a:off x="777240" y="1069848"/>
+            <a:ext cx="1371600" cy="274320"/>
+          </a:xfrm>
+          <a:prstGeom prst="rect">
+            <a:avLst/>
+          </a:prstGeom>
+          <a:noFill/>
+          <a:ln/>
+        </p:spPr>
+        <p:txBody>
+          <a:bodyPr wrap="square" lIns="0" tIns="0" rIns="0" bIns="0" rtlCol="0" anchor="ctr"/>
+          <a:lstStyle/>
+          <a:p>
+            <a:pPr indent="0" marL="0">
+              <a:buNone/>
+            </a:pPr>
+            <a:r>
+              <a:rPr lang="en-US" sz="1400" b="1" dirty="0">
+                <a:solidFill>
+                  <a:srgbClr val="1E2761"/>
+                </a:solidFill>
+                <a:latin typeface="Georgia" pitchFamily="34" charset="0"/>
+                <a:ea typeface="Georgia" pitchFamily="34" charset="-122"/>
+                <a:cs typeface="Georgia" pitchFamily="34" charset="-120"/>
+              </a:rPr>
+              <a:t>File Ops</a:t>
+            </a:r>
+            <a:endParaRPr lang="en-US" sz="1400" dirty="0"/>
+          </a:p>
+        </p:txBody>
+      </p:sp>
+      <p:sp>
+        <p:nvSpPr>
+          <p:cNvPr id="9" name="Text 7"/>
+          <p:cNvSpPr/>
+          <p:nvPr/>
+        </p:nvSpPr>
+        <p:spPr>
+          <a:xfrm>
+            <a:off x="777240" y="1325880"/>
+            <a:ext cx="4114800" cy="384048"/>
+          </a:xfrm>
+          <a:prstGeom prst="rect">
+            <a:avLst/>
+          </a:prstGeom>
+          <a:noFill/>
+          <a:ln/>
+        </p:spPr>
+        <p:txBody>
+          <a:bodyPr wrap="square" lIns="0" tIns="0" rIns="0" bIns="0" rtlCol="0" anchor="ctr"/>
+          <a:lstStyle/>
+          <a:p>
+            <a:pPr indent="0" marL="0">
+              <a:buNone/>
+            </a:pPr>
+            <a:r>
+              <a:rPr lang="en-US" sz="1100" dirty="0">
+                <a:solidFill>
+                  <a:srgbClr val="64748B"/>
+                </a:solidFill>
+                <a:latin typeface="Calibri" pitchFamily="34" charset="0"/>
+                <a:ea typeface="Calibri" pitchFamily="34" charset="-122"/>
+                <a:cs typeface="Calibri" pitchFamily="34" charset="-120"/>
+              </a:rPr>
+              <a:t>Read/write/append/list</a:t>
+            </a:r>
+            <a:endParaRPr lang="en-US" sz="1100" dirty="0"/>
+          </a:p>
+          <a:p>
+            <a:pPr indent="0" marL="0">
+              <a:buNone/>
+            </a:pPr>
+            <a:r>
+              <a:rPr lang="en-US" sz="1100" dirty="0">
+                <a:solidFill>
+                  <a:srgbClr val="64748B"/>
+                </a:solidFill>
+                <a:latin typeface="Calibri" pitchFamily="34" charset="0"/>
+                <a:ea typeface="Calibri" pitchFamily="34" charset="-122"/>
+                <a:cs typeface="Calibri" pitchFamily="34" charset="-120"/>
+              </a:rPr>
+              <a:t>Path-restricted to data/ &amp; notes/</a:t>
+            </a:r>
+            <a:endParaRPr lang="en-US" sz="1100" dirty="0"/>
+          </a:p>
+        </p:txBody>
+      </p:sp>
+      <p:sp>
+        <p:nvSpPr>
+          <p:cNvPr id="10" name="Shape 8"/>
+          <p:cNvSpPr/>
+          <p:nvPr/>
+        </p:nvSpPr>
+        <p:spPr>
+          <a:xfrm>
+            <a:off x="548640" y="1874520"/>
+            <a:ext cx="73152" cy="685800"/>
+          </a:xfrm>
+          <a:prstGeom prst="rect">
+            <a:avLst/>
+          </a:prstGeom>
+          <a:solidFill>
+            <a:srgbClr val="10B981"/>
+          </a:solidFill>
+          <a:ln/>
+        </p:spPr>
+      </p:sp>
+      <p:sp>
+        <p:nvSpPr>
+          <p:cNvPr id="11" name="Shape 9"/>
+          <p:cNvSpPr/>
+          <p:nvPr/>
+        </p:nvSpPr>
+        <p:spPr>
+          <a:xfrm>
+            <a:off x="621792" y="1874520"/>
+            <a:ext cx="4407408" cy="685800"/>
+          </a:xfrm>
+          <a:prstGeom prst="rect">
+            <a:avLst/>
+          </a:prstGeom>
+          <a:solidFill>
+            <a:srgbClr val="F0F4FF"/>
+          </a:solidFill>
+          <a:ln/>
+        </p:spPr>
+      </p:sp>
+      <p:sp>
+        <p:nvSpPr>
+          <p:cNvPr id="12" name="Text 10"/>
+          <p:cNvSpPr/>
+          <p:nvPr/>
+        </p:nvSpPr>
+        <p:spPr>
+          <a:xfrm>
+            <a:off x="777240" y="1892808"/>
+            <a:ext cx="1371600" cy="274320"/>
+          </a:xfrm>
+          <a:prstGeom prst="rect">
+            <a:avLst/>
+          </a:prstGeom>
+          <a:noFill/>
+          <a:ln/>
+        </p:spPr>
+        <p:txBody>
+          <a:bodyPr wrap="square" lIns="0" tIns="0" rIns="0" bIns="0" rtlCol="0" anchor="ctr"/>
+          <a:lstStyle/>
+          <a:p>
+            <a:pPr indent="0" marL="0">
+              <a:buNone/>
+            </a:pPr>
+            <a:r>
+              <a:rPr lang="en-US" sz="1400" b="1" dirty="0">
+                <a:solidFill>
+                  <a:srgbClr val="1E2761"/>
+                </a:solidFill>
+                <a:latin typeface="Georgia" pitchFamily="34" charset="0"/>
+                <a:ea typeface="Georgia" pitchFamily="34" charset="-122"/>
+                <a:cs typeface="Georgia" pitchFamily="34" charset="-120"/>
+              </a:rPr>
+              <a:t>Todo</a:t>
+            </a:r>
+            <a:endParaRPr lang="en-US" sz="1400" dirty="0"/>
+          </a:p>
+        </p:txBody>
+      </p:sp>
+      <p:sp>
+        <p:nvSpPr>
+          <p:cNvPr id="13" name="Text 11"/>
+          <p:cNvSpPr/>
+          <p:nvPr/>
+        </p:nvSpPr>
+        <p:spPr>
+          <a:xfrm>
+            <a:off x="777240" y="2148840"/>
+            <a:ext cx="4114800" cy="384048"/>
+          </a:xfrm>
+          <a:prstGeom prst="rect">
+            <a:avLst/>
+          </a:prstGeom>
+          <a:noFill/>
+          <a:ln/>
+        </p:spPr>
+        <p:txBody>
+          <a:bodyPr wrap="square" lIns="0" tIns="0" rIns="0" bIns="0" rtlCol="0" anchor="ctr"/>
+          <a:lstStyle/>
+          <a:p>
+            <a:pPr indent="0" marL="0">
+              <a:buNone/>
+            </a:pPr>
+            <a:r>
+              <a:rPr lang="en-US" sz="1100" dirty="0">
+                <a:solidFill>
+                  <a:srgbClr val="64748B"/>
+                </a:solidFill>
+                <a:latin typeface="Calibri" pitchFamily="34" charset="0"/>
+                <a:ea typeface="Calibri" pitchFamily="34" charset="-122"/>
+                <a:cs typeface="Calibri" pitchFamily="34" charset="-120"/>
+              </a:rPr>
+              <a:t>Add/list/complete tasks</a:t>
+            </a:r>
+            <a:endParaRPr lang="en-US" sz="1100" dirty="0"/>
+          </a:p>
+          <a:p>
+            <a:pPr indent="0" marL="0">
+              <a:buNone/>
+            </a:pPr>
+            <a:r>
+              <a:rPr lang="en-US" sz="1100" dirty="0">
+                <a:solidFill>
+                  <a:srgbClr val="64748B"/>
+                </a:solidFill>
+                <a:latin typeface="Calibri" pitchFamily="34" charset="0"/>
+                <a:ea typeface="Calibri" pitchFamily="34" charset="-122"/>
+                <a:cs typeface="Calibri" pitchFamily="34" charset="-120"/>
+              </a:rPr>
+              <a:t>JSON persistence, UUID IDs, priorities</a:t>
+            </a:r>
+            <a:endParaRPr lang="en-US" sz="1100" dirty="0"/>
+          </a:p>
+        </p:txBody>
+      </p:sp>
+      <p:sp>
+        <p:nvSpPr>
+          <p:cNvPr id="14" name="Shape 12"/>
+          <p:cNvSpPr/>
+          <p:nvPr/>
+        </p:nvSpPr>
+        <p:spPr>
+          <a:xfrm>
+            <a:off x="548640" y="2697480"/>
+            <a:ext cx="73152" cy="685800"/>
+          </a:xfrm>
+          <a:prstGeom prst="rect">
+            <a:avLst/>
+          </a:prstGeom>
+          <a:solidFill>
+            <a:srgbClr val="8B5CF6"/>
+          </a:solidFill>
+          <a:ln/>
+        </p:spPr>
+      </p:sp>
+      <p:sp>
+        <p:nvSpPr>
+          <p:cNvPr id="15" name="Shape 13"/>
+          <p:cNvSpPr/>
+          <p:nvPr/>
+        </p:nvSpPr>
+        <p:spPr>
+          <a:xfrm>
+            <a:off x="621792" y="2697480"/>
+            <a:ext cx="4407408" cy="685800"/>
+          </a:xfrm>
+          <a:prstGeom prst="rect">
+            <a:avLst/>
+          </a:prstGeom>
+          <a:solidFill>
+            <a:srgbClr val="F0F4FF"/>
+          </a:solidFill>
+          <a:ln/>
+        </p:spPr>
+      </p:sp>
+      <p:sp>
+        <p:nvSpPr>
+          <p:cNvPr id="16" name="Text 14"/>
+          <p:cNvSpPr/>
+          <p:nvPr/>
+        </p:nvSpPr>
+        <p:spPr>
+          <a:xfrm>
+            <a:off x="777240" y="2715768"/>
+            <a:ext cx="1371600" cy="274320"/>
+          </a:xfrm>
+          <a:prstGeom prst="rect">
+            <a:avLst/>
+          </a:prstGeom>
+          <a:noFill/>
+          <a:ln/>
+        </p:spPr>
+        <p:txBody>
+          <a:bodyPr wrap="square" lIns="0" tIns="0" rIns="0" bIns="0" rtlCol="0" anchor="ctr"/>
+          <a:lstStyle/>
+          <a:p>
+            <a:pPr indent="0" marL="0">
+              <a:buNone/>
+            </a:pPr>
+            <a:r>
+              <a:rPr lang="en-US" sz="1400" b="1" dirty="0">
+                <a:solidFill>
+                  <a:srgbClr val="1E2761"/>
+                </a:solidFill>
+                <a:latin typeface="Georgia" pitchFamily="34" charset="0"/>
+                <a:ea typeface="Georgia" pitchFamily="34" charset="-122"/>
+                <a:cs typeface="Georgia" pitchFamily="34" charset="-120"/>
+              </a:rPr>
+              <a:t>Notes</a:t>
+            </a:r>
+            <a:endParaRPr lang="en-US" sz="1400" dirty="0"/>
+          </a:p>
+        </p:txBody>
+      </p:sp>
+      <p:sp>
+        <p:nvSpPr>
+          <p:cNvPr id="17" name="Text 15"/>
+          <p:cNvSpPr/>
+          <p:nvPr/>
+        </p:nvSpPr>
+        <p:spPr>
+          <a:xfrm>
+            <a:off x="777240" y="2971800"/>
+            <a:ext cx="4114800" cy="384048"/>
+          </a:xfrm>
+          <a:prstGeom prst="rect">
+            <a:avLst/>
+          </a:prstGeom>
+          <a:noFill/>
+          <a:ln/>
+        </p:spPr>
+        <p:txBody>
+          <a:bodyPr wrap="square" lIns="0" tIns="0" rIns="0" bIns="0" rtlCol="0" anchor="ctr"/>
+          <a:lstStyle/>
+          <a:p>
+            <a:pPr indent="0" marL="0">
+              <a:buNone/>
+            </a:pPr>
+            <a:r>
+              <a:rPr lang="en-US" sz="1100" dirty="0">
+                <a:solidFill>
+                  <a:srgbClr val="64748B"/>
+                </a:solidFill>
+                <a:latin typeface="Calibri" pitchFamily="34" charset="0"/>
+                <a:ea typeface="Calibri" pitchFamily="34" charset="-122"/>
+                <a:cs typeface="Calibri" pitchFamily="34" charset="-120"/>
+              </a:rPr>
+              <a:t>Daily journal (YYYY-MM-DD.md)</a:t>
+            </a:r>
+            <a:endParaRPr lang="en-US" sz="1100" dirty="0"/>
+          </a:p>
+          <a:p>
+            <a:pPr indent="0" marL="0">
+              <a:buNone/>
+            </a:pPr>
+            <a:r>
+              <a:rPr lang="en-US" sz="1100" dirty="0">
+                <a:solidFill>
+                  <a:srgbClr val="64748B"/>
+                </a:solidFill>
+                <a:latin typeface="Calibri" pitchFamily="34" charset="0"/>
+                <a:ea typeface="Calibri" pitchFamily="34" charset="-122"/>
+                <a:cs typeface="Calibri" pitchFamily="34" charset="-120"/>
+              </a:rPr>
+              <a:t>Weekly summaries, timestamped entries</a:t>
+            </a:r>
+            <a:endParaRPr lang="en-US" sz="1100" dirty="0"/>
+          </a:p>
+        </p:txBody>
+      </p:sp>
+      <p:sp>
+        <p:nvSpPr>
+          <p:cNvPr id="18" name="Shape 16"/>
+          <p:cNvSpPr/>
+          <p:nvPr/>
+        </p:nvSpPr>
+        <p:spPr>
+          <a:xfrm>
+            <a:off x="548640" y="3520440"/>
+            <a:ext cx="73152" cy="685800"/>
+          </a:xfrm>
+          <a:prstGeom prst="rect">
+            <a:avLst/>
+          </a:prstGeom>
+          <a:solidFill>
+            <a:srgbClr val="F59E0B"/>
+          </a:solidFill>
+          <a:ln/>
+        </p:spPr>
+      </p:sp>
+      <p:sp>
+        <p:nvSpPr>
+          <p:cNvPr id="19" name="Shape 17"/>
+          <p:cNvSpPr/>
+          <p:nvPr/>
+        </p:nvSpPr>
+        <p:spPr>
+          <a:xfrm>
+            <a:off x="621792" y="3520440"/>
+            <a:ext cx="4407408" cy="685800"/>
+          </a:xfrm>
+          <a:prstGeom prst="rect">
+            <a:avLst/>
+          </a:prstGeom>
+          <a:solidFill>
+            <a:srgbClr val="F0F4FF"/>
+          </a:solidFill>
+          <a:ln/>
+        </p:spPr>
+      </p:sp>
+      <p:sp>
+        <p:nvSpPr>
+          <p:cNvPr id="20" name="Text 18"/>
+          <p:cNvSpPr/>
+          <p:nvPr/>
+        </p:nvSpPr>
+        <p:spPr>
+          <a:xfrm>
+            <a:off x="777240" y="3538728"/>
+            <a:ext cx="1371600" cy="274320"/>
+          </a:xfrm>
+          <a:prstGeom prst="rect">
+            <a:avLst/>
+          </a:prstGeom>
+          <a:noFill/>
+          <a:ln/>
+        </p:spPr>
+        <p:txBody>
+          <a:bodyPr wrap="square" lIns="0" tIns="0" rIns="0" bIns="0" rtlCol="0" anchor="ctr"/>
+          <a:lstStyle/>
+          <a:p>
+            <a:pPr indent="0" marL="0">
+              <a:buNone/>
+            </a:pPr>
+            <a:r>
+              <a:rPr lang="en-US" sz="1400" b="1" dirty="0">
+                <a:solidFill>
+                  <a:srgbClr val="1E2761"/>
+                </a:solidFill>
+                <a:latin typeface="Georgia" pitchFamily="34" charset="0"/>
+                <a:ea typeface="Georgia" pitchFamily="34" charset="-122"/>
+                <a:cs typeface="Georgia" pitchFamily="34" charset="-120"/>
+              </a:rPr>
+              <a:t>Time</a:t>
+            </a:r>
+            <a:endParaRPr lang="en-US" sz="1400" dirty="0"/>
+          </a:p>
+        </p:txBody>
+      </p:sp>
+      <p:sp>
+        <p:nvSpPr>
+          <p:cNvPr id="21" name="Text 19"/>
+          <p:cNvSpPr/>
+          <p:nvPr/>
+        </p:nvSpPr>
+        <p:spPr>
+          <a:xfrm>
+            <a:off x="777240" y="3794760"/>
+            <a:ext cx="4114800" cy="384048"/>
+          </a:xfrm>
+          <a:prstGeom prst="rect">
+            <a:avLst/>
+          </a:prstGeom>
+          <a:noFill/>
+          <a:ln/>
+        </p:spPr>
+        <p:txBody>
+          <a:bodyPr wrap="square" lIns="0" tIns="0" rIns="0" bIns="0" rtlCol="0" anchor="ctr"/>
+          <a:lstStyle/>
+          <a:p>
+            <a:pPr indent="0" marL="0">
+              <a:buNone/>
+            </a:pPr>
+            <a:r>
+              <a:rPr lang="en-US" sz="1100" dirty="0">
+                <a:solidFill>
+                  <a:srgbClr val="64748B"/>
+                </a:solidFill>
+                <a:latin typeface="Calibri" pitchFamily="34" charset="0"/>
+                <a:ea typeface="Calibri" pitchFamily="34" charset="-122"/>
+                <a:cs typeface="Calibri" pitchFamily="34" charset="-120"/>
+              </a:rPr>
+              <a:t>Current time, cron reminders</a:t>
+            </a:r>
+            <a:endParaRPr lang="en-US" sz="1100" dirty="0"/>
+          </a:p>
+          <a:p>
+            <a:pPr indent="0" marL="0">
+              <a:buNone/>
+            </a:pPr>
+            <a:r>
+              <a:rPr lang="en-US" sz="1100" dirty="0">
+                <a:solidFill>
+                  <a:srgbClr val="64748B"/>
+                </a:solidFill>
+                <a:latin typeface="Calibri" pitchFamily="34" charset="0"/>
+                <a:ea typeface="Calibri" pitchFamily="34" charset="-122"/>
+                <a:cs typeface="Calibri" pitchFamily="34" charset="-120"/>
+              </a:rPr>
+              <a:t>Create/list/pause, scheduler integration</a:t>
+            </a:r>
+            <a:endParaRPr lang="en-US" sz="1100" dirty="0"/>
+          </a:p>
+        </p:txBody>
+      </p:sp>
+      <p:sp>
+        <p:nvSpPr>
+          <p:cNvPr id="22" name="Shape 20"/>
+          <p:cNvSpPr/>
+          <p:nvPr/>
+        </p:nvSpPr>
+        <p:spPr>
+          <a:xfrm>
+            <a:off x="5303520" y="1051560"/>
+            <a:ext cx="3474720" cy="3154680"/>
+          </a:xfrm>
+          <a:prstGeom prst="rect">
+            <a:avLst/>
+          </a:prstGeom>
+          <a:solidFill>
+            <a:srgbClr val="F0F4FF"/>
+          </a:solidFill>
+          <a:ln/>
+          <a:effectLst>
+            <a:outerShdw sx="100000" sy="100000" kx="0" ky="0" algn="bl" rotWithShape="0" blurRad="50800" dist="25400" dir="8100000">
+              <a:srgbClr val="000000">
+                <a:alpha val="12000"/>
+              </a:srgbClr>
+            </a:outerShdw>
+          </a:effectLst>
+        </p:spPr>
+      </p:sp>
+      <p:sp>
+        <p:nvSpPr>
+          <p:cNvPr id="23" name="Text 21"/>
+          <p:cNvSpPr/>
+          <p:nvPr/>
+        </p:nvSpPr>
+        <p:spPr>
+          <a:xfrm>
+            <a:off x="5303520" y="1143000"/>
+            <a:ext cx="3474720" cy="365760"/>
+          </a:xfrm>
+          <a:prstGeom prst="rect">
+            <a:avLst/>
+          </a:prstGeom>
+          <a:noFill/>
+          <a:ln/>
+        </p:spPr>
+        <p:txBody>
+          <a:bodyPr wrap="square" lIns="0" tIns="0" rIns="0" bIns="0" rtlCol="0" anchor="ctr"/>
+          <a:lstStyle/>
+          <a:p>
+            <a:pPr algn="ctr" indent="0" marL="0">
+              <a:buNone/>
+            </a:pPr>
+            <a:r>
+              <a:rPr lang="en-US" sz="1600" b="1" dirty="0">
+                <a:solidFill>
+                  <a:srgbClr val="1E2761"/>
+                </a:solidFill>
+                <a:latin typeface="Georgia" pitchFamily="34" charset="0"/>
+                <a:ea typeface="Georgia" pitchFamily="34" charset="-122"/>
+                <a:cs typeface="Georgia" pitchFamily="34" charset="-120"/>
+              </a:rPr>
+              <a:t>Memory System</a:t>
+            </a:r>
+            <a:endParaRPr lang="en-US" sz="1600" dirty="0"/>
+          </a:p>
+        </p:txBody>
+      </p:sp>
+      <p:sp>
+        <p:nvSpPr>
+          <p:cNvPr id="24" name="Text 22"/>
+          <p:cNvSpPr/>
+          <p:nvPr/>
+        </p:nvSpPr>
+        <p:spPr>
+          <a:xfrm>
+            <a:off x="5486400" y="1554480"/>
+            <a:ext cx="3108960" cy="2560320"/>
+          </a:xfrm>
+          <a:prstGeom prst="rect">
+            <a:avLst/>
+          </a:prstGeom>
+          <a:noFill/>
+          <a:ln/>
+        </p:spPr>
+        <p:txBody>
+          <a:bodyPr wrap="square" rtlCol="0" anchor="t"/>
+          <a:lstStyle/>
+          <a:p>
+            <a:pPr indent="0" marL="0">
+              <a:buNone/>
+            </a:pPr>
+            <a:r>
+              <a:rPr lang="en-US" sz="1300" b="1" dirty="0">
+                <a:solidFill>
+                  <a:srgbClr val="3B82F6"/>
+                </a:solidFill>
+                <a:latin typeface="Calibri" pitchFamily="34" charset="0"/>
+                <a:ea typeface="Calibri" pitchFamily="34" charset="-122"/>
+                <a:cs typeface="Calibri" pitchFamily="34" charset="-120"/>
+              </a:rPr>
+              <a:t>memory.md</a:t>
+            </a:r>
+            <a:endParaRPr lang="en-US" sz="1300" dirty="0"/>
+          </a:p>
+          <a:p>
+            <a:pPr indent="0" marL="0">
+              <a:spcAft>
+                <a:spcPts val="1200"/>
+              </a:spcAft>
+              <a:buNone/>
+            </a:pPr>
+            <a:r>
+              <a:rPr lang="en-US" sz="1100" dirty="0">
+                <a:solidFill>
+                  <a:srgbClr val="64748B"/>
+                </a:solidFill>
+                <a:latin typeface="Calibri" pitchFamily="34" charset="0"/>
+                <a:ea typeface="Calibri" pitchFamily="34" charset="-122"/>
+                <a:cs typeface="Calibri" pitchFamily="34" charset="-120"/>
+              </a:rPr>
+              <a:t>Long-term facts with timestamps</a:t>
+            </a:r>
+            <a:endParaRPr lang="en-US" sz="1300" dirty="0"/>
+          </a:p>
+          <a:p>
+            <a:pPr indent="0" marL="0">
+              <a:buNone/>
+            </a:pPr>
+            <a:r>
+              <a:rPr lang="en-US" sz="1300" b="1" dirty="0">
+                <a:solidFill>
+                  <a:srgbClr val="3B82F6"/>
+                </a:solidFill>
+                <a:latin typeface="Calibri" pitchFamily="34" charset="0"/>
+                <a:ea typeface="Calibri" pitchFamily="34" charset="-122"/>
+                <a:cs typeface="Calibri" pitchFamily="34" charset="-120"/>
+              </a:rPr>
+              <a:t>conversations.md</a:t>
+            </a:r>
+            <a:endParaRPr lang="en-US" sz="1300" dirty="0"/>
+          </a:p>
+          <a:p>
+            <a:pPr indent="0" marL="0">
+              <a:spcAft>
+                <a:spcPts val="1200"/>
+              </a:spcAft>
+              <a:buNone/>
+            </a:pPr>
+            <a:r>
+              <a:rPr lang="en-US" sz="1100" dirty="0">
+                <a:solidFill>
+                  <a:srgbClr val="64748B"/>
+                </a:solidFill>
+                <a:latin typeface="Calibri" pitchFamily="34" charset="0"/>
+                <a:ea typeface="Calibri" pitchFamily="34" charset="-122"/>
+                <a:cs typeface="Calibri" pitchFamily="34" charset="-120"/>
+              </a:rPr>
+              <a:t>Recent history, auto-trim at 40 entries</a:t>
+            </a:r>
+            <a:endParaRPr lang="en-US" sz="1300" dirty="0"/>
+          </a:p>
+          <a:p>
+            <a:pPr indent="0" marL="0">
+              <a:buNone/>
+            </a:pPr>
+            <a:r>
+              <a:rPr lang="en-US" sz="1300" b="1" dirty="0">
+                <a:solidFill>
+                  <a:srgbClr val="3B82F6"/>
+                </a:solidFill>
+                <a:latin typeface="Calibri" pitchFamily="34" charset="0"/>
+                <a:ea typeface="Calibri" pitchFamily="34" charset="-122"/>
+                <a:cs typeface="Calibri" pitchFamily="34" charset="-120"/>
+              </a:rPr>
+              <a:t>ContextLoader</a:t>
+            </a:r>
+            <a:endParaRPr lang="en-US" sz="1300" dirty="0"/>
+          </a:p>
+          <a:p>
+            <a:pPr indent="0" marL="0">
+              <a:buNone/>
+            </a:pPr>
+            <a:r>
+              <a:rPr lang="en-US" sz="1100" dirty="0">
+                <a:solidFill>
+                  <a:srgbClr val="64748B"/>
+                </a:solidFill>
+                <a:latin typeface="Calibri" pitchFamily="34" charset="0"/>
+                <a:ea typeface="Calibri" pitchFamily="34" charset="-122"/>
+                <a:cs typeface="Calibri" pitchFamily="34" charset="-120"/>
+              </a:rPr>
+              <a:t>Injects: timestamp + memory + conversation + tools + tasks + reminders into each LLM call</a:t>
+            </a:r>
+            <a:endParaRPr lang="en-US" sz="1300" dirty="0"/>
+          </a:p>
+        </p:txBody>
+      </p:sp>
+    </p:spTree>
+  </p:cSld>
+  <p:clrMapOvr>
+    <a:masterClrMapping/>
+  </p:clrMapOvr>
+</p:sld>
+</file>
+
+<file path=ppt/slides/slide8.xml><?xml version="1.0" encoding="utf-8"?>
+<p:sld xmlns:a="http://schemas.openxmlformats.org/drawingml/2006/main" xmlns:r="http://schemas.openxmlformats.org/officeDocument/2006/relationships" xmlns:p="http://schemas.openxmlformats.org/presentationml/2006/main">
+  <p:cSld name="Slide 8">
+    <p:bg>
+      <p:bgPr>
+        <a:solidFill>
+          <a:srgbClr val="FFFFFF"/>
+        </a:solidFill>
+      </p:bgPr>
+    </p:bg>
+    <p:spTree>
+      <p:nvGrpSpPr>
+        <p:cNvPr id="1" name=""/>
+        <p:cNvGrpSpPr/>
+        <p:nvPr/>
+      </p:nvGrpSpPr>
+      <p:grpSpPr>
+        <a:xfrm>
+          <a:off x="0" y="0"/>
+          <a:ext cx="0" cy="0"/>
+          <a:chOff x="0" y="0"/>
+          <a:chExt cx="0" cy="0"/>
+        </a:xfrm>
+      </p:grpSpPr>
+      <p:sp>
+        <p:nvSpPr>
+          <p:cNvPr id="2" name="Shape 0"/>
+          <p:cNvSpPr/>
+          <p:nvPr/>
+        </p:nvSpPr>
+        <p:spPr>
+          <a:xfrm>
+            <a:off x="0" y="0"/>
+            <a:ext cx="9144000" cy="54864"/>
+          </a:xfrm>
+          <a:prstGeom prst="rect">
+            <a:avLst/>
+          </a:prstGeom>
+          <a:solidFill>
+            <a:srgbClr val="3B82F6"/>
+          </a:solidFill>
+          <a:ln/>
+        </p:spPr>
+      </p:sp>
+      <p:sp>
+        <p:nvSpPr>
+          <p:cNvPr id="3" name="Text 1"/>
+          <p:cNvSpPr/>
+          <p:nvPr/>
+        </p:nvSpPr>
+        <p:spPr>
+          <a:xfrm>
+            <a:off x="548640" y="228600"/>
+            <a:ext cx="8046720" cy="548640"/>
+          </a:xfrm>
+          <a:prstGeom prst="rect">
+            <a:avLst/>
+          </a:prstGeom>
+          <a:noFill/>
+          <a:ln/>
+        </p:spPr>
+        <p:txBody>
+          <a:bodyPr wrap="square" lIns="0" tIns="0" rIns="0" bIns="0" rtlCol="0" anchor="ctr"/>
+          <a:lstStyle/>
+          <a:p>
+            <a:pPr indent="0" marL="0">
+              <a:buNone/>
+            </a:pPr>
+            <a:r>
+              <a:rPr lang="en-US" sz="2800" b="1" dirty="0">
+                <a:solidFill>
+                  <a:srgbClr val="1E2761"/>
+                </a:solidFill>
+                <a:latin typeface="Georgia" pitchFamily="34" charset="0"/>
+                <a:ea typeface="Georgia" pitchFamily="34" charset="-122"/>
+                <a:cs typeface="Georgia" pitchFamily="34" charset="-120"/>
+              </a:rPr>
+              <a:t>System Design: Prompt</a:t>
+            </a:r>
+            <a:endParaRPr lang="en-US" sz="2800" dirty="0"/>
+          </a:p>
+        </p:txBody>
+      </p:sp>
+      <p:sp>
+        <p:nvSpPr>
+          <p:cNvPr id="4" name="Shape 2"/>
+          <p:cNvSpPr/>
+          <p:nvPr/>
+        </p:nvSpPr>
+        <p:spPr>
+          <a:xfrm>
+            <a:off x="548640" y="822960"/>
+            <a:ext cx="2286000" cy="0"/>
+          </a:xfrm>
+          <a:prstGeom prst="line">
+            <a:avLst/>
+          </a:prstGeom>
+          <a:noFill/>
+          <a:ln w="25400">
+            <a:solidFill>
+              <a:srgbClr val="3B82F6"/>
+            </a:solidFill>
+            <a:prstDash val="solid"/>
+          </a:ln>
+        </p:spPr>
+      </p:sp>
+      <p:sp>
+        <p:nvSpPr>
+          <p:cNvPr id="5" name="Text 3"/>
+          <p:cNvSpPr/>
+          <p:nvPr/>
+        </p:nvSpPr>
+        <p:spPr>
+          <a:xfrm>
+            <a:off x="8503920" y="4754880"/>
+            <a:ext cx="457200" cy="274320"/>
+          </a:xfrm>
+          <a:prstGeom prst="rect">
+            <a:avLst/>
+          </a:prstGeom>
+          <a:noFill/>
+          <a:ln/>
+        </p:spPr>
+        <p:txBody>
+          <a:bodyPr wrap="square" rtlCol="0" anchor="ctr"/>
+          <a:lstStyle/>
+          <a:p>
+            <a:pPr algn="r" indent="0" marL="0">
+              <a:buNone/>
+            </a:pPr>
+            <a:r>
+              <a:rPr lang="en-US" sz="1000" dirty="0">
+                <a:solidFill>
+                  <a:srgbClr val="64748B"/>
+                </a:solidFill>
+              </a:rPr>
+              <a:t>8</a:t>
+            </a:r>
+            <a:endParaRPr lang="en-US" sz="1000" dirty="0"/>
+          </a:p>
+        </p:txBody>
+      </p:sp>
+      <p:sp>
+        <p:nvSpPr>
+          <p:cNvPr id="6" name="Shape 4"/>
+          <p:cNvSpPr/>
+          <p:nvPr/>
+        </p:nvSpPr>
+        <p:spPr>
+          <a:xfrm>
+            <a:off x="548640" y="1097280"/>
+            <a:ext cx="8046720" cy="2377440"/>
+          </a:xfrm>
+          <a:prstGeom prst="rect">
+            <a:avLst/>
+          </a:prstGeom>
+          <a:solidFill>
+            <a:srgbClr val="0F1535"/>
+          </a:solidFill>
+          <a:ln/>
+        </p:spPr>
+      </p:sp>
+      <p:sp>
+        <p:nvSpPr>
+          <p:cNvPr id="7" name="Text 5"/>
+          <p:cNvSpPr/>
+          <p:nvPr/>
+        </p:nvSpPr>
+        <p:spPr>
+          <a:xfrm>
+            <a:off x="822960" y="1188720"/>
+            <a:ext cx="7498080" cy="2194560"/>
+          </a:xfrm>
+          <a:prstGeom prst="rect">
+            <a:avLst/>
+          </a:prstGeom>
+          <a:noFill/>
+          <a:ln/>
+        </p:spPr>
+        <p:txBody>
+          <a:bodyPr wrap="square" rtlCol="0" anchor="t"/>
+          <a:lstStyle/>
+          <a:p>
+            <a:pPr indent="0" marL="0">
+              <a:buNone/>
+            </a:pPr>
+            <a:r>
+              <a:rPr lang="en-US" sz="1100" dirty="0">
+                <a:solidFill>
+                  <a:srgbClr val="CADCFC"/>
+                </a:solidFill>
+                <a:latin typeface="Courier New" pitchFamily="34" charset="0"/>
+                <a:ea typeface="Courier New" pitchFamily="34" charset="-122"/>
+                <a:cs typeface="Courier New" pitchFamily="34" charset="-120"/>
+              </a:rPr>
+              <a:t>You are {agentName}, a personal AI assistant connected via WhatsApp.
+</a:t>
+            </a:r>
+            <a:endParaRPr lang="en-US" sz="1100" dirty="0"/>
+          </a:p>
+          <a:p>
+            <a:pPr indent="0" marL="0">
+              <a:buNone/>
+            </a:pPr>
+            <a:r>
+              <a:rPr lang="en-US" sz="1100" dirty="0">
+                <a:solidFill>
+                  <a:srgbClr val="94A3B8"/>
+                </a:solidFill>
+                <a:latin typeface="Courier New" pitchFamily="34" charset="0"/>
+                <a:ea typeface="Courier New" pitchFamily="34" charset="-122"/>
+                <a:cs typeface="Courier New" pitchFamily="34" charset="-120"/>
+              </a:rPr>
+              <a:t>You MUST respond with exactly ONE JSON object:
+</a:t>
+            </a:r>
+            <a:endParaRPr lang="en-US" sz="1100" dirty="0"/>
+          </a:p>
+          <a:p>
+            <a:pPr indent="0" marL="0">
+              <a:buNone/>
+            </a:pPr>
+            <a:r>
+              <a:rPr lang="en-US" sz="1100" dirty="0">
+                <a:solidFill>
+                  <a:srgbClr val="10B981"/>
+                </a:solidFill>
+                <a:latin typeface="Courier New" pitchFamily="34" charset="0"/>
+                <a:ea typeface="Courier New" pitchFamily="34" charset="-122"/>
+                <a:cs typeface="Courier New" pitchFamily="34" charset="-120"/>
+              </a:rPr>
+              <a:t>1. {"type": "reply", "text": "your message"}
+</a:t>
+            </a:r>
+            <a:endParaRPr lang="en-US" sz="1100" dirty="0"/>
+          </a:p>
+          <a:p>
+            <a:pPr indent="0" marL="0">
+              <a:buNone/>
+            </a:pPr>
+            <a:r>
+              <a:rPr lang="en-US" sz="1100" dirty="0">
+                <a:solidFill>
+                  <a:srgbClr val="3B82F6"/>
+                </a:solidFill>
+                <a:latin typeface="Courier New" pitchFamily="34" charset="0"/>
+                <a:ea typeface="Courier New" pitchFamily="34" charset="-122"/>
+                <a:cs typeface="Courier New" pitchFamily="34" charset="-120"/>
+              </a:rPr>
+              <a:t>2. {"type": "tool_call", "tool": "...", "args": {...}}
+</a:t>
+            </a:r>
+            <a:endParaRPr lang="en-US" sz="1100" dirty="0"/>
+          </a:p>
+          <a:p>
+            <a:pPr indent="0" marL="0">
+              <a:buNone/>
+            </a:pPr>
+            <a:r>
+              <a:rPr lang="en-US" sz="1100" dirty="0">
+                <a:solidFill>
+                  <a:srgbClr val="8B5CF6"/>
+                </a:solidFill>
+                <a:latin typeface="Courier New" pitchFamily="34" charset="0"/>
+                <a:ea typeface="Courier New" pitchFamily="34" charset="-122"/>
+                <a:cs typeface="Courier New" pitchFamily="34" charset="-120"/>
+              </a:rPr>
+              <a:t>3. {"type": "schedule", "job": {"name":"...", ...}}
+</a:t>
+            </a:r>
+            <a:endParaRPr lang="en-US" sz="1100" dirty="0"/>
+          </a:p>
+          <a:p>
+            <a:pPr indent="0" marL="0">
+              <a:buNone/>
+            </a:pPr>
+            <a:r>
+              <a:rPr lang="en-US" sz="1100" dirty="0">
+                <a:solidFill>
+                  <a:srgbClr val="F59E0B"/>
+                </a:solidFill>
+                <a:latin typeface="Courier New" pitchFamily="34" charset="0"/>
+                <a:ea typeface="Courier New" pitchFamily="34" charset="-122"/>
+                <a:cs typeface="Courier New" pitchFamily="34" charset="-120"/>
+              </a:rPr>
+              <a:t>{context}
+</a:t>
+            </a:r>
+            <a:endParaRPr lang="en-US" sz="1100" dirty="0"/>
+          </a:p>
+          <a:p>
+            <a:pPr indent="0" marL="0">
+              <a:buNone/>
+            </a:pPr>
+            <a:r>
+              <a:rPr lang="en-US" sz="1100" b="1" dirty="0">
+                <a:solidFill>
+                  <a:srgbClr val="EF4444"/>
+                </a:solidFill>
+                <a:latin typeface="Courier New" pitchFamily="34" charset="0"/>
+                <a:ea typeface="Courier New" pitchFamily="34" charset="-122"/>
+                <a:cs typeface="Courier New" pitchFamily="34" charset="-120"/>
+              </a:rPr>
+              <a:t>IMPORTANT: Output ONLY valid JSON.</a:t>
+            </a:r>
+            <a:endParaRPr lang="en-US" sz="1100" dirty="0"/>
+          </a:p>
+        </p:txBody>
+      </p:sp>
+      <p:sp>
+        <p:nvSpPr>
+          <p:cNvPr id="8" name="Text 6"/>
+          <p:cNvSpPr/>
+          <p:nvPr/>
+        </p:nvSpPr>
+        <p:spPr>
+          <a:xfrm>
+            <a:off x="640080" y="3657600"/>
+            <a:ext cx="7863840" cy="1280160"/>
+          </a:xfrm>
+          <a:prstGeom prst="rect">
+            <a:avLst/>
+          </a:prstGeom>
+          <a:noFill/>
+          <a:ln/>
+        </p:spPr>
+        <p:txBody>
+          <a:bodyPr wrap="square" rtlCol="0" anchor="t"/>
+          <a:lstStyle/>
+          <a:p>
+            <a:pPr marL="342900" indent="-342900">
+              <a:spcAft>
+                <a:spcPts val="800"/>
+              </a:spcAft>
+              <a:buSzPct val="100000"/>
+              <a:buChar char="•"/>
+            </a:pPr>
+            <a:r>
+              <a:rPr lang="en-US" sz="1300" dirty="0">
+                <a:solidFill>
+                  <a:srgbClr val="1E293B"/>
+                </a:solidFill>
+                <a:latin typeface="Calibri" pitchFamily="34" charset="0"/>
+                <a:ea typeface="Calibri" pitchFamily="34" charset="-122"/>
+                <a:cs typeface="Calibri" pitchFamily="34" charset="-120"/>
+              </a:rPr>
+              <a:t>No native tool-calling API used — tools described in prompt text</a:t>
+            </a:r>
+            <a:endParaRPr lang="en-US" sz="1300" dirty="0"/>
+          </a:p>
+          <a:p>
+            <a:pPr marL="342900" indent="-342900">
+              <a:spcAft>
+                <a:spcPts val="800"/>
+              </a:spcAft>
+              <a:buSzPct val="100000"/>
+              <a:buChar char="•"/>
+            </a:pPr>
+            <a:r>
+              <a:rPr lang="en-US" sz="1300" dirty="0">
+                <a:solidFill>
+                  <a:srgbClr val="1E293B"/>
+                </a:solidFill>
+                <a:latin typeface="Calibri" pitchFamily="34" charset="0"/>
+                <a:ea typeface="Calibri" pitchFamily="34" charset="-122"/>
+                <a:cs typeface="Calibri" pitchFamily="34" charset="-120"/>
+              </a:rPr>
+              <a:t>JSON mode enabled for Groq &amp; Gemini; structured output for Anthropic</a:t>
+            </a:r>
+            <a:endParaRPr lang="en-US" sz="1300" dirty="0"/>
+          </a:p>
+          <a:p>
+            <a:pPr marL="342900" indent="-342900">
+              <a:spcAft>
+                <a:spcPts val="800"/>
+              </a:spcAft>
+              <a:buSzPct val="100000"/>
+              <a:buChar char="•"/>
+            </a:pPr>
+            <a:r>
+              <a:rPr lang="en-US" sz="1300" dirty="0">
+                <a:solidFill>
+                  <a:srgbClr val="1E293B"/>
+                </a:solidFill>
+                <a:latin typeface="Calibri" pitchFamily="34" charset="0"/>
+                <a:ea typeface="Calibri" pitchFamily="34" charset="-122"/>
+                <a:cs typeface="Calibri" pitchFamily="34" charset="-120"/>
+              </a:rPr>
+              <a:t>{context} = memory + conversation + tools + tasks + reminders (assembled by ContextLoader)</a:t>
+            </a:r>
+            <a:endParaRPr lang="en-US" sz="1300" dirty="0"/>
+          </a:p>
+          <a:p>
+            <a:pPr marL="342900" indent="-342900">
+              <a:spcAft>
+                <a:spcPts val="800"/>
+              </a:spcAft>
+              <a:buSzPct val="100000"/>
+              <a:buChar char="•"/>
+            </a:pPr>
+            <a:r>
+              <a:rPr lang="en-US" sz="1300" dirty="0">
+                <a:solidFill>
+                  <a:srgbClr val="1E293B"/>
+                </a:solidFill>
+                <a:latin typeface="Calibri" pitchFamily="34" charset="0"/>
+                <a:ea typeface="Calibri" pitchFamily="34" charset="-122"/>
+                <a:cs typeface="Calibri" pitchFamily="34" charset="-120"/>
+              </a:rPr>
+              <a:t>Zod validates every LLM response; parse failures become safe error replies</a:t>
+            </a:r>
+            <a:endParaRPr lang="en-US" sz="1300" dirty="0"/>
+          </a:p>
+        </p:txBody>
+      </p:sp>
+    </p:spTree>
+  </p:cSld>
+  <p:clrMapOvr>
+    <a:masterClrMapping/>
+  </p:clrMapOvr>
+</p:sld>
+</file>
+
+<file path=ppt/slides/slide9.xml><?xml version="1.0" encoding="utf-8"?>
+<p:sld xmlns:a="http://schemas.openxmlformats.org/drawingml/2006/main" xmlns:r="http://schemas.openxmlformats.org/officeDocument/2006/relationships" xmlns:p="http://schemas.openxmlformats.org/presentationml/2006/main">
+  <p:cSld name="Slide 9">
+    <p:bg>
+      <p:bgPr>
+        <a:solidFill>
+          <a:srgbClr val="FFFFFF"/>
+        </a:solidFill>
+      </p:bgPr>
+    </p:bg>
+    <p:spTree>
+      <p:nvGrpSpPr>
+        <p:cNvPr id="1" name=""/>
+        <p:cNvGrpSpPr/>
+        <p:nvPr/>
+      </p:nvGrpSpPr>
+      <p:grpSpPr>
+        <a:xfrm>
+          <a:off x="0" y="0"/>
+          <a:ext cx="0" cy="0"/>
+          <a:chOff x="0" y="0"/>
+          <a:chExt cx="0" cy="0"/>
+        </a:xfrm>
+      </p:grpSpPr>
+      <p:sp>
+        <p:nvSpPr>
+          <p:cNvPr id="2" name="Shape 0"/>
+          <p:cNvSpPr/>
+          <p:nvPr/>
+        </p:nvSpPr>
+        <p:spPr>
+          <a:xfrm>
+            <a:off x="0" y="0"/>
+            <a:ext cx="9144000" cy="54864"/>
+          </a:xfrm>
+          <a:prstGeom prst="rect">
+            <a:avLst/>
+          </a:prstGeom>
+          <a:solidFill>
+            <a:srgbClr val="3B82F6"/>
+          </a:solidFill>
+          <a:ln/>
+        </p:spPr>
+      </p:sp>
+      <p:sp>
+        <p:nvSpPr>
+          <p:cNvPr id="3" name="Text 1"/>
+          <p:cNvSpPr/>
+          <p:nvPr/>
+        </p:nvSpPr>
+        <p:spPr>
+          <a:xfrm>
+            <a:off x="548640" y="228600"/>
+            <a:ext cx="8046720" cy="548640"/>
+          </a:xfrm>
+          <a:prstGeom prst="rect">
+            <a:avLst/>
+          </a:prstGeom>
+          <a:noFill/>
+          <a:ln/>
+        </p:spPr>
+        <p:txBody>
+          <a:bodyPr wrap="square" lIns="0" tIns="0" rIns="0" bIns="0" rtlCol="0" anchor="ctr"/>
+          <a:lstStyle/>
+          <a:p>
+            <a:pPr indent="0" marL="0">
+              <a:buNone/>
+            </a:pPr>
+            <a:r>
+              <a:rPr lang="en-US" sz="2800" b="1" dirty="0">
+                <a:solidFill>
+                  <a:srgbClr val="1E2761"/>
+                </a:solidFill>
+                <a:latin typeface="Georgia" pitchFamily="34" charset="0"/>
+                <a:ea typeface="Georgia" pitchFamily="34" charset="-122"/>
+                <a:cs typeface="Georgia" pitchFamily="34" charset="-120"/>
+              </a:rPr>
+              <a:t>Demo &amp; Results</a:t>
+            </a:r>
+            <a:endParaRPr lang="en-US" sz="2800" dirty="0"/>
+          </a:p>
+        </p:txBody>
+      </p:sp>
+      <p:sp>
+        <p:nvSpPr>
+          <p:cNvPr id="4" name="Shape 2"/>
+          <p:cNvSpPr/>
+          <p:nvPr/>
+        </p:nvSpPr>
+        <p:spPr>
+          <a:xfrm>
+            <a:off x="548640" y="822960"/>
+            <a:ext cx="2286000" cy="0"/>
+          </a:xfrm>
+          <a:prstGeom prst="line">
+            <a:avLst/>
+          </a:prstGeom>
+          <a:noFill/>
+          <a:ln w="25400">
+            <a:solidFill>
+              <a:srgbClr val="3B82F6"/>
+            </a:solidFill>
+            <a:prstDash val="solid"/>
+          </a:ln>
+        </p:spPr>
+      </p:sp>
+      <p:sp>
+        <p:nvSpPr>
+          <p:cNvPr id="5" name="Text 3"/>
+          <p:cNvSpPr/>
+          <p:nvPr/>
+        </p:nvSpPr>
+        <p:spPr>
+          <a:xfrm>
+            <a:off x="8503920" y="4754880"/>
+            <a:ext cx="457200" cy="274320"/>
+          </a:xfrm>
+          <a:prstGeom prst="rect">
+            <a:avLst/>
+          </a:prstGeom>
+          <a:noFill/>
+          <a:ln/>
+        </p:spPr>
+        <p:txBody>
+          <a:bodyPr wrap="square" rtlCol="0" anchor="ctr"/>
+          <a:lstStyle/>
+          <a:p>
+            <a:pPr algn="r" indent="0" marL="0">
+              <a:buNone/>
+            </a:pPr>
+            <a:r>
+              <a:rPr lang="en-US" sz="1000" dirty="0">
+                <a:solidFill>
+                  <a:srgbClr val="64748B"/>
+                </a:solidFill>
+              </a:rPr>
+              <a:t>9</a:t>
+            </a:r>
+            <a:endParaRPr lang="en-US" sz="1000" dirty="0"/>
+          </a:p>
+        </p:txBody>
+      </p:sp>
+      <p:sp>
+        <p:nvSpPr>
+          <p:cNvPr id="6" name="Text 4"/>
+          <p:cNvSpPr/>
+          <p:nvPr/>
+        </p:nvSpPr>
+        <p:spPr>
+          <a:xfrm>
+            <a:off x="548640" y="1005840"/>
+            <a:ext cx="8046720" cy="320040"/>
+          </a:xfrm>
+          <a:prstGeom prst="rect">
+            <a:avLst/>
+          </a:prstGeom>
+          <a:noFill/>
+          <a:ln/>
+        </p:spPr>
+        <p:txBody>
+          <a:bodyPr wrap="square" rtlCol="0" anchor="ctr"/>
+          <a:lstStyle/>
+          <a:p>
+            <a:pPr indent="0" marL="0">
+              <a:buNone/>
+            </a:pPr>
+            <a:r>
+              <a:rPr lang="en-US" sz="1400" b="1" dirty="0">
+                <a:solidFill>
+                  <a:srgbClr val="1E2761"/>
+                </a:solidFill>
+                <a:latin typeface="Calibri" pitchFamily="34" charset="0"/>
+                <a:ea typeface="Calibri" pitchFamily="34" charset="-122"/>
+                <a:cs typeface="Calibri" pitchFamily="34" charset="-120"/>
+              </a:rPr>
+              <a:t>GitHub: </a:t>
+            </a:r>
+            <a:pPr indent="0" marL="0">
+              <a:buNone/>
+            </a:pPr>
+            <a:r>
+              <a:rPr lang="en-US" sz="1400" dirty="0">
+                <a:solidFill>
+                  <a:srgbClr val="3B82F6"/>
+                </a:solidFill>
+                <a:latin typeface="Calibri" pitchFamily="34" charset="0"/>
+                <a:ea typeface="Calibri" pitchFamily="34" charset="-122"/>
+                <a:cs typeface="Calibri" pitchFamily="34" charset="-120"/>
+              </a:rPr>
+              <a:t>github.com/LIJianxuanLeo/liteclaw</a:t>
+            </a:r>
+            <a:endParaRPr lang="en-US" sz="1400" dirty="0"/>
+          </a:p>
+        </p:txBody>
+      </p:sp>
+      <p:sp>
+        <p:nvSpPr>
+          <p:cNvPr id="7" name="Text 5"/>
+          <p:cNvSpPr/>
+          <p:nvPr/>
+        </p:nvSpPr>
+        <p:spPr>
+          <a:xfrm>
+            <a:off x="548640" y="1325880"/>
+            <a:ext cx="8046720" cy="274320"/>
+          </a:xfrm>
+          <a:prstGeom prst="rect">
+            <a:avLst/>
+          </a:prstGeom>
+          <a:noFill/>
+          <a:ln/>
+        </p:spPr>
+        <p:txBody>
+          <a:bodyPr wrap="square" rtlCol="0" anchor="ctr"/>
+          <a:lstStyle/>
+          <a:p>
+            <a:pPr indent="0" marL="0">
+              <a:buNone/>
+            </a:pPr>
+            <a:r>
+              <a:rPr lang="en-US" sz="1200" dirty="0">
+                <a:solidFill>
+                  <a:srgbClr val="64748B"/>
+                </a:solidFill>
+                <a:latin typeface="Calibri" pitchFamily="34" charset="0"/>
+                <a:ea typeface="Calibri" pitchFamily="34" charset="-122"/>
+                <a:cs typeface="Calibri" pitchFamily="34" charset="-120"/>
+              </a:rPr>
+              <a:t>Setup: clone → npm install → .env (Gemini key) → npm start → scan QR</a:t>
+            </a:r>
+            <a:endParaRPr lang="en-US" sz="1200" dirty="0"/>
+          </a:p>
+        </p:txBody>
+      </p:sp>
+      <p:sp>
+        <p:nvSpPr>
+          <p:cNvPr id="8" name="Shape 6"/>
+          <p:cNvSpPr/>
+          <p:nvPr/>
+        </p:nvSpPr>
+        <p:spPr>
+          <a:xfrm>
+            <a:off x="548640" y="1737360"/>
+            <a:ext cx="3657600" cy="1463040"/>
+          </a:xfrm>
+          <a:prstGeom prst="rect">
+            <a:avLst/>
+          </a:prstGeom>
+          <a:solidFill>
+            <a:srgbClr val="F0F4FF"/>
+          </a:solidFill>
+          <a:ln w="6350">
+            <a:solidFill>
+              <a:srgbClr val="94A3B8"/>
+            </a:solidFill>
+            <a:prstDash val="dash"/>
+          </a:ln>
+        </p:spPr>
+      </p:sp>
+      <p:sp>
+        <p:nvSpPr>
+          <p:cNvPr id="9" name="Text 7"/>
+          <p:cNvSpPr/>
+          <p:nvPr/>
+        </p:nvSpPr>
+        <p:spPr>
+          <a:xfrm>
+            <a:off x="548640" y="1737360"/>
+            <a:ext cx="3657600" cy="1463040"/>
+          </a:xfrm>
+          <a:prstGeom prst="rect">
+            <a:avLst/>
+          </a:prstGeom>
+          <a:noFill/>
+          <a:ln/>
+        </p:spPr>
+        <p:txBody>
+          <a:bodyPr wrap="square" rtlCol="0" anchor="ctr"/>
+          <a:lstStyle/>
+          <a:p>
+            <a:pPr algn="ctr" indent="0" marL="0">
+              <a:buNone/>
+            </a:pPr>
+            <a:r>
+              <a:rPr lang="en-US" sz="1100" i="1" dirty="0">
+                <a:solidFill>
+                  <a:srgbClr val="64748B"/>
+                </a:solidFill>
+                <a:latin typeface="Calibri" pitchFamily="34" charset="0"/>
+                <a:ea typeface="Calibri" pitchFamily="34" charset="-122"/>
+                <a:cs typeface="Calibri" pitchFamily="34" charset="-120"/>
+              </a:rPr>
+              <a:t>[QR code + connection log]</a:t>
+            </a:r>
+            <a:endParaRPr lang="en-US" sz="1100" dirty="0"/>
+          </a:p>
+        </p:txBody>
+      </p:sp>
+      <p:sp>
+        <p:nvSpPr>
+          <p:cNvPr id="10" name="Shape 8"/>
+          <p:cNvSpPr/>
+          <p:nvPr/>
+        </p:nvSpPr>
+        <p:spPr>
+          <a:xfrm>
+            <a:off x="4572000" y="1737360"/>
+            <a:ext cx="4023360" cy="1463040"/>
+          </a:xfrm>
+          <a:prstGeom prst="rect">
+            <a:avLst/>
+          </a:prstGeom>
+          <a:solidFill>
+            <a:srgbClr val="F0F4FF"/>
+          </a:solidFill>
+          <a:ln w="6350">
+            <a:solidFill>
+              <a:srgbClr val="94A3B8"/>
+            </a:solidFill>
+            <a:prstDash val="dash"/>
+          </a:ln>
+        </p:spPr>
+      </p:sp>
+      <p:sp>
+        <p:nvSpPr>
+          <p:cNvPr id="11" name="Text 9"/>
+          <p:cNvSpPr/>
+          <p:nvPr/>
+        </p:nvSpPr>
+        <p:spPr>
+          <a:xfrm>
+            <a:off x="4572000" y="1737360"/>
+            <a:ext cx="4023360" cy="1463040"/>
+          </a:xfrm>
+          <a:prstGeom prst="rect">
+            <a:avLst/>
+          </a:prstGeom>
+          <a:noFill/>
+          <a:ln/>
+        </p:spPr>
+        <p:txBody>
+          <a:bodyPr wrap="square" rtlCol="0" anchor="ctr"/>
+          <a:lstStyle/>
+          <a:p>
+            <a:pPr algn="ctr" indent="0" marL="0">
+              <a:buNone/>
+            </a:pPr>
+            <a:r>
+              <a:rPr lang="en-US" sz="1100" i="1" dirty="0">
+                <a:solidFill>
+                  <a:srgbClr val="64748B"/>
+                </a:solidFill>
+                <a:latin typeface="Calibri" pitchFamily="34" charset="0"/>
+                <a:ea typeface="Calibri" pitchFamily="34" charset="-122"/>
+                <a:cs typeface="Calibri" pitchFamily="34" charset="-120"/>
+              </a:rPr>
+              <a:t>[WhatsApp chat screenshot]</a:t>
+            </a:r>
+            <a:endParaRPr lang="en-US" sz="1100" dirty="0"/>
+          </a:p>
+        </p:txBody>
+      </p:sp>
       <p:graphicFrame>
         <p:nvGraphicFramePr>
-          <p:cNvPr id="8" name="Table 0"/>
+          <p:cNvPr id="10" name="Table 0"/>
           <p:cNvGraphicFramePr>
             <a:graphicFrameLocks noGrp="1"/>
           </p:cNvGraphicFramePr>
@@ -6198,7 +8574,7 @@
           </p:nvPr>
         </p:nvGraphicFramePr>
         <p:xfrm>
-          <a:off x="548640" y="1188720"/>
+          <a:off x="548640" y="3383280"/>
           <a:ext cx="8046720" cy="914400"/>
         </p:xfrm>
         <a:graphic>
@@ -6206,12 +8582,11 @@
             <a:tbl>
               <a:tblPr/>
               <a:tblGrid>
-                <a:gridCol w="1828800"/>
-                <a:gridCol w="1097280"/>
-                <a:gridCol w="3291840"/>
-                <a:gridCol w="1828800"/>
+                <a:gridCol w="2743200"/>
+                <a:gridCol w="2651760"/>
+                <a:gridCol w="2651760"/>
               </a:tblGrid>
-              <a:tr h="365760">
+              <a:tr h="320040">
                 <a:tc>
                   <a:txBody>
                     <a:bodyPr/>
@@ -6221,7 +8596,7 @@
                         <a:buNone/>
                       </a:pPr>
                       <a:r>
-                        <a:rPr lang="en-US" sz="1300" b="1" dirty="0">
+                        <a:rPr lang="en-US" sz="1200" b="1" dirty="0">
                           <a:solidFill>
                             <a:srgbClr val="FFFFFF"/>
                           </a:solidFill>
@@ -6229,9 +8604,9 @@
                           <a:ea typeface="Calibri" pitchFamily="34" charset="-122"/>
                           <a:cs typeface="Calibri" pitchFamily="34" charset="-120"/>
                         </a:rPr>
-                        <a:t>Provider</a:t>
+                        <a:t>Framework</a:t>
                       </a:r>
-                      <a:endParaRPr lang="en-US" sz="1300" dirty="0">
+                      <a:endParaRPr lang="en-US" sz="1200" dirty="0">
                         <a:latin typeface="Calibri" charset="0"/>
                         <a:ea typeface="Calibri" charset="0"/>
                         <a:cs typeface="Calibri" charset="0"/>
@@ -6289,7 +8664,7 @@
                         <a:buNone/>
                       </a:pPr>
                       <a:r>
-                        <a:rPr lang="en-US" sz="1300" b="1" dirty="0">
+                        <a:rPr lang="en-US" sz="1200" b="1" dirty="0">
                           <a:solidFill>
                             <a:srgbClr val="FFFFFF"/>
                           </a:solidFill>
@@ -6297,9 +8672,9 @@
                           <a:ea typeface="Calibri" pitchFamily="34" charset="-122"/>
                           <a:cs typeface="Calibri" pitchFamily="34" charset="-120"/>
                         </a:rPr>
-                        <a:t>Cost</a:t>
+                        <a:t>LOC</a:t>
                       </a:r>
-                      <a:endParaRPr lang="en-US" sz="1300" dirty="0">
+                      <a:endParaRPr lang="en-US" sz="1200" dirty="0">
                         <a:latin typeface="Calibri" charset="0"/>
                         <a:ea typeface="Calibri" charset="0"/>
                         <a:cs typeface="Calibri" charset="0"/>
@@ -6357,7 +8732,7 @@
                         <a:buNone/>
                       </a:pPr>
                       <a:r>
-                        <a:rPr lang="en-US" sz="1300" b="1" dirty="0">
+                        <a:rPr lang="en-US" sz="1200" b="1" dirty="0">
                           <a:solidFill>
                             <a:srgbClr val="FFFFFF"/>
                           </a:solidFill>
@@ -6365,77 +8740,9 @@
                           <a:ea typeface="Calibri" pitchFamily="34" charset="-122"/>
                           <a:cs typeface="Calibri" pitchFamily="34" charset="-120"/>
                         </a:rPr>
-                        <a:t>Default Model</a:t>
+                        <a:t>Reduction</a:t>
                       </a:r>
-                      <a:endParaRPr lang="en-US" sz="1300" dirty="0">
-                        <a:latin typeface="Calibri" charset="0"/>
-                        <a:ea typeface="Calibri" charset="0"/>
-                        <a:cs typeface="Calibri" charset="0"/>
-                      </a:endParaRPr>
-                    </a:p>
-                  </a:txBody>
-                  <a:tcPr marL="91440" marR="91440" marT="45720" marB="45720">
-                    <a:lnL w="6350" cap="flat" cmpd="sng" algn="ctr">
-                      <a:solidFill>
-                        <a:srgbClr val="94A3B8"/>
-                      </a:solidFill>
-                      <a:prstDash val="solid"/>
-                      <a:round/>
-                      <a:headEnd type="none" w="med" len="med"/>
-                      <a:tailEnd type="none" w="med" len="med"/>
-                    </a:lnL>
-                    <a:lnR w="6350" cap="flat" cmpd="sng" algn="ctr">
-                      <a:solidFill>
-                        <a:srgbClr val="94A3B8"/>
-                      </a:solidFill>
-                      <a:prstDash val="solid"/>
-                      <a:round/>
-                      <a:headEnd type="none" w="med" len="med"/>
-                      <a:tailEnd type="none" w="med" len="med"/>
-                    </a:lnR>
-                    <a:lnT w="6350" cap="flat" cmpd="sng" algn="ctr">
-                      <a:solidFill>
-                        <a:srgbClr val="94A3B8"/>
-                      </a:solidFill>
-                      <a:prstDash val="solid"/>
-                      <a:round/>
-                      <a:headEnd type="none" w="med" len="med"/>
-                      <a:tailEnd type="none" w="med" len="med"/>
-                    </a:lnT>
-                    <a:lnB w="6350" cap="flat" cmpd="sng" algn="ctr">
-                      <a:solidFill>
-                        <a:srgbClr val="94A3B8"/>
-                      </a:solidFill>
-                      <a:prstDash val="solid"/>
-                      <a:round/>
-                      <a:headEnd type="none" w="med" len="med"/>
-                      <a:tailEnd type="none" w="med" len="med"/>
-                    </a:lnB>
-                    <a:solidFill>
-                      <a:srgbClr val="1E2761"/>
-                    </a:solidFill>
-                  </a:tcPr>
-                </a:tc>
-                <a:tc>
-                  <a:txBody>
-                    <a:bodyPr/>
-                    <a:lstStyle/>
-                    <a:p>
-                      <a:pPr indent="0" marL="0">
-                        <a:buNone/>
-                      </a:pPr>
-                      <a:r>
-                        <a:rPr lang="en-US" sz="1300" b="1" dirty="0">
-                          <a:solidFill>
-                            <a:srgbClr val="FFFFFF"/>
-                          </a:solidFill>
-                          <a:latin typeface="Calibri" pitchFamily="34" charset="0"/>
-                          <a:ea typeface="Calibri" pitchFamily="34" charset="-122"/>
-                          <a:cs typeface="Calibri" pitchFamily="34" charset="-120"/>
-                        </a:rPr>
-                        <a:t>API Type</a:t>
-                      </a:r>
-                      <a:endParaRPr lang="en-US" sz="1300" dirty="0">
+                      <a:endParaRPr lang="en-US" sz="1200" dirty="0">
                         <a:latin typeface="Calibri" charset="0"/>
                         <a:ea typeface="Calibri" charset="0"/>
                         <a:cs typeface="Calibri" charset="0"/>
@@ -6485,7 +8792,7 @@
                   </a:tcPr>
                 </a:tc>
               </a:tr>
-              <a:tr h="365760">
+              <a:tr h="320040">
                 <a:tc>
                   <a:txBody>
                     <a:bodyPr/>
@@ -6503,7 +8810,487 @@
                           <a:ea typeface="Calibri" pitchFamily="34" charset="-122"/>
                           <a:cs typeface="Calibri" pitchFamily="34" charset="-120"/>
                         </a:rPr>
-                        <a:t>Groq</a:t>
+                        <a:t>OpenClaw</a:t>
+                      </a:r>
+                      <a:endParaRPr lang="en-US" sz="1200" dirty="0">
+                        <a:latin typeface="Calibri" charset="0"/>
+                        <a:ea typeface="Calibri" charset="0"/>
+                        <a:cs typeface="Calibri" charset="0"/>
+                      </a:endParaRPr>
+                    </a:p>
+                  </a:txBody>
+                  <a:tcPr marL="91440" marR="91440" marT="45720" marB="45720">
+                    <a:lnL w="6350" cap="flat" cmpd="sng" algn="ctr">
+                      <a:solidFill>
+                        <a:srgbClr val="94A3B8"/>
+                      </a:solidFill>
+                      <a:prstDash val="solid"/>
+                      <a:round/>
+                      <a:headEnd type="none" w="med" len="med"/>
+                      <a:tailEnd type="none" w="med" len="med"/>
+                    </a:lnL>
+                    <a:lnR w="6350" cap="flat" cmpd="sng" algn="ctr">
+                      <a:solidFill>
+                        <a:srgbClr val="94A3B8"/>
+                      </a:solidFill>
+                      <a:prstDash val="solid"/>
+                      <a:round/>
+                      <a:headEnd type="none" w="med" len="med"/>
+                      <a:tailEnd type="none" w="med" len="med"/>
+                    </a:lnR>
+                    <a:lnT w="6350" cap="flat" cmpd="sng" algn="ctr">
+                      <a:solidFill>
+                        <a:srgbClr val="94A3B8"/>
+                      </a:solidFill>
+                      <a:prstDash val="solid"/>
+                      <a:round/>
+                      <a:headEnd type="none" w="med" len="med"/>
+                      <a:tailEnd type="none" w="med" len="med"/>
+                    </a:lnT>
+                    <a:lnB w="6350" cap="flat" cmpd="sng" algn="ctr">
+                      <a:solidFill>
+                        <a:srgbClr val="94A3B8"/>
+                      </a:solidFill>
+                      <a:prstDash val="solid"/>
+                      <a:round/>
+                      <a:headEnd type="none" w="med" len="med"/>
+                      <a:tailEnd type="none" w="med" len="med"/>
+                    </a:lnB>
+                    <a:solidFill>
+                      <a:srgbClr val="F0F4FF"/>
+                    </a:solidFill>
+                  </a:tcPr>
+                </a:tc>
+                <a:tc>
+                  <a:txBody>
+                    <a:bodyPr/>
+                    <a:lstStyle/>
+                    <a:p>
+                      <a:pPr indent="0" marL="0">
+                        <a:buNone/>
+                      </a:pPr>
+                      <a:r>
+                        <a:rPr lang="en-US" sz="1200" dirty="0">
+                          <a:solidFill>
+                            <a:srgbClr val="1E293B"/>
+                          </a:solidFill>
+                          <a:latin typeface="Calibri" pitchFamily="34" charset="0"/>
+                          <a:ea typeface="Calibri" pitchFamily="34" charset="-122"/>
+                          <a:cs typeface="Calibri" pitchFamily="34" charset="-120"/>
+                        </a:rPr>
+                        <a:t>~500,000</a:t>
+                      </a:r>
+                      <a:endParaRPr lang="en-US" sz="1200" dirty="0">
+                        <a:latin typeface="Calibri" charset="0"/>
+                        <a:ea typeface="Calibri" charset="0"/>
+                        <a:cs typeface="Calibri" charset="0"/>
+                      </a:endParaRPr>
+                    </a:p>
+                  </a:txBody>
+                  <a:tcPr marL="91440" marR="91440" marT="45720" marB="45720">
+                    <a:lnL w="6350" cap="flat" cmpd="sng" algn="ctr">
+                      <a:solidFill>
+                        <a:srgbClr val="94A3B8"/>
+                      </a:solidFill>
+                      <a:prstDash val="solid"/>
+                      <a:round/>
+                      <a:headEnd type="none" w="med" len="med"/>
+                      <a:tailEnd type="none" w="med" len="med"/>
+                    </a:lnL>
+                    <a:lnR w="6350" cap="flat" cmpd="sng" algn="ctr">
+                      <a:solidFill>
+                        <a:srgbClr val="94A3B8"/>
+                      </a:solidFill>
+                      <a:prstDash val="solid"/>
+                      <a:round/>
+                      <a:headEnd type="none" w="med" len="med"/>
+                      <a:tailEnd type="none" w="med" len="med"/>
+                    </a:lnR>
+                    <a:lnT w="6350" cap="flat" cmpd="sng" algn="ctr">
+                      <a:solidFill>
+                        <a:srgbClr val="94A3B8"/>
+                      </a:solidFill>
+                      <a:prstDash val="solid"/>
+                      <a:round/>
+                      <a:headEnd type="none" w="med" len="med"/>
+                      <a:tailEnd type="none" w="med" len="med"/>
+                    </a:lnT>
+                    <a:lnB w="6350" cap="flat" cmpd="sng" algn="ctr">
+                      <a:solidFill>
+                        <a:srgbClr val="94A3B8"/>
+                      </a:solidFill>
+                      <a:prstDash val="solid"/>
+                      <a:round/>
+                      <a:headEnd type="none" w="med" len="med"/>
+                      <a:tailEnd type="none" w="med" len="med"/>
+                    </a:lnB>
+                    <a:solidFill>
+                      <a:srgbClr val="F0F4FF"/>
+                    </a:solidFill>
+                  </a:tcPr>
+                </a:tc>
+                <a:tc>
+                  <a:txBody>
+                    <a:bodyPr/>
+                    <a:lstStyle/>
+                    <a:p>
+                      <a:pPr indent="0" marL="0">
+                        <a:buNone/>
+                      </a:pPr>
+                      <a:r>
+                        <a:rPr lang="en-US" sz="1200" dirty="0">
+                          <a:solidFill>
+                            <a:srgbClr val="1E293B"/>
+                          </a:solidFill>
+                          <a:latin typeface="Calibri" pitchFamily="34" charset="0"/>
+                          <a:ea typeface="Calibri" pitchFamily="34" charset="-122"/>
+                          <a:cs typeface="Calibri" pitchFamily="34" charset="-120"/>
+                        </a:rPr>
+                        <a:t>Baseline</a:t>
+                      </a:r>
+                      <a:endParaRPr lang="en-US" sz="1200" dirty="0">
+                        <a:latin typeface="Calibri" charset="0"/>
+                        <a:ea typeface="Calibri" charset="0"/>
+                        <a:cs typeface="Calibri" charset="0"/>
+                      </a:endParaRPr>
+                    </a:p>
+                  </a:txBody>
+                  <a:tcPr marL="91440" marR="91440" marT="45720" marB="45720">
+                    <a:lnL w="6350" cap="flat" cmpd="sng" algn="ctr">
+                      <a:solidFill>
+                        <a:srgbClr val="94A3B8"/>
+                      </a:solidFill>
+                      <a:prstDash val="solid"/>
+                      <a:round/>
+                      <a:headEnd type="none" w="med" len="med"/>
+                      <a:tailEnd type="none" w="med" len="med"/>
+                    </a:lnL>
+                    <a:lnR w="6350" cap="flat" cmpd="sng" algn="ctr">
+                      <a:solidFill>
+                        <a:srgbClr val="94A3B8"/>
+                      </a:solidFill>
+                      <a:prstDash val="solid"/>
+                      <a:round/>
+                      <a:headEnd type="none" w="med" len="med"/>
+                      <a:tailEnd type="none" w="med" len="med"/>
+                    </a:lnR>
+                    <a:lnT w="6350" cap="flat" cmpd="sng" algn="ctr">
+                      <a:solidFill>
+                        <a:srgbClr val="94A3B8"/>
+                      </a:solidFill>
+                      <a:prstDash val="solid"/>
+                      <a:round/>
+                      <a:headEnd type="none" w="med" len="med"/>
+                      <a:tailEnd type="none" w="med" len="med"/>
+                    </a:lnT>
+                    <a:lnB w="6350" cap="flat" cmpd="sng" algn="ctr">
+                      <a:solidFill>
+                        <a:srgbClr val="94A3B8"/>
+                      </a:solidFill>
+                      <a:prstDash val="solid"/>
+                      <a:round/>
+                      <a:headEnd type="none" w="med" len="med"/>
+                      <a:tailEnd type="none" w="med" len="med"/>
+                    </a:lnB>
+                    <a:solidFill>
+                      <a:srgbClr val="F0F4FF"/>
+                    </a:solidFill>
+                  </a:tcPr>
+                </a:tc>
+              </a:tr>
+              <a:tr h="320040">
+                <a:tc>
+                  <a:txBody>
+                    <a:bodyPr/>
+                    <a:lstStyle/>
+                    <a:p>
+                      <a:pPr indent="0" marL="0">
+                        <a:buNone/>
+                      </a:pPr>
+                      <a:r>
+                        <a:rPr lang="en-US" sz="1200" dirty="0">
+                          <a:solidFill>
+                            <a:srgbClr val="1E293B"/>
+                          </a:solidFill>
+                          <a:latin typeface="Calibri" pitchFamily="34" charset="0"/>
+                          <a:ea typeface="Calibri" pitchFamily="34" charset="-122"/>
+                          <a:cs typeface="Calibri" pitchFamily="34" charset="-120"/>
+                        </a:rPr>
+                        <a:t>NanoClaw</a:t>
+                      </a:r>
+                      <a:endParaRPr lang="en-US" sz="1200" dirty="0">
+                        <a:latin typeface="Calibri" charset="0"/>
+                        <a:ea typeface="Calibri" charset="0"/>
+                        <a:cs typeface="Calibri" charset="0"/>
+                      </a:endParaRPr>
+                    </a:p>
+                  </a:txBody>
+                  <a:tcPr marL="91440" marR="91440" marT="45720" marB="45720">
+                    <a:lnL w="6350" cap="flat" cmpd="sng" algn="ctr">
+                      <a:solidFill>
+                        <a:srgbClr val="94A3B8"/>
+                      </a:solidFill>
+                      <a:prstDash val="solid"/>
+                      <a:round/>
+                      <a:headEnd type="none" w="med" len="med"/>
+                      <a:tailEnd type="none" w="med" len="med"/>
+                    </a:lnL>
+                    <a:lnR w="6350" cap="flat" cmpd="sng" algn="ctr">
+                      <a:solidFill>
+                        <a:srgbClr val="94A3B8"/>
+                      </a:solidFill>
+                      <a:prstDash val="solid"/>
+                      <a:round/>
+                      <a:headEnd type="none" w="med" len="med"/>
+                      <a:tailEnd type="none" w="med" len="med"/>
+                    </a:lnR>
+                    <a:lnT w="6350" cap="flat" cmpd="sng" algn="ctr">
+                      <a:solidFill>
+                        <a:srgbClr val="94A3B8"/>
+                      </a:solidFill>
+                      <a:prstDash val="solid"/>
+                      <a:round/>
+                      <a:headEnd type="none" w="med" len="med"/>
+                      <a:tailEnd type="none" w="med" len="med"/>
+                    </a:lnT>
+                    <a:lnB w="6350" cap="flat" cmpd="sng" algn="ctr">
+                      <a:solidFill>
+                        <a:srgbClr val="94A3B8"/>
+                      </a:solidFill>
+                      <a:prstDash val="solid"/>
+                      <a:round/>
+                      <a:headEnd type="none" w="med" len="med"/>
+                      <a:tailEnd type="none" w="med" len="med"/>
+                    </a:lnB>
+                    <a:solidFill>
+                      <a:srgbClr val="FFFFFF"/>
+                    </a:solidFill>
+                  </a:tcPr>
+                </a:tc>
+                <a:tc>
+                  <a:txBody>
+                    <a:bodyPr/>
+                    <a:lstStyle/>
+                    <a:p>
+                      <a:pPr indent="0" marL="0">
+                        <a:buNone/>
+                      </a:pPr>
+                      <a:r>
+                        <a:rPr lang="en-US" sz="1200" dirty="0">
+                          <a:solidFill>
+                            <a:srgbClr val="1E293B"/>
+                          </a:solidFill>
+                          <a:latin typeface="Calibri" pitchFamily="34" charset="0"/>
+                          <a:ea typeface="Calibri" pitchFamily="34" charset="-122"/>
+                          <a:cs typeface="Calibri" pitchFamily="34" charset="-120"/>
+                        </a:rPr>
+                        <a:t>~3,900</a:t>
+                      </a:r>
+                      <a:endParaRPr lang="en-US" sz="1200" dirty="0">
+                        <a:latin typeface="Calibri" charset="0"/>
+                        <a:ea typeface="Calibri" charset="0"/>
+                        <a:cs typeface="Calibri" charset="0"/>
+                      </a:endParaRPr>
+                    </a:p>
+                  </a:txBody>
+                  <a:tcPr marL="91440" marR="91440" marT="45720" marB="45720">
+                    <a:lnL w="6350" cap="flat" cmpd="sng" algn="ctr">
+                      <a:solidFill>
+                        <a:srgbClr val="94A3B8"/>
+                      </a:solidFill>
+                      <a:prstDash val="solid"/>
+                      <a:round/>
+                      <a:headEnd type="none" w="med" len="med"/>
+                      <a:tailEnd type="none" w="med" len="med"/>
+                    </a:lnL>
+                    <a:lnR w="6350" cap="flat" cmpd="sng" algn="ctr">
+                      <a:solidFill>
+                        <a:srgbClr val="94A3B8"/>
+                      </a:solidFill>
+                      <a:prstDash val="solid"/>
+                      <a:round/>
+                      <a:headEnd type="none" w="med" len="med"/>
+                      <a:tailEnd type="none" w="med" len="med"/>
+                    </a:lnR>
+                    <a:lnT w="6350" cap="flat" cmpd="sng" algn="ctr">
+                      <a:solidFill>
+                        <a:srgbClr val="94A3B8"/>
+                      </a:solidFill>
+                      <a:prstDash val="solid"/>
+                      <a:round/>
+                      <a:headEnd type="none" w="med" len="med"/>
+                      <a:tailEnd type="none" w="med" len="med"/>
+                    </a:lnT>
+                    <a:lnB w="6350" cap="flat" cmpd="sng" algn="ctr">
+                      <a:solidFill>
+                        <a:srgbClr val="94A3B8"/>
+                      </a:solidFill>
+                      <a:prstDash val="solid"/>
+                      <a:round/>
+                      <a:headEnd type="none" w="med" len="med"/>
+                      <a:tailEnd type="none" w="med" len="med"/>
+                    </a:lnB>
+                    <a:solidFill>
+                      <a:srgbClr val="FFFFFF"/>
+                    </a:solidFill>
+                  </a:tcPr>
+                </a:tc>
+                <a:tc>
+                  <a:txBody>
+                    <a:bodyPr/>
+                    <a:lstStyle/>
+                    <a:p>
+                      <a:pPr indent="0" marL="0">
+                        <a:buNone/>
+                      </a:pPr>
+                      <a:r>
+                        <a:rPr lang="en-US" sz="1200" dirty="0">
+                          <a:solidFill>
+                            <a:srgbClr val="1E293B"/>
+                          </a:solidFill>
+                          <a:latin typeface="Calibri" pitchFamily="34" charset="0"/>
+                          <a:ea typeface="Calibri" pitchFamily="34" charset="-122"/>
+                          <a:cs typeface="Calibri" pitchFamily="34" charset="-120"/>
+                        </a:rPr>
+                        <a:t>99.2%</a:t>
+                      </a:r>
+                      <a:endParaRPr lang="en-US" sz="1200" dirty="0">
+                        <a:latin typeface="Calibri" charset="0"/>
+                        <a:ea typeface="Calibri" charset="0"/>
+                        <a:cs typeface="Calibri" charset="0"/>
+                      </a:endParaRPr>
+                    </a:p>
+                  </a:txBody>
+                  <a:tcPr marL="91440" marR="91440" marT="45720" marB="45720">
+                    <a:lnL w="6350" cap="flat" cmpd="sng" algn="ctr">
+                      <a:solidFill>
+                        <a:srgbClr val="94A3B8"/>
+                      </a:solidFill>
+                      <a:prstDash val="solid"/>
+                      <a:round/>
+                      <a:headEnd type="none" w="med" len="med"/>
+                      <a:tailEnd type="none" w="med" len="med"/>
+                    </a:lnL>
+                    <a:lnR w="6350" cap="flat" cmpd="sng" algn="ctr">
+                      <a:solidFill>
+                        <a:srgbClr val="94A3B8"/>
+                      </a:solidFill>
+                      <a:prstDash val="solid"/>
+                      <a:round/>
+                      <a:headEnd type="none" w="med" len="med"/>
+                      <a:tailEnd type="none" w="med" len="med"/>
+                    </a:lnR>
+                    <a:lnT w="6350" cap="flat" cmpd="sng" algn="ctr">
+                      <a:solidFill>
+                        <a:srgbClr val="94A3B8"/>
+                      </a:solidFill>
+                      <a:prstDash val="solid"/>
+                      <a:round/>
+                      <a:headEnd type="none" w="med" len="med"/>
+                      <a:tailEnd type="none" w="med" len="med"/>
+                    </a:lnT>
+                    <a:lnB w="6350" cap="flat" cmpd="sng" algn="ctr">
+                      <a:solidFill>
+                        <a:srgbClr val="94A3B8"/>
+                      </a:solidFill>
+                      <a:prstDash val="solid"/>
+                      <a:round/>
+                      <a:headEnd type="none" w="med" len="med"/>
+                      <a:tailEnd type="none" w="med" len="med"/>
+                    </a:lnB>
+                    <a:solidFill>
+                      <a:srgbClr val="FFFFFF"/>
+                    </a:solidFill>
+                  </a:tcPr>
+                </a:tc>
+              </a:tr>
+              <a:tr h="320040">
+                <a:tc>
+                  <a:txBody>
+                    <a:bodyPr/>
+                    <a:lstStyle/>
+                    <a:p>
+                      <a:pPr indent="0" marL="0">
+                        <a:buNone/>
+                      </a:pPr>
+                      <a:r>
+                        <a:rPr lang="en-US" sz="1200" b="1" dirty="0">
+                          <a:solidFill>
+                            <a:srgbClr val="1E293B"/>
+                          </a:solidFill>
+                          <a:latin typeface="Calibri" pitchFamily="34" charset="0"/>
+                          <a:ea typeface="Calibri" pitchFamily="34" charset="-122"/>
+                          <a:cs typeface="Calibri" pitchFamily="34" charset="-120"/>
+                        </a:rPr>
+                        <a:t>LiteClaw</a:t>
+                      </a:r>
+                      <a:endParaRPr lang="en-US" sz="1200" dirty="0">
+                        <a:latin typeface="Calibri" charset="0"/>
+                        <a:ea typeface="Calibri" charset="0"/>
+                        <a:cs typeface="Calibri" charset="0"/>
+                      </a:endParaRPr>
+                    </a:p>
+                  </a:txBody>
+                  <a:tcPr marL="91440" marR="91440" marT="45720" marB="45720">
+                    <a:lnL w="6350" cap="flat" cmpd="sng" algn="ctr">
+                      <a:solidFill>
+                        <a:srgbClr val="94A3B8"/>
+                      </a:solidFill>
+                      <a:prstDash val="solid"/>
+                      <a:round/>
+                      <a:headEnd type="none" w="med" len="med"/>
+                      <a:tailEnd type="none" w="med" len="med"/>
+                    </a:lnL>
+                    <a:lnR w="6350" cap="flat" cmpd="sng" algn="ctr">
+                      <a:solidFill>
+                        <a:srgbClr val="94A3B8"/>
+                      </a:solidFill>
+                      <a:prstDash val="solid"/>
+                      <a:round/>
+                      <a:headEnd type="none" w="med" len="med"/>
+                      <a:tailEnd type="none" w="med" len="med"/>
+                    </a:lnR>
+                    <a:lnT w="6350" cap="flat" cmpd="sng" algn="ctr">
+                      <a:solidFill>
+                        <a:srgbClr val="94A3B8"/>
+                      </a:solidFill>
+                      <a:prstDash val="solid"/>
+                      <a:round/>
+                      <a:headEnd type="none" w="med" len="med"/>
+                      <a:tailEnd type="none" w="med" len="med"/>
+                    </a:lnT>
+                    <a:lnB w="6350" cap="flat" cmpd="sng" algn="ctr">
+                      <a:solidFill>
+                        <a:srgbClr val="94A3B8"/>
+                      </a:solidFill>
+                      <a:prstDash val="solid"/>
+                      <a:round/>
+                      <a:headEnd type="none" w="med" len="med"/>
+                      <a:tailEnd type="none" w="med" len="med"/>
+                    </a:lnB>
+                    <a:solidFill>
+                      <a:srgbClr val="F0F4FF"/>
+                    </a:solidFill>
+                  </a:tcPr>
+                </a:tc>
+                <a:tc>
+                  <a:txBody>
+                    <a:bodyPr/>
+                    <a:lstStyle/>
+                    <a:p>
+                      <a:pPr indent="0" marL="0">
+                        <a:buNone/>
+                      </a:pPr>
+                      <a:r>
+                        <a:rPr lang="en-US" sz="1200" b="1" dirty="0">
+                          <a:solidFill>
+                            <a:srgbClr val="3B82F6"/>
+                          </a:solidFill>
+                          <a:latin typeface="Calibri" pitchFamily="34" charset="0"/>
+                          <a:ea typeface="Calibri" pitchFamily="34" charset="-122"/>
+                          <a:cs typeface="Calibri" pitchFamily="34" charset="-120"/>
+                        </a:rPr>
+                        <a:t>~1,800</a:t>
                       </a:r>
                       <a:endParaRPr lang="en-US" sz="1200" dirty="0">
                         <a:latin typeface="Calibri" charset="0"/>
@@ -6571,143 +9358,7 @@
                           <a:ea typeface="Calibri" pitchFamily="34" charset="-122"/>
                           <a:cs typeface="Calibri" pitchFamily="34" charset="-120"/>
                         </a:rPr>
-                        <a:t>Free</a:t>
-                      </a:r>
-                      <a:endParaRPr lang="en-US" sz="1200" dirty="0">
-                        <a:latin typeface="Calibri" charset="0"/>
-                        <a:ea typeface="Calibri" charset="0"/>
-                        <a:cs typeface="Calibri" charset="0"/>
-                      </a:endParaRPr>
-                    </a:p>
-                  </a:txBody>
-                  <a:tcPr marL="91440" marR="91440" marT="45720" marB="45720">
-                    <a:lnL w="6350" cap="flat" cmpd="sng" algn="ctr">
-                      <a:solidFill>
-                        <a:srgbClr val="94A3B8"/>
-                      </a:solidFill>
-                      <a:prstDash val="solid"/>
-                      <a:round/>
-                      <a:headEnd type="none" w="med" len="med"/>
-                      <a:tailEnd type="none" w="med" len="med"/>
-                    </a:lnL>
-                    <a:lnR w="6350" cap="flat" cmpd="sng" algn="ctr">
-                      <a:solidFill>
-                        <a:srgbClr val="94A3B8"/>
-                      </a:solidFill>
-                      <a:prstDash val="solid"/>
-                      <a:round/>
-                      <a:headEnd type="none" w="med" len="med"/>
-                      <a:tailEnd type="none" w="med" len="med"/>
-                    </a:lnR>
-                    <a:lnT w="6350" cap="flat" cmpd="sng" algn="ctr">
-                      <a:solidFill>
-                        <a:srgbClr val="94A3B8"/>
-                      </a:solidFill>
-                      <a:prstDash val="solid"/>
-                      <a:round/>
-                      <a:headEnd type="none" w="med" len="med"/>
-                      <a:tailEnd type="none" w="med" len="med"/>
-                    </a:lnT>
-                    <a:lnB w="6350" cap="flat" cmpd="sng" algn="ctr">
-                      <a:solidFill>
-                        <a:srgbClr val="94A3B8"/>
-                      </a:solidFill>
-                      <a:prstDash val="solid"/>
-                      <a:round/>
-                      <a:headEnd type="none" w="med" len="med"/>
-                      <a:tailEnd type="none" w="med" len="med"/>
-                    </a:lnB>
-                    <a:solidFill>
-                      <a:srgbClr val="F0F4FF"/>
-                    </a:solidFill>
-                  </a:tcPr>
-                </a:tc>
-                <a:tc>
-                  <a:txBody>
-                    <a:bodyPr/>
-                    <a:lstStyle/>
-                    <a:p>
-                      <a:pPr indent="0" marL="0">
-                        <a:buNone/>
-                      </a:pPr>
-                      <a:r>
-                        <a:rPr lang="en-US" sz="1200" dirty="0">
-                          <a:solidFill>
-                            <a:srgbClr val="1E293B"/>
-                          </a:solidFill>
-                          <a:latin typeface="Calibri" pitchFamily="34" charset="0"/>
-                          <a:ea typeface="Calibri" pitchFamily="34" charset="-122"/>
-                          <a:cs typeface="Calibri" pitchFamily="34" charset="-120"/>
-                        </a:rPr>
-                        <a:t>llama-3.3-70b-versatile</a:t>
-                      </a:r>
-                      <a:endParaRPr lang="en-US" sz="1200" dirty="0">
-                        <a:latin typeface="Calibri" charset="0"/>
-                        <a:ea typeface="Calibri" charset="0"/>
-                        <a:cs typeface="Calibri" charset="0"/>
-                      </a:endParaRPr>
-                    </a:p>
-                  </a:txBody>
-                  <a:tcPr marL="91440" marR="91440" marT="45720" marB="45720">
-                    <a:lnL w="6350" cap="flat" cmpd="sng" algn="ctr">
-                      <a:solidFill>
-                        <a:srgbClr val="94A3B8"/>
-                      </a:solidFill>
-                      <a:prstDash val="solid"/>
-                      <a:round/>
-                      <a:headEnd type="none" w="med" len="med"/>
-                      <a:tailEnd type="none" w="med" len="med"/>
-                    </a:lnL>
-                    <a:lnR w="6350" cap="flat" cmpd="sng" algn="ctr">
-                      <a:solidFill>
-                        <a:srgbClr val="94A3B8"/>
-                      </a:solidFill>
-                      <a:prstDash val="solid"/>
-                      <a:round/>
-                      <a:headEnd type="none" w="med" len="med"/>
-                      <a:tailEnd type="none" w="med" len="med"/>
-                    </a:lnR>
-                    <a:lnT w="6350" cap="flat" cmpd="sng" algn="ctr">
-                      <a:solidFill>
-                        <a:srgbClr val="94A3B8"/>
-                      </a:solidFill>
-                      <a:prstDash val="solid"/>
-                      <a:round/>
-                      <a:headEnd type="none" w="med" len="med"/>
-                      <a:tailEnd type="none" w="med" len="med"/>
-                    </a:lnT>
-                    <a:lnB w="6350" cap="flat" cmpd="sng" algn="ctr">
-                      <a:solidFill>
-                        <a:srgbClr val="94A3B8"/>
-                      </a:solidFill>
-                      <a:prstDash val="solid"/>
-                      <a:round/>
-                      <a:headEnd type="none" w="med" len="med"/>
-                      <a:tailEnd type="none" w="med" len="med"/>
-                    </a:lnB>
-                    <a:solidFill>
-                      <a:srgbClr val="F0F4FF"/>
-                    </a:solidFill>
-                  </a:tcPr>
-                </a:tc>
-                <a:tc>
-                  <a:txBody>
-                    <a:bodyPr/>
-                    <a:lstStyle/>
-                    <a:p>
-                      <a:pPr indent="0" marL="0">
-                        <a:buNone/>
-                      </a:pPr>
-                      <a:r>
-                        <a:rPr lang="en-US" sz="1200" dirty="0">
-                          <a:solidFill>
-                            <a:srgbClr val="1E293B"/>
-                          </a:solidFill>
-                          <a:latin typeface="Calibri" pitchFamily="34" charset="0"/>
-                          <a:ea typeface="Calibri" pitchFamily="34" charset="-122"/>
-                          <a:cs typeface="Calibri" pitchFamily="34" charset="-120"/>
-                        </a:rPr>
-                        <a:t>OpenAI-compat</a:t>
+                        <a:t>99.6%</a:t>
                       </a:r>
                       <a:endParaRPr lang="en-US" sz="1200" dirty="0">
                         <a:latin typeface="Calibri" charset="0"/>
@@ -6759,2931 +9410,10 @@
                   </a:tcPr>
                 </a:tc>
               </a:tr>
-              <a:tr h="365760">
-                <a:tc>
-                  <a:txBody>
-                    <a:bodyPr/>
-                    <a:lstStyle/>
-                    <a:p>
-                      <a:pPr indent="0" marL="0">
-                        <a:buNone/>
-                      </a:pPr>
-                      <a:r>
-                        <a:rPr lang="en-US" sz="1200" dirty="0">
-                          <a:solidFill>
-                            <a:srgbClr val="1E293B"/>
-                          </a:solidFill>
-                          <a:latin typeface="Calibri" pitchFamily="34" charset="0"/>
-                          <a:ea typeface="Calibri" pitchFamily="34" charset="-122"/>
-                          <a:cs typeface="Calibri" pitchFamily="34" charset="-120"/>
-                        </a:rPr>
-                        <a:t>Google Gemini</a:t>
-                      </a:r>
-                      <a:endParaRPr lang="en-US" sz="1200" dirty="0">
-                        <a:latin typeface="Calibri" charset="0"/>
-                        <a:ea typeface="Calibri" charset="0"/>
-                        <a:cs typeface="Calibri" charset="0"/>
-                      </a:endParaRPr>
-                    </a:p>
-                  </a:txBody>
-                  <a:tcPr marL="91440" marR="91440" marT="45720" marB="45720">
-                    <a:lnL w="6350" cap="flat" cmpd="sng" algn="ctr">
-                      <a:solidFill>
-                        <a:srgbClr val="94A3B8"/>
-                      </a:solidFill>
-                      <a:prstDash val="solid"/>
-                      <a:round/>
-                      <a:headEnd type="none" w="med" len="med"/>
-                      <a:tailEnd type="none" w="med" len="med"/>
-                    </a:lnL>
-                    <a:lnR w="6350" cap="flat" cmpd="sng" algn="ctr">
-                      <a:solidFill>
-                        <a:srgbClr val="94A3B8"/>
-                      </a:solidFill>
-                      <a:prstDash val="solid"/>
-                      <a:round/>
-                      <a:headEnd type="none" w="med" len="med"/>
-                      <a:tailEnd type="none" w="med" len="med"/>
-                    </a:lnR>
-                    <a:lnT w="6350" cap="flat" cmpd="sng" algn="ctr">
-                      <a:solidFill>
-                        <a:srgbClr val="94A3B8"/>
-                      </a:solidFill>
-                      <a:prstDash val="solid"/>
-                      <a:round/>
-                      <a:headEnd type="none" w="med" len="med"/>
-                      <a:tailEnd type="none" w="med" len="med"/>
-                    </a:lnT>
-                    <a:lnB w="6350" cap="flat" cmpd="sng" algn="ctr">
-                      <a:solidFill>
-                        <a:srgbClr val="94A3B8"/>
-                      </a:solidFill>
-                      <a:prstDash val="solid"/>
-                      <a:round/>
-                      <a:headEnd type="none" w="med" len="med"/>
-                      <a:tailEnd type="none" w="med" len="med"/>
-                    </a:lnB>
-                    <a:solidFill>
-                      <a:srgbClr val="FFFFFF"/>
-                    </a:solidFill>
-                  </a:tcPr>
-                </a:tc>
-                <a:tc>
-                  <a:txBody>
-                    <a:bodyPr/>
-                    <a:lstStyle/>
-                    <a:p>
-                      <a:pPr indent="0" marL="0">
-                        <a:buNone/>
-                      </a:pPr>
-                      <a:r>
-                        <a:rPr lang="en-US" sz="1200" b="1" dirty="0">
-                          <a:solidFill>
-                            <a:srgbClr val="10B981"/>
-                          </a:solidFill>
-                          <a:latin typeface="Calibri" pitchFamily="34" charset="0"/>
-                          <a:ea typeface="Calibri" pitchFamily="34" charset="-122"/>
-                          <a:cs typeface="Calibri" pitchFamily="34" charset="-120"/>
-                        </a:rPr>
-                        <a:t>Free</a:t>
-                      </a:r>
-                      <a:endParaRPr lang="en-US" sz="1200" dirty="0">
-                        <a:latin typeface="Calibri" charset="0"/>
-                        <a:ea typeface="Calibri" charset="0"/>
-                        <a:cs typeface="Calibri" charset="0"/>
-                      </a:endParaRPr>
-                    </a:p>
-                  </a:txBody>
-                  <a:tcPr marL="91440" marR="91440" marT="45720" marB="45720">
-                    <a:lnL w="6350" cap="flat" cmpd="sng" algn="ctr">
-                      <a:solidFill>
-                        <a:srgbClr val="94A3B8"/>
-                      </a:solidFill>
-                      <a:prstDash val="solid"/>
-                      <a:round/>
-                      <a:headEnd type="none" w="med" len="med"/>
-                      <a:tailEnd type="none" w="med" len="med"/>
-                    </a:lnL>
-                    <a:lnR w="6350" cap="flat" cmpd="sng" algn="ctr">
-                      <a:solidFill>
-                        <a:srgbClr val="94A3B8"/>
-                      </a:solidFill>
-                      <a:prstDash val="solid"/>
-                      <a:round/>
-                      <a:headEnd type="none" w="med" len="med"/>
-                      <a:tailEnd type="none" w="med" len="med"/>
-                    </a:lnR>
-                    <a:lnT w="6350" cap="flat" cmpd="sng" algn="ctr">
-                      <a:solidFill>
-                        <a:srgbClr val="94A3B8"/>
-                      </a:solidFill>
-                      <a:prstDash val="solid"/>
-                      <a:round/>
-                      <a:headEnd type="none" w="med" len="med"/>
-                      <a:tailEnd type="none" w="med" len="med"/>
-                    </a:lnT>
-                    <a:lnB w="6350" cap="flat" cmpd="sng" algn="ctr">
-                      <a:solidFill>
-                        <a:srgbClr val="94A3B8"/>
-                      </a:solidFill>
-                      <a:prstDash val="solid"/>
-                      <a:round/>
-                      <a:headEnd type="none" w="med" len="med"/>
-                      <a:tailEnd type="none" w="med" len="med"/>
-                    </a:lnB>
-                    <a:solidFill>
-                      <a:srgbClr val="FFFFFF"/>
-                    </a:solidFill>
-                  </a:tcPr>
-                </a:tc>
-                <a:tc>
-                  <a:txBody>
-                    <a:bodyPr/>
-                    <a:lstStyle/>
-                    <a:p>
-                      <a:pPr indent="0" marL="0">
-                        <a:buNone/>
-                      </a:pPr>
-                      <a:r>
-                        <a:rPr lang="en-US" sz="1200" dirty="0">
-                          <a:solidFill>
-                            <a:srgbClr val="1E293B"/>
-                          </a:solidFill>
-                          <a:latin typeface="Calibri" pitchFamily="34" charset="0"/>
-                          <a:ea typeface="Calibri" pitchFamily="34" charset="-122"/>
-                          <a:cs typeface="Calibri" pitchFamily="34" charset="-120"/>
-                        </a:rPr>
-                        <a:t>gemini-2.5-flash</a:t>
-                      </a:r>
-                      <a:endParaRPr lang="en-US" sz="1200" dirty="0">
-                        <a:latin typeface="Calibri" charset="0"/>
-                        <a:ea typeface="Calibri" charset="0"/>
-                        <a:cs typeface="Calibri" charset="0"/>
-                      </a:endParaRPr>
-                    </a:p>
-                  </a:txBody>
-                  <a:tcPr marL="91440" marR="91440" marT="45720" marB="45720">
-                    <a:lnL w="6350" cap="flat" cmpd="sng" algn="ctr">
-                      <a:solidFill>
-                        <a:srgbClr val="94A3B8"/>
-                      </a:solidFill>
-                      <a:prstDash val="solid"/>
-                      <a:round/>
-                      <a:headEnd type="none" w="med" len="med"/>
-                      <a:tailEnd type="none" w="med" len="med"/>
-                    </a:lnL>
-                    <a:lnR w="6350" cap="flat" cmpd="sng" algn="ctr">
-                      <a:solidFill>
-                        <a:srgbClr val="94A3B8"/>
-                      </a:solidFill>
-                      <a:prstDash val="solid"/>
-                      <a:round/>
-                      <a:headEnd type="none" w="med" len="med"/>
-                      <a:tailEnd type="none" w="med" len="med"/>
-                    </a:lnR>
-                    <a:lnT w="6350" cap="flat" cmpd="sng" algn="ctr">
-                      <a:solidFill>
-                        <a:srgbClr val="94A3B8"/>
-                      </a:solidFill>
-                      <a:prstDash val="solid"/>
-                      <a:round/>
-                      <a:headEnd type="none" w="med" len="med"/>
-                      <a:tailEnd type="none" w="med" len="med"/>
-                    </a:lnT>
-                    <a:lnB w="6350" cap="flat" cmpd="sng" algn="ctr">
-                      <a:solidFill>
-                        <a:srgbClr val="94A3B8"/>
-                      </a:solidFill>
-                      <a:prstDash val="solid"/>
-                      <a:round/>
-                      <a:headEnd type="none" w="med" len="med"/>
-                      <a:tailEnd type="none" w="med" len="med"/>
-                    </a:lnB>
-                    <a:solidFill>
-                      <a:srgbClr val="FFFFFF"/>
-                    </a:solidFill>
-                  </a:tcPr>
-                </a:tc>
-                <a:tc>
-                  <a:txBody>
-                    <a:bodyPr/>
-                    <a:lstStyle/>
-                    <a:p>
-                      <a:pPr indent="0" marL="0">
-                        <a:buNone/>
-                      </a:pPr>
-                      <a:r>
-                        <a:rPr lang="en-US" sz="1200" dirty="0">
-                          <a:solidFill>
-                            <a:srgbClr val="1E293B"/>
-                          </a:solidFill>
-                          <a:latin typeface="Calibri" pitchFamily="34" charset="0"/>
-                          <a:ea typeface="Calibri" pitchFamily="34" charset="-122"/>
-                          <a:cs typeface="Calibri" pitchFamily="34" charset="-120"/>
-                        </a:rPr>
-                        <a:t>OpenAI-compat</a:t>
-                      </a:r>
-                      <a:endParaRPr lang="en-US" sz="1200" dirty="0">
-                        <a:latin typeface="Calibri" charset="0"/>
-                        <a:ea typeface="Calibri" charset="0"/>
-                        <a:cs typeface="Calibri" charset="0"/>
-                      </a:endParaRPr>
-                    </a:p>
-                  </a:txBody>
-                  <a:tcPr marL="91440" marR="91440" marT="45720" marB="45720">
-                    <a:lnL w="6350" cap="flat" cmpd="sng" algn="ctr">
-                      <a:solidFill>
-                        <a:srgbClr val="94A3B8"/>
-                      </a:solidFill>
-                      <a:prstDash val="solid"/>
-                      <a:round/>
-                      <a:headEnd type="none" w="med" len="med"/>
-                      <a:tailEnd type="none" w="med" len="med"/>
-                    </a:lnL>
-                    <a:lnR w="6350" cap="flat" cmpd="sng" algn="ctr">
-                      <a:solidFill>
-                        <a:srgbClr val="94A3B8"/>
-                      </a:solidFill>
-                      <a:prstDash val="solid"/>
-                      <a:round/>
-                      <a:headEnd type="none" w="med" len="med"/>
-                      <a:tailEnd type="none" w="med" len="med"/>
-                    </a:lnR>
-                    <a:lnT w="6350" cap="flat" cmpd="sng" algn="ctr">
-                      <a:solidFill>
-                        <a:srgbClr val="94A3B8"/>
-                      </a:solidFill>
-                      <a:prstDash val="solid"/>
-                      <a:round/>
-                      <a:headEnd type="none" w="med" len="med"/>
-                      <a:tailEnd type="none" w="med" len="med"/>
-                    </a:lnT>
-                    <a:lnB w="6350" cap="flat" cmpd="sng" algn="ctr">
-                      <a:solidFill>
-                        <a:srgbClr val="94A3B8"/>
-                      </a:solidFill>
-                      <a:prstDash val="solid"/>
-                      <a:round/>
-                      <a:headEnd type="none" w="med" len="med"/>
-                      <a:tailEnd type="none" w="med" len="med"/>
-                    </a:lnB>
-                    <a:solidFill>
-                      <a:srgbClr val="FFFFFF"/>
-                    </a:solidFill>
-                  </a:tcPr>
-                </a:tc>
-              </a:tr>
-              <a:tr h="365760">
-                <a:tc>
-                  <a:txBody>
-                    <a:bodyPr/>
-                    <a:lstStyle/>
-                    <a:p>
-                      <a:pPr indent="0" marL="0">
-                        <a:buNone/>
-                      </a:pPr>
-                      <a:r>
-                        <a:rPr lang="en-US" sz="1200" dirty="0">
-                          <a:solidFill>
-                            <a:srgbClr val="1E293B"/>
-                          </a:solidFill>
-                          <a:latin typeface="Calibri" pitchFamily="34" charset="0"/>
-                          <a:ea typeface="Calibri" pitchFamily="34" charset="-122"/>
-                          <a:cs typeface="Calibri" pitchFamily="34" charset="-120"/>
-                        </a:rPr>
-                        <a:t>DeepSeek</a:t>
-                      </a:r>
-                      <a:endParaRPr lang="en-US" sz="1200" dirty="0">
-                        <a:latin typeface="Calibri" charset="0"/>
-                        <a:ea typeface="Calibri" charset="0"/>
-                        <a:cs typeface="Calibri" charset="0"/>
-                      </a:endParaRPr>
-                    </a:p>
-                  </a:txBody>
-                  <a:tcPr marL="91440" marR="91440" marT="45720" marB="45720">
-                    <a:lnL w="6350" cap="flat" cmpd="sng" algn="ctr">
-                      <a:solidFill>
-                        <a:srgbClr val="94A3B8"/>
-                      </a:solidFill>
-                      <a:prstDash val="solid"/>
-                      <a:round/>
-                      <a:headEnd type="none" w="med" len="med"/>
-                      <a:tailEnd type="none" w="med" len="med"/>
-                    </a:lnL>
-                    <a:lnR w="6350" cap="flat" cmpd="sng" algn="ctr">
-                      <a:solidFill>
-                        <a:srgbClr val="94A3B8"/>
-                      </a:solidFill>
-                      <a:prstDash val="solid"/>
-                      <a:round/>
-                      <a:headEnd type="none" w="med" len="med"/>
-                      <a:tailEnd type="none" w="med" len="med"/>
-                    </a:lnR>
-                    <a:lnT w="6350" cap="flat" cmpd="sng" algn="ctr">
-                      <a:solidFill>
-                        <a:srgbClr val="94A3B8"/>
-                      </a:solidFill>
-                      <a:prstDash val="solid"/>
-                      <a:round/>
-                      <a:headEnd type="none" w="med" len="med"/>
-                      <a:tailEnd type="none" w="med" len="med"/>
-                    </a:lnT>
-                    <a:lnB w="6350" cap="flat" cmpd="sng" algn="ctr">
-                      <a:solidFill>
-                        <a:srgbClr val="94A3B8"/>
-                      </a:solidFill>
-                      <a:prstDash val="solid"/>
-                      <a:round/>
-                      <a:headEnd type="none" w="med" len="med"/>
-                      <a:tailEnd type="none" w="med" len="med"/>
-                    </a:lnB>
-                    <a:solidFill>
-                      <a:srgbClr val="F0F4FF"/>
-                    </a:solidFill>
-                  </a:tcPr>
-                </a:tc>
-                <a:tc>
-                  <a:txBody>
-                    <a:bodyPr/>
-                    <a:lstStyle/>
-                    <a:p>
-                      <a:pPr indent="0" marL="0">
-                        <a:buNone/>
-                      </a:pPr>
-                      <a:r>
-                        <a:rPr lang="en-US" sz="1200" dirty="0">
-                          <a:solidFill>
-                            <a:srgbClr val="1E293B"/>
-                          </a:solidFill>
-                          <a:latin typeface="Calibri" pitchFamily="34" charset="0"/>
-                          <a:ea typeface="Calibri" pitchFamily="34" charset="-122"/>
-                          <a:cs typeface="Calibri" pitchFamily="34" charset="-120"/>
-                        </a:rPr>
-                        <a:t>Paid</a:t>
-                      </a:r>
-                      <a:endParaRPr lang="en-US" sz="1200" dirty="0">
-                        <a:latin typeface="Calibri" charset="0"/>
-                        <a:ea typeface="Calibri" charset="0"/>
-                        <a:cs typeface="Calibri" charset="0"/>
-                      </a:endParaRPr>
-                    </a:p>
-                  </a:txBody>
-                  <a:tcPr marL="91440" marR="91440" marT="45720" marB="45720">
-                    <a:lnL w="6350" cap="flat" cmpd="sng" algn="ctr">
-                      <a:solidFill>
-                        <a:srgbClr val="94A3B8"/>
-                      </a:solidFill>
-                      <a:prstDash val="solid"/>
-                      <a:round/>
-                      <a:headEnd type="none" w="med" len="med"/>
-                      <a:tailEnd type="none" w="med" len="med"/>
-                    </a:lnL>
-                    <a:lnR w="6350" cap="flat" cmpd="sng" algn="ctr">
-                      <a:solidFill>
-                        <a:srgbClr val="94A3B8"/>
-                      </a:solidFill>
-                      <a:prstDash val="solid"/>
-                      <a:round/>
-                      <a:headEnd type="none" w="med" len="med"/>
-                      <a:tailEnd type="none" w="med" len="med"/>
-                    </a:lnR>
-                    <a:lnT w="6350" cap="flat" cmpd="sng" algn="ctr">
-                      <a:solidFill>
-                        <a:srgbClr val="94A3B8"/>
-                      </a:solidFill>
-                      <a:prstDash val="solid"/>
-                      <a:round/>
-                      <a:headEnd type="none" w="med" len="med"/>
-                      <a:tailEnd type="none" w="med" len="med"/>
-                    </a:lnT>
-                    <a:lnB w="6350" cap="flat" cmpd="sng" algn="ctr">
-                      <a:solidFill>
-                        <a:srgbClr val="94A3B8"/>
-                      </a:solidFill>
-                      <a:prstDash val="solid"/>
-                      <a:round/>
-                      <a:headEnd type="none" w="med" len="med"/>
-                      <a:tailEnd type="none" w="med" len="med"/>
-                    </a:lnB>
-                    <a:solidFill>
-                      <a:srgbClr val="F0F4FF"/>
-                    </a:solidFill>
-                  </a:tcPr>
-                </a:tc>
-                <a:tc>
-                  <a:txBody>
-                    <a:bodyPr/>
-                    <a:lstStyle/>
-                    <a:p>
-                      <a:pPr indent="0" marL="0">
-                        <a:buNone/>
-                      </a:pPr>
-                      <a:r>
-                        <a:rPr lang="en-US" sz="1200" dirty="0">
-                          <a:solidFill>
-                            <a:srgbClr val="1E293B"/>
-                          </a:solidFill>
-                          <a:latin typeface="Calibri" pitchFamily="34" charset="0"/>
-                          <a:ea typeface="Calibri" pitchFamily="34" charset="-122"/>
-                          <a:cs typeface="Calibri" pitchFamily="34" charset="-120"/>
-                        </a:rPr>
-                        <a:t>deepseek-chat</a:t>
-                      </a:r>
-                      <a:endParaRPr lang="en-US" sz="1200" dirty="0">
-                        <a:latin typeface="Calibri" charset="0"/>
-                        <a:ea typeface="Calibri" charset="0"/>
-                        <a:cs typeface="Calibri" charset="0"/>
-                      </a:endParaRPr>
-                    </a:p>
-                  </a:txBody>
-                  <a:tcPr marL="91440" marR="91440" marT="45720" marB="45720">
-                    <a:lnL w="6350" cap="flat" cmpd="sng" algn="ctr">
-                      <a:solidFill>
-                        <a:srgbClr val="94A3B8"/>
-                      </a:solidFill>
-                      <a:prstDash val="solid"/>
-                      <a:round/>
-                      <a:headEnd type="none" w="med" len="med"/>
-                      <a:tailEnd type="none" w="med" len="med"/>
-                    </a:lnL>
-                    <a:lnR w="6350" cap="flat" cmpd="sng" algn="ctr">
-                      <a:solidFill>
-                        <a:srgbClr val="94A3B8"/>
-                      </a:solidFill>
-                      <a:prstDash val="solid"/>
-                      <a:round/>
-                      <a:headEnd type="none" w="med" len="med"/>
-                      <a:tailEnd type="none" w="med" len="med"/>
-                    </a:lnR>
-                    <a:lnT w="6350" cap="flat" cmpd="sng" algn="ctr">
-                      <a:solidFill>
-                        <a:srgbClr val="94A3B8"/>
-                      </a:solidFill>
-                      <a:prstDash val="solid"/>
-                      <a:round/>
-                      <a:headEnd type="none" w="med" len="med"/>
-                      <a:tailEnd type="none" w="med" len="med"/>
-                    </a:lnT>
-                    <a:lnB w="6350" cap="flat" cmpd="sng" algn="ctr">
-                      <a:solidFill>
-                        <a:srgbClr val="94A3B8"/>
-                      </a:solidFill>
-                      <a:prstDash val="solid"/>
-                      <a:round/>
-                      <a:headEnd type="none" w="med" len="med"/>
-                      <a:tailEnd type="none" w="med" len="med"/>
-                    </a:lnB>
-                    <a:solidFill>
-                      <a:srgbClr val="F0F4FF"/>
-                    </a:solidFill>
-                  </a:tcPr>
-                </a:tc>
-                <a:tc>
-                  <a:txBody>
-                    <a:bodyPr/>
-                    <a:lstStyle/>
-                    <a:p>
-                      <a:pPr indent="0" marL="0">
-                        <a:buNone/>
-                      </a:pPr>
-                      <a:r>
-                        <a:rPr lang="en-US" sz="1200" dirty="0">
-                          <a:solidFill>
-                            <a:srgbClr val="1E293B"/>
-                          </a:solidFill>
-                          <a:latin typeface="Calibri" pitchFamily="34" charset="0"/>
-                          <a:ea typeface="Calibri" pitchFamily="34" charset="-122"/>
-                          <a:cs typeface="Calibri" pitchFamily="34" charset="-120"/>
-                        </a:rPr>
-                        <a:t>OpenAI-compat</a:t>
-                      </a:r>
-                      <a:endParaRPr lang="en-US" sz="1200" dirty="0">
-                        <a:latin typeface="Calibri" charset="0"/>
-                        <a:ea typeface="Calibri" charset="0"/>
-                        <a:cs typeface="Calibri" charset="0"/>
-                      </a:endParaRPr>
-                    </a:p>
-                  </a:txBody>
-                  <a:tcPr marL="91440" marR="91440" marT="45720" marB="45720">
-                    <a:lnL w="6350" cap="flat" cmpd="sng" algn="ctr">
-                      <a:solidFill>
-                        <a:srgbClr val="94A3B8"/>
-                      </a:solidFill>
-                      <a:prstDash val="solid"/>
-                      <a:round/>
-                      <a:headEnd type="none" w="med" len="med"/>
-                      <a:tailEnd type="none" w="med" len="med"/>
-                    </a:lnL>
-                    <a:lnR w="6350" cap="flat" cmpd="sng" algn="ctr">
-                      <a:solidFill>
-                        <a:srgbClr val="94A3B8"/>
-                      </a:solidFill>
-                      <a:prstDash val="solid"/>
-                      <a:round/>
-                      <a:headEnd type="none" w="med" len="med"/>
-                      <a:tailEnd type="none" w="med" len="med"/>
-                    </a:lnR>
-                    <a:lnT w="6350" cap="flat" cmpd="sng" algn="ctr">
-                      <a:solidFill>
-                        <a:srgbClr val="94A3B8"/>
-                      </a:solidFill>
-                      <a:prstDash val="solid"/>
-                      <a:round/>
-                      <a:headEnd type="none" w="med" len="med"/>
-                      <a:tailEnd type="none" w="med" len="med"/>
-                    </a:lnT>
-                    <a:lnB w="6350" cap="flat" cmpd="sng" algn="ctr">
-                      <a:solidFill>
-                        <a:srgbClr val="94A3B8"/>
-                      </a:solidFill>
-                      <a:prstDash val="solid"/>
-                      <a:round/>
-                      <a:headEnd type="none" w="med" len="med"/>
-                      <a:tailEnd type="none" w="med" len="med"/>
-                    </a:lnB>
-                    <a:solidFill>
-                      <a:srgbClr val="F0F4FF"/>
-                    </a:solidFill>
-                  </a:tcPr>
-                </a:tc>
-              </a:tr>
-              <a:tr h="365760">
-                <a:tc>
-                  <a:txBody>
-                    <a:bodyPr/>
-                    <a:lstStyle/>
-                    <a:p>
-                      <a:pPr indent="0" marL="0">
-                        <a:buNone/>
-                      </a:pPr>
-                      <a:r>
-                        <a:rPr lang="en-US" sz="1200" dirty="0">
-                          <a:solidFill>
-                            <a:srgbClr val="1E293B"/>
-                          </a:solidFill>
-                          <a:latin typeface="Calibri" pitchFamily="34" charset="0"/>
-                          <a:ea typeface="Calibri" pitchFamily="34" charset="-122"/>
-                          <a:cs typeface="Calibri" pitchFamily="34" charset="-120"/>
-                        </a:rPr>
-                        <a:t>Anthropic</a:t>
-                      </a:r>
-                      <a:endParaRPr lang="en-US" sz="1200" dirty="0">
-                        <a:latin typeface="Calibri" charset="0"/>
-                        <a:ea typeface="Calibri" charset="0"/>
-                        <a:cs typeface="Calibri" charset="0"/>
-                      </a:endParaRPr>
-                    </a:p>
-                  </a:txBody>
-                  <a:tcPr marL="91440" marR="91440" marT="45720" marB="45720">
-                    <a:lnL w="6350" cap="flat" cmpd="sng" algn="ctr">
-                      <a:solidFill>
-                        <a:srgbClr val="94A3B8"/>
-                      </a:solidFill>
-                      <a:prstDash val="solid"/>
-                      <a:round/>
-                      <a:headEnd type="none" w="med" len="med"/>
-                      <a:tailEnd type="none" w="med" len="med"/>
-                    </a:lnL>
-                    <a:lnR w="6350" cap="flat" cmpd="sng" algn="ctr">
-                      <a:solidFill>
-                        <a:srgbClr val="94A3B8"/>
-                      </a:solidFill>
-                      <a:prstDash val="solid"/>
-                      <a:round/>
-                      <a:headEnd type="none" w="med" len="med"/>
-                      <a:tailEnd type="none" w="med" len="med"/>
-                    </a:lnR>
-                    <a:lnT w="6350" cap="flat" cmpd="sng" algn="ctr">
-                      <a:solidFill>
-                        <a:srgbClr val="94A3B8"/>
-                      </a:solidFill>
-                      <a:prstDash val="solid"/>
-                      <a:round/>
-                      <a:headEnd type="none" w="med" len="med"/>
-                      <a:tailEnd type="none" w="med" len="med"/>
-                    </a:lnT>
-                    <a:lnB w="6350" cap="flat" cmpd="sng" algn="ctr">
-                      <a:solidFill>
-                        <a:srgbClr val="94A3B8"/>
-                      </a:solidFill>
-                      <a:prstDash val="solid"/>
-                      <a:round/>
-                      <a:headEnd type="none" w="med" len="med"/>
-                      <a:tailEnd type="none" w="med" len="med"/>
-                    </a:lnB>
-                    <a:solidFill>
-                      <a:srgbClr val="FFFFFF"/>
-                    </a:solidFill>
-                  </a:tcPr>
-                </a:tc>
-                <a:tc>
-                  <a:txBody>
-                    <a:bodyPr/>
-                    <a:lstStyle/>
-                    <a:p>
-                      <a:pPr indent="0" marL="0">
-                        <a:buNone/>
-                      </a:pPr>
-                      <a:r>
-                        <a:rPr lang="en-US" sz="1200" dirty="0">
-                          <a:solidFill>
-                            <a:srgbClr val="1E293B"/>
-                          </a:solidFill>
-                          <a:latin typeface="Calibri" pitchFamily="34" charset="0"/>
-                          <a:ea typeface="Calibri" pitchFamily="34" charset="-122"/>
-                          <a:cs typeface="Calibri" pitchFamily="34" charset="-120"/>
-                        </a:rPr>
-                        <a:t>Paid</a:t>
-                      </a:r>
-                      <a:endParaRPr lang="en-US" sz="1200" dirty="0">
-                        <a:latin typeface="Calibri" charset="0"/>
-                        <a:ea typeface="Calibri" charset="0"/>
-                        <a:cs typeface="Calibri" charset="0"/>
-                      </a:endParaRPr>
-                    </a:p>
-                  </a:txBody>
-                  <a:tcPr marL="91440" marR="91440" marT="45720" marB="45720">
-                    <a:lnL w="6350" cap="flat" cmpd="sng" algn="ctr">
-                      <a:solidFill>
-                        <a:srgbClr val="94A3B8"/>
-                      </a:solidFill>
-                      <a:prstDash val="solid"/>
-                      <a:round/>
-                      <a:headEnd type="none" w="med" len="med"/>
-                      <a:tailEnd type="none" w="med" len="med"/>
-                    </a:lnL>
-                    <a:lnR w="6350" cap="flat" cmpd="sng" algn="ctr">
-                      <a:solidFill>
-                        <a:srgbClr val="94A3B8"/>
-                      </a:solidFill>
-                      <a:prstDash val="solid"/>
-                      <a:round/>
-                      <a:headEnd type="none" w="med" len="med"/>
-                      <a:tailEnd type="none" w="med" len="med"/>
-                    </a:lnR>
-                    <a:lnT w="6350" cap="flat" cmpd="sng" algn="ctr">
-                      <a:solidFill>
-                        <a:srgbClr val="94A3B8"/>
-                      </a:solidFill>
-                      <a:prstDash val="solid"/>
-                      <a:round/>
-                      <a:headEnd type="none" w="med" len="med"/>
-                      <a:tailEnd type="none" w="med" len="med"/>
-                    </a:lnT>
-                    <a:lnB w="6350" cap="flat" cmpd="sng" algn="ctr">
-                      <a:solidFill>
-                        <a:srgbClr val="94A3B8"/>
-                      </a:solidFill>
-                      <a:prstDash val="solid"/>
-                      <a:round/>
-                      <a:headEnd type="none" w="med" len="med"/>
-                      <a:tailEnd type="none" w="med" len="med"/>
-                    </a:lnB>
-                    <a:solidFill>
-                      <a:srgbClr val="FFFFFF"/>
-                    </a:solidFill>
-                  </a:tcPr>
-                </a:tc>
-                <a:tc>
-                  <a:txBody>
-                    <a:bodyPr/>
-                    <a:lstStyle/>
-                    <a:p>
-                      <a:pPr indent="0" marL="0">
-                        <a:buNone/>
-                      </a:pPr>
-                      <a:r>
-                        <a:rPr lang="en-US" sz="1200" dirty="0">
-                          <a:solidFill>
-                            <a:srgbClr val="1E293B"/>
-                          </a:solidFill>
-                          <a:latin typeface="Calibri" pitchFamily="34" charset="0"/>
-                          <a:ea typeface="Calibri" pitchFamily="34" charset="-122"/>
-                          <a:cs typeface="Calibri" pitchFamily="34" charset="-120"/>
-                        </a:rPr>
-                        <a:t>claude-sonnet-4-20250514</a:t>
-                      </a:r>
-                      <a:endParaRPr lang="en-US" sz="1200" dirty="0">
-                        <a:latin typeface="Calibri" charset="0"/>
-                        <a:ea typeface="Calibri" charset="0"/>
-                        <a:cs typeface="Calibri" charset="0"/>
-                      </a:endParaRPr>
-                    </a:p>
-                  </a:txBody>
-                  <a:tcPr marL="91440" marR="91440" marT="45720" marB="45720">
-                    <a:lnL w="6350" cap="flat" cmpd="sng" algn="ctr">
-                      <a:solidFill>
-                        <a:srgbClr val="94A3B8"/>
-                      </a:solidFill>
-                      <a:prstDash val="solid"/>
-                      <a:round/>
-                      <a:headEnd type="none" w="med" len="med"/>
-                      <a:tailEnd type="none" w="med" len="med"/>
-                    </a:lnL>
-                    <a:lnR w="6350" cap="flat" cmpd="sng" algn="ctr">
-                      <a:solidFill>
-                        <a:srgbClr val="94A3B8"/>
-                      </a:solidFill>
-                      <a:prstDash val="solid"/>
-                      <a:round/>
-                      <a:headEnd type="none" w="med" len="med"/>
-                      <a:tailEnd type="none" w="med" len="med"/>
-                    </a:lnR>
-                    <a:lnT w="6350" cap="flat" cmpd="sng" algn="ctr">
-                      <a:solidFill>
-                        <a:srgbClr val="94A3B8"/>
-                      </a:solidFill>
-                      <a:prstDash val="solid"/>
-                      <a:round/>
-                      <a:headEnd type="none" w="med" len="med"/>
-                      <a:tailEnd type="none" w="med" len="med"/>
-                    </a:lnT>
-                    <a:lnB w="6350" cap="flat" cmpd="sng" algn="ctr">
-                      <a:solidFill>
-                        <a:srgbClr val="94A3B8"/>
-                      </a:solidFill>
-                      <a:prstDash val="solid"/>
-                      <a:round/>
-                      <a:headEnd type="none" w="med" len="med"/>
-                      <a:tailEnd type="none" w="med" len="med"/>
-                    </a:lnB>
-                    <a:solidFill>
-                      <a:srgbClr val="FFFFFF"/>
-                    </a:solidFill>
-                  </a:tcPr>
-                </a:tc>
-                <a:tc>
-                  <a:txBody>
-                    <a:bodyPr/>
-                    <a:lstStyle/>
-                    <a:p>
-                      <a:pPr indent="0" marL="0">
-                        <a:buNone/>
-                      </a:pPr>
-                      <a:r>
-                        <a:rPr lang="en-US" sz="1200" dirty="0">
-                          <a:solidFill>
-                            <a:srgbClr val="1E293B"/>
-                          </a:solidFill>
-                          <a:latin typeface="Calibri" pitchFamily="34" charset="0"/>
-                          <a:ea typeface="Calibri" pitchFamily="34" charset="-122"/>
-                          <a:cs typeface="Calibri" pitchFamily="34" charset="-120"/>
-                        </a:rPr>
-                        <a:t>Native SDK</a:t>
-                      </a:r>
-                      <a:endParaRPr lang="en-US" sz="1200" dirty="0">
-                        <a:latin typeface="Calibri" charset="0"/>
-                        <a:ea typeface="Calibri" charset="0"/>
-                        <a:cs typeface="Calibri" charset="0"/>
-                      </a:endParaRPr>
-                    </a:p>
-                  </a:txBody>
-                  <a:tcPr marL="91440" marR="91440" marT="45720" marB="45720">
-                    <a:lnL w="6350" cap="flat" cmpd="sng" algn="ctr">
-                      <a:solidFill>
-                        <a:srgbClr val="94A3B8"/>
-                      </a:solidFill>
-                      <a:prstDash val="solid"/>
-                      <a:round/>
-                      <a:headEnd type="none" w="med" len="med"/>
-                      <a:tailEnd type="none" w="med" len="med"/>
-                    </a:lnL>
-                    <a:lnR w="6350" cap="flat" cmpd="sng" algn="ctr">
-                      <a:solidFill>
-                        <a:srgbClr val="94A3B8"/>
-                      </a:solidFill>
-                      <a:prstDash val="solid"/>
-                      <a:round/>
-                      <a:headEnd type="none" w="med" len="med"/>
-                      <a:tailEnd type="none" w="med" len="med"/>
-                    </a:lnR>
-                    <a:lnT w="6350" cap="flat" cmpd="sng" algn="ctr">
-                      <a:solidFill>
-                        <a:srgbClr val="94A3B8"/>
-                      </a:solidFill>
-                      <a:prstDash val="solid"/>
-                      <a:round/>
-                      <a:headEnd type="none" w="med" len="med"/>
-                      <a:tailEnd type="none" w="med" len="med"/>
-                    </a:lnT>
-                    <a:lnB w="6350" cap="flat" cmpd="sng" algn="ctr">
-                      <a:solidFill>
-                        <a:srgbClr val="94A3B8"/>
-                      </a:solidFill>
-                      <a:prstDash val="solid"/>
-                      <a:round/>
-                      <a:headEnd type="none" w="med" len="med"/>
-                      <a:tailEnd type="none" w="med" len="med"/>
-                    </a:lnB>
-                    <a:solidFill>
-                      <a:srgbClr val="FFFFFF"/>
-                    </a:solidFill>
-                  </a:tcPr>
-                </a:tc>
-              </a:tr>
             </a:tbl>
           </a:graphicData>
         </a:graphic>
       </p:graphicFrame>
-      <p:sp>
-        <p:nvSpPr>
-          <p:cNvPr id="7" name="Shape 4"/>
-          <p:cNvSpPr/>
-          <p:nvPr/>
-        </p:nvSpPr>
-        <p:spPr>
-          <a:xfrm>
-            <a:off x="548640" y="3474720"/>
-            <a:ext cx="8046720" cy="1097280"/>
-          </a:xfrm>
-          <a:prstGeom prst="rect">
-            <a:avLst/>
-          </a:prstGeom>
-          <a:solidFill>
-            <a:srgbClr val="F0F4FF"/>
-          </a:solidFill>
-          <a:ln/>
-          <a:effectLst>
-            <a:outerShdw sx="100000" sy="100000" kx="0" ky="0" algn="bl" rotWithShape="0" blurRad="50800" dist="25400" dir="8100000">
-              <a:srgbClr val="000000">
-                <a:alpha val="12000"/>
-              </a:srgbClr>
-            </a:outerShdw>
-          </a:effectLst>
-        </p:spPr>
-      </p:sp>
-      <p:sp>
-        <p:nvSpPr>
-          <p:cNvPr id="8" name="Text 5"/>
-          <p:cNvSpPr/>
-          <p:nvPr/>
-        </p:nvSpPr>
-        <p:spPr>
-          <a:xfrm>
-            <a:off x="822960" y="3566160"/>
-            <a:ext cx="7498080" cy="914400"/>
-          </a:xfrm>
-          <a:prstGeom prst="rect">
-            <a:avLst/>
-          </a:prstGeom>
-          <a:noFill/>
-          <a:ln/>
-        </p:spPr>
-        <p:txBody>
-          <a:bodyPr wrap="square" rtlCol="0" anchor="ctr"/>
-          <a:lstStyle/>
-          <a:p>
-            <a:pPr indent="0" marL="0">
-              <a:buNone/>
-            </a:pPr>
-            <a:r>
-              <a:rPr lang="en-US" sz="1400" b="1" dirty="0">
-                <a:solidFill>
-                  <a:srgbClr val="1E2761"/>
-                </a:solidFill>
-                <a:latin typeface="Georgia" pitchFamily="34" charset="0"/>
-                <a:ea typeface="Georgia" pitchFamily="34" charset="-122"/>
-                <a:cs typeface="Georgia" pitchFamily="34" charset="-120"/>
-              </a:rPr>
-              <a:t>Adapter Pattern: </a:t>
-            </a:r>
-            <a:pPr indent="0" marL="0">
-              <a:buNone/>
-            </a:pPr>
-            <a:r>
-              <a:rPr lang="en-US" sz="1300" dirty="0">
-                <a:solidFill>
-                  <a:srgbClr val="1E293B"/>
-                </a:solidFill>
-                <a:latin typeface="Calibri" pitchFamily="34" charset="0"/>
-                <a:ea typeface="Calibri" pitchFamily="34" charset="-122"/>
-                <a:cs typeface="Calibri" pitchFamily="34" charset="-120"/>
-              </a:rPr>
-              <a:t>Unified LLMClient interface with chat() method. AnthropicClient (native SDK) and OpenAICompatibleClient (Groq, Gemini, DeepSeek). Switch providers with one environment variable: </a:t>
-            </a:r>
-            <a:pPr indent="0" marL="0">
-              <a:buNone/>
-            </a:pPr>
-            <a:r>
-              <a:rPr lang="en-US" sz="1300" b="1" dirty="0">
-                <a:solidFill>
-                  <a:srgbClr val="3B82F6"/>
-                </a:solidFill>
-                <a:latin typeface="Calibri" pitchFamily="34" charset="0"/>
-                <a:ea typeface="Calibri" pitchFamily="34" charset="-122"/>
-                <a:cs typeface="Calibri" pitchFamily="34" charset="-120"/>
-              </a:rPr>
-              <a:t>LLM_PROVIDER=groq</a:t>
-            </a:r>
-            <a:endParaRPr lang="en-US" sz="1400" dirty="0"/>
-          </a:p>
-        </p:txBody>
-      </p:sp>
-    </p:spTree>
-  </p:cSld>
-  <p:clrMapOvr>
-    <a:masterClrMapping/>
-  </p:clrMapOvr>
-</p:sld>
-</file>
-
-<file path=ppt/slides/slide8.xml><?xml version="1.0" encoding="utf-8"?>
-<p:sld xmlns:a="http://schemas.openxmlformats.org/drawingml/2006/main" xmlns:r="http://schemas.openxmlformats.org/officeDocument/2006/relationships" xmlns:p="http://schemas.openxmlformats.org/presentationml/2006/main">
-  <p:cSld name="Slide 8">
-    <p:bg>
-      <p:bgPr>
-        <a:solidFill>
-          <a:srgbClr val="FFFFFF"/>
-        </a:solidFill>
-      </p:bgPr>
-    </p:bg>
-    <p:spTree>
-      <p:nvGrpSpPr>
-        <p:cNvPr id="1" name=""/>
-        <p:cNvGrpSpPr/>
-        <p:nvPr/>
-      </p:nvGrpSpPr>
-      <p:grpSpPr>
-        <a:xfrm>
-          <a:off x="0" y="0"/>
-          <a:ext cx="0" cy="0"/>
-          <a:chOff x="0" y="0"/>
-          <a:chExt cx="0" cy="0"/>
-        </a:xfrm>
-      </p:grpSpPr>
-      <p:sp>
-        <p:nvSpPr>
-          <p:cNvPr id="2" name="Shape 0"/>
-          <p:cNvSpPr/>
-          <p:nvPr/>
-        </p:nvSpPr>
-        <p:spPr>
-          <a:xfrm>
-            <a:off x="0" y="0"/>
-            <a:ext cx="9144000" cy="54864"/>
-          </a:xfrm>
-          <a:prstGeom prst="rect">
-            <a:avLst/>
-          </a:prstGeom>
-          <a:solidFill>
-            <a:srgbClr val="3B82F6"/>
-          </a:solidFill>
-          <a:ln/>
-        </p:spPr>
-      </p:sp>
-      <p:sp>
-        <p:nvSpPr>
-          <p:cNvPr id="3" name="Text 1"/>
-          <p:cNvSpPr/>
-          <p:nvPr/>
-        </p:nvSpPr>
-        <p:spPr>
-          <a:xfrm>
-            <a:off x="548640" y="228600"/>
-            <a:ext cx="8046720" cy="548640"/>
-          </a:xfrm>
-          <a:prstGeom prst="rect">
-            <a:avLst/>
-          </a:prstGeom>
-          <a:noFill/>
-          <a:ln/>
-        </p:spPr>
-        <p:txBody>
-          <a:bodyPr wrap="square" lIns="0" tIns="0" rIns="0" bIns="0" rtlCol="0" anchor="ctr"/>
-          <a:lstStyle/>
-          <a:p>
-            <a:pPr indent="0" marL="0">
-              <a:buNone/>
-            </a:pPr>
-            <a:r>
-              <a:rPr lang="en-US" sz="2800" b="1" dirty="0">
-                <a:solidFill>
-                  <a:srgbClr val="1E2761"/>
-                </a:solidFill>
-                <a:latin typeface="Georgia" pitchFamily="34" charset="0"/>
-                <a:ea typeface="Georgia" pitchFamily="34" charset="-122"/>
-                <a:cs typeface="Georgia" pitchFamily="34" charset="-120"/>
-              </a:rPr>
-              <a:t>Web Interface</a:t>
-            </a:r>
-            <a:endParaRPr lang="en-US" sz="2800" dirty="0"/>
-          </a:p>
-        </p:txBody>
-      </p:sp>
-      <p:sp>
-        <p:nvSpPr>
-          <p:cNvPr id="4" name="Shape 2"/>
-          <p:cNvSpPr/>
-          <p:nvPr/>
-        </p:nvSpPr>
-        <p:spPr>
-          <a:xfrm>
-            <a:off x="548640" y="822960"/>
-            <a:ext cx="2286000" cy="0"/>
-          </a:xfrm>
-          <a:prstGeom prst="line">
-            <a:avLst/>
-          </a:prstGeom>
-          <a:noFill/>
-          <a:ln w="25400">
-            <a:solidFill>
-              <a:srgbClr val="3B82F6"/>
-            </a:solidFill>
-            <a:prstDash val="solid"/>
-          </a:ln>
-        </p:spPr>
-      </p:sp>
-      <p:sp>
-        <p:nvSpPr>
-          <p:cNvPr id="5" name="Text 3"/>
-          <p:cNvSpPr/>
-          <p:nvPr/>
-        </p:nvSpPr>
-        <p:spPr>
-          <a:xfrm>
-            <a:off x="8503920" y="4754880"/>
-            <a:ext cx="457200" cy="274320"/>
-          </a:xfrm>
-          <a:prstGeom prst="rect">
-            <a:avLst/>
-          </a:prstGeom>
-          <a:noFill/>
-          <a:ln/>
-        </p:spPr>
-        <p:txBody>
-          <a:bodyPr wrap="square" rtlCol="0" anchor="ctr"/>
-          <a:lstStyle/>
-          <a:p>
-            <a:pPr algn="r" indent="0" marL="0">
-              <a:buNone/>
-            </a:pPr>
-            <a:r>
-              <a:rPr lang="en-US" sz="1000" dirty="0">
-                <a:solidFill>
-                  <a:srgbClr val="64748B"/>
-                </a:solidFill>
-              </a:rPr>
-              <a:t>8</a:t>
-            </a:r>
-            <a:endParaRPr lang="en-US" sz="1000" dirty="0"/>
-          </a:p>
-        </p:txBody>
-      </p:sp>
-      <p:sp>
-        <p:nvSpPr>
-          <p:cNvPr id="6" name="Text 4"/>
-          <p:cNvSpPr/>
-          <p:nvPr/>
-        </p:nvSpPr>
-        <p:spPr>
-          <a:xfrm>
-            <a:off x="548640" y="1097280"/>
-            <a:ext cx="3840480" cy="365760"/>
-          </a:xfrm>
-          <a:prstGeom prst="rect">
-            <a:avLst/>
-          </a:prstGeom>
-          <a:noFill/>
-          <a:ln/>
-        </p:spPr>
-        <p:txBody>
-          <a:bodyPr wrap="square" lIns="0" tIns="0" rIns="0" bIns="0" rtlCol="0" anchor="ctr"/>
-          <a:lstStyle/>
-          <a:p>
-            <a:pPr indent="0" marL="0">
-              <a:buNone/>
-            </a:pPr>
-            <a:r>
-              <a:rPr lang="en-US" sz="1600" b="1" dirty="0">
-                <a:solidFill>
-                  <a:srgbClr val="1E2761"/>
-                </a:solidFill>
-                <a:latin typeface="Georgia" pitchFamily="34" charset="0"/>
-                <a:ea typeface="Georgia" pitchFamily="34" charset="-122"/>
-                <a:cs typeface="Georgia" pitchFamily="34" charset="-120"/>
-              </a:rPr>
-              <a:t>Components</a:t>
-            </a:r>
-            <a:endParaRPr lang="en-US" sz="1600" dirty="0"/>
-          </a:p>
-        </p:txBody>
-      </p:sp>
-      <p:sp>
-        <p:nvSpPr>
-          <p:cNvPr id="7" name="Text 5"/>
-          <p:cNvSpPr/>
-          <p:nvPr/>
-        </p:nvSpPr>
-        <p:spPr>
-          <a:xfrm>
-            <a:off x="640080" y="1554480"/>
-            <a:ext cx="3749040" cy="2286000"/>
-          </a:xfrm>
-          <a:prstGeom prst="rect">
-            <a:avLst/>
-          </a:prstGeom>
-          <a:noFill/>
-          <a:ln/>
-        </p:spPr>
-        <p:txBody>
-          <a:bodyPr wrap="square" rtlCol="0" anchor="t"/>
-          <a:lstStyle/>
-          <a:p>
-            <a:pPr marL="342900" indent="-342900">
-              <a:spcAft>
-                <a:spcPts val="600"/>
-              </a:spcAft>
-              <a:buSzPct val="100000"/>
-              <a:buChar char="•"/>
-            </a:pPr>
-            <a:r>
-              <a:rPr lang="en-US" sz="1300" dirty="0">
-                <a:solidFill>
-                  <a:srgbClr val="1E293B"/>
-                </a:solidFill>
-                <a:latin typeface="Calibri" pitchFamily="34" charset="0"/>
-                <a:ea typeface="Calibri" pitchFamily="34" charset="-122"/>
-                <a:cs typeface="Calibri" pitchFamily="34" charset="-120"/>
-              </a:rPr>
-              <a:t>ChatWindow — Message list + input area</a:t>
-            </a:r>
-            <a:endParaRPr lang="en-US" sz="1300" dirty="0"/>
-          </a:p>
-          <a:p>
-            <a:pPr marL="342900" indent="-342900">
-              <a:spcAft>
-                <a:spcPts val="600"/>
-              </a:spcAft>
-              <a:buSzPct val="100000"/>
-              <a:buChar char="•"/>
-            </a:pPr>
-            <a:r>
-              <a:rPr lang="en-US" sz="1300" dirty="0">
-                <a:solidFill>
-                  <a:srgbClr val="1E293B"/>
-                </a:solidFill>
-                <a:latin typeface="Calibri" pitchFamily="34" charset="0"/>
-                <a:ea typeface="Calibri" pitchFamily="34" charset="-122"/>
-                <a:cs typeface="Calibri" pitchFamily="34" charset="-120"/>
-              </a:rPr>
-              <a:t>MessageBubble — Markdown rendering</a:t>
-            </a:r>
-            <a:endParaRPr lang="en-US" sz="1300" dirty="0"/>
-          </a:p>
-          <a:p>
-            <a:pPr marL="342900" indent="-342900">
-              <a:spcAft>
-                <a:spcPts val="600"/>
-              </a:spcAft>
-              <a:buSzPct val="100000"/>
-              <a:buChar char="•"/>
-            </a:pPr>
-            <a:r>
-              <a:rPr lang="en-US" sz="1300" dirty="0">
-                <a:solidFill>
-                  <a:srgbClr val="1E293B"/>
-                </a:solidFill>
-                <a:latin typeface="Calibri" pitchFamily="34" charset="0"/>
-                <a:ea typeface="Calibri" pitchFamily="34" charset="-122"/>
-                <a:cs typeface="Calibri" pitchFamily="34" charset="-120"/>
-              </a:rPr>
-              <a:t>ToolCallCard — Collapsible tool execution display</a:t>
-            </a:r>
-            <a:endParaRPr lang="en-US" sz="1300" dirty="0"/>
-          </a:p>
-          <a:p>
-            <a:pPr marL="342900" indent="-342900">
-              <a:spcAft>
-                <a:spcPts val="600"/>
-              </a:spcAft>
-              <a:buSzPct val="100000"/>
-              <a:buChar char="•"/>
-            </a:pPr>
-            <a:r>
-              <a:rPr lang="en-US" sz="1300" dirty="0">
-                <a:solidFill>
-                  <a:srgbClr val="1E293B"/>
-                </a:solidFill>
-                <a:latin typeface="Calibri" pitchFamily="34" charset="0"/>
-                <a:ea typeface="Calibri" pitchFamily="34" charset="-122"/>
-                <a:cs typeface="Calibri" pitchFamily="34" charset="-120"/>
-              </a:rPr>
-              <a:t>StatusBar — Agent state indicator</a:t>
-            </a:r>
-            <a:endParaRPr lang="en-US" sz="1300" dirty="0"/>
-          </a:p>
-          <a:p>
-            <a:pPr marL="342900" indent="-342900">
-              <a:spcAft>
-                <a:spcPts val="600"/>
-              </a:spcAft>
-              <a:buSzPct val="100000"/>
-              <a:buChar char="•"/>
-            </a:pPr>
-            <a:r>
-              <a:rPr lang="en-US" sz="1300" dirty="0">
-                <a:solidFill>
-                  <a:srgbClr val="1E293B"/>
-                </a:solidFill>
-                <a:latin typeface="Calibri" pitchFamily="34" charset="0"/>
-                <a:ea typeface="Calibri" pitchFamily="34" charset="-122"/>
-                <a:cs typeface="Calibri" pitchFamily="34" charset="-120"/>
-              </a:rPr>
-              <a:t>useChat hook — WebSocket state management</a:t>
-            </a:r>
-            <a:endParaRPr lang="en-US" sz="1300" dirty="0"/>
-          </a:p>
-        </p:txBody>
-      </p:sp>
-      <p:sp>
-        <p:nvSpPr>
-          <p:cNvPr id="8" name="Text 6"/>
-          <p:cNvSpPr/>
-          <p:nvPr/>
-        </p:nvSpPr>
-        <p:spPr>
-          <a:xfrm>
-            <a:off x="4754880" y="1097280"/>
-            <a:ext cx="3840480" cy="365760"/>
-          </a:xfrm>
-          <a:prstGeom prst="rect">
-            <a:avLst/>
-          </a:prstGeom>
-          <a:noFill/>
-          <a:ln/>
-        </p:spPr>
-        <p:txBody>
-          <a:bodyPr wrap="square" lIns="0" tIns="0" rIns="0" bIns="0" rtlCol="0" anchor="ctr"/>
-          <a:lstStyle/>
-          <a:p>
-            <a:pPr indent="0" marL="0">
-              <a:buNone/>
-            </a:pPr>
-            <a:r>
-              <a:rPr lang="en-US" sz="1600" b="1" dirty="0">
-                <a:solidFill>
-                  <a:srgbClr val="1E2761"/>
-                </a:solidFill>
-                <a:latin typeface="Georgia" pitchFamily="34" charset="0"/>
-                <a:ea typeface="Georgia" pitchFamily="34" charset="-122"/>
-                <a:cs typeface="Georgia" pitchFamily="34" charset="-120"/>
-              </a:rPr>
-              <a:t>Event Streaming Protocol</a:t>
-            </a:r>
-            <a:endParaRPr lang="en-US" sz="1600" dirty="0"/>
-          </a:p>
-        </p:txBody>
-      </p:sp>
-      <p:sp>
-        <p:nvSpPr>
-          <p:cNvPr id="9" name="Shape 7"/>
-          <p:cNvSpPr/>
-          <p:nvPr/>
-        </p:nvSpPr>
-        <p:spPr>
-          <a:xfrm>
-            <a:off x="4754880" y="1554480"/>
-            <a:ext cx="3840480" cy="320040"/>
-          </a:xfrm>
-          <a:prstGeom prst="rect">
-            <a:avLst/>
-          </a:prstGeom>
-          <a:solidFill>
-            <a:srgbClr val="F0F4FF"/>
-          </a:solidFill>
-          <a:ln/>
-        </p:spPr>
-      </p:sp>
-      <p:sp>
-        <p:nvSpPr>
-          <p:cNvPr id="10" name="Text 8"/>
-          <p:cNvSpPr/>
-          <p:nvPr/>
-        </p:nvSpPr>
-        <p:spPr>
-          <a:xfrm>
-            <a:off x="4846320" y="1554480"/>
-            <a:ext cx="1645920" cy="320040"/>
-          </a:xfrm>
-          <a:prstGeom prst="rect">
-            <a:avLst/>
-          </a:prstGeom>
-          <a:noFill/>
-          <a:ln/>
-        </p:spPr>
-        <p:txBody>
-          <a:bodyPr wrap="square" lIns="0" tIns="0" rIns="0" bIns="0" rtlCol="0" anchor="ctr"/>
-          <a:lstStyle/>
-          <a:p>
-            <a:pPr indent="0" marL="0">
-              <a:buNone/>
-            </a:pPr>
-            <a:r>
-              <a:rPr lang="en-US" sz="1200" b="1" dirty="0">
-                <a:solidFill>
-                  <a:srgbClr val="3B82F6"/>
-                </a:solidFill>
-                <a:latin typeface="Calibri" pitchFamily="34" charset="0"/>
-                <a:ea typeface="Calibri" pitchFamily="34" charset="-122"/>
-                <a:cs typeface="Calibri" pitchFamily="34" charset="-120"/>
-              </a:rPr>
-              <a:t>status</a:t>
-            </a:r>
-            <a:endParaRPr lang="en-US" sz="1200" dirty="0"/>
-          </a:p>
-        </p:txBody>
-      </p:sp>
-      <p:sp>
-        <p:nvSpPr>
-          <p:cNvPr id="11" name="Text 9"/>
-          <p:cNvSpPr/>
-          <p:nvPr/>
-        </p:nvSpPr>
-        <p:spPr>
-          <a:xfrm>
-            <a:off x="6492240" y="1554480"/>
-            <a:ext cx="2011680" cy="320040"/>
-          </a:xfrm>
-          <a:prstGeom prst="rect">
-            <a:avLst/>
-          </a:prstGeom>
-          <a:noFill/>
-          <a:ln/>
-        </p:spPr>
-        <p:txBody>
-          <a:bodyPr wrap="square" lIns="0" tIns="0" rIns="0" bIns="0" rtlCol="0" anchor="ctr"/>
-          <a:lstStyle/>
-          <a:p>
-            <a:pPr indent="0" marL="0">
-              <a:buNone/>
-            </a:pPr>
-            <a:r>
-              <a:rPr lang="en-US" sz="1200" dirty="0">
-                <a:solidFill>
-                  <a:srgbClr val="64748B"/>
-                </a:solidFill>
-                <a:latin typeface="Calibri" pitchFamily="34" charset="0"/>
-                <a:ea typeface="Calibri" pitchFamily="34" charset="-122"/>
-                <a:cs typeface="Calibri" pitchFamily="34" charset="-120"/>
-              </a:rPr>
-              <a:t>Agent state changes</a:t>
-            </a:r>
-            <a:endParaRPr lang="en-US" sz="1200" dirty="0"/>
-          </a:p>
-        </p:txBody>
-      </p:sp>
-      <p:sp>
-        <p:nvSpPr>
-          <p:cNvPr id="12" name="Shape 10"/>
-          <p:cNvSpPr/>
-          <p:nvPr/>
-        </p:nvSpPr>
-        <p:spPr>
-          <a:xfrm>
-            <a:off x="4754880" y="1938528"/>
-            <a:ext cx="3840480" cy="320040"/>
-          </a:xfrm>
-          <a:prstGeom prst="rect">
-            <a:avLst/>
-          </a:prstGeom>
-          <a:solidFill>
-            <a:srgbClr val="FFFFFF"/>
-          </a:solidFill>
-          <a:ln/>
-        </p:spPr>
-      </p:sp>
-      <p:sp>
-        <p:nvSpPr>
-          <p:cNvPr id="13" name="Text 11"/>
-          <p:cNvSpPr/>
-          <p:nvPr/>
-        </p:nvSpPr>
-        <p:spPr>
-          <a:xfrm>
-            <a:off x="4846320" y="1938528"/>
-            <a:ext cx="1645920" cy="320040"/>
-          </a:xfrm>
-          <a:prstGeom prst="rect">
-            <a:avLst/>
-          </a:prstGeom>
-          <a:noFill/>
-          <a:ln/>
-        </p:spPr>
-        <p:txBody>
-          <a:bodyPr wrap="square" lIns="0" tIns="0" rIns="0" bIns="0" rtlCol="0" anchor="ctr"/>
-          <a:lstStyle/>
-          <a:p>
-            <a:pPr indent="0" marL="0">
-              <a:buNone/>
-            </a:pPr>
-            <a:r>
-              <a:rPr lang="en-US" sz="1200" b="1" dirty="0">
-                <a:solidFill>
-                  <a:srgbClr val="3B82F6"/>
-                </a:solidFill>
-                <a:latin typeface="Calibri" pitchFamily="34" charset="0"/>
-                <a:ea typeface="Calibri" pitchFamily="34" charset="-122"/>
-                <a:cs typeface="Calibri" pitchFamily="34" charset="-120"/>
-              </a:rPr>
-              <a:t>tool_call</a:t>
-            </a:r>
-            <a:endParaRPr lang="en-US" sz="1200" dirty="0"/>
-          </a:p>
-        </p:txBody>
-      </p:sp>
-      <p:sp>
-        <p:nvSpPr>
-          <p:cNvPr id="14" name="Text 12"/>
-          <p:cNvSpPr/>
-          <p:nvPr/>
-        </p:nvSpPr>
-        <p:spPr>
-          <a:xfrm>
-            <a:off x="6492240" y="1938528"/>
-            <a:ext cx="2011680" cy="320040"/>
-          </a:xfrm>
-          <a:prstGeom prst="rect">
-            <a:avLst/>
-          </a:prstGeom>
-          <a:noFill/>
-          <a:ln/>
-        </p:spPr>
-        <p:txBody>
-          <a:bodyPr wrap="square" lIns="0" tIns="0" rIns="0" bIns="0" rtlCol="0" anchor="ctr"/>
-          <a:lstStyle/>
-          <a:p>
-            <a:pPr indent="0" marL="0">
-              <a:buNone/>
-            </a:pPr>
-            <a:r>
-              <a:rPr lang="en-US" sz="1200" dirty="0">
-                <a:solidFill>
-                  <a:srgbClr val="64748B"/>
-                </a:solidFill>
-                <a:latin typeface="Calibri" pitchFamily="34" charset="0"/>
-                <a:ea typeface="Calibri" pitchFamily="34" charset="-122"/>
-                <a:cs typeface="Calibri" pitchFamily="34" charset="-120"/>
-              </a:rPr>
-              <a:t>Execution started</a:t>
-            </a:r>
-            <a:endParaRPr lang="en-US" sz="1200" dirty="0"/>
-          </a:p>
-        </p:txBody>
-      </p:sp>
-      <p:sp>
-        <p:nvSpPr>
-          <p:cNvPr id="15" name="Shape 13"/>
-          <p:cNvSpPr/>
-          <p:nvPr/>
-        </p:nvSpPr>
-        <p:spPr>
-          <a:xfrm>
-            <a:off x="4754880" y="2322576"/>
-            <a:ext cx="3840480" cy="320040"/>
-          </a:xfrm>
-          <a:prstGeom prst="rect">
-            <a:avLst/>
-          </a:prstGeom>
-          <a:solidFill>
-            <a:srgbClr val="F0F4FF"/>
-          </a:solidFill>
-          <a:ln/>
-        </p:spPr>
-      </p:sp>
-      <p:sp>
-        <p:nvSpPr>
-          <p:cNvPr id="16" name="Text 14"/>
-          <p:cNvSpPr/>
-          <p:nvPr/>
-        </p:nvSpPr>
-        <p:spPr>
-          <a:xfrm>
-            <a:off x="4846320" y="2322576"/>
-            <a:ext cx="1645920" cy="320040"/>
-          </a:xfrm>
-          <a:prstGeom prst="rect">
-            <a:avLst/>
-          </a:prstGeom>
-          <a:noFill/>
-          <a:ln/>
-        </p:spPr>
-        <p:txBody>
-          <a:bodyPr wrap="square" lIns="0" tIns="0" rIns="0" bIns="0" rtlCol="0" anchor="ctr"/>
-          <a:lstStyle/>
-          <a:p>
-            <a:pPr indent="0" marL="0">
-              <a:buNone/>
-            </a:pPr>
-            <a:r>
-              <a:rPr lang="en-US" sz="1200" b="1" dirty="0">
-                <a:solidFill>
-                  <a:srgbClr val="3B82F6"/>
-                </a:solidFill>
-                <a:latin typeface="Calibri" pitchFamily="34" charset="0"/>
-                <a:ea typeface="Calibri" pitchFamily="34" charset="-122"/>
-                <a:cs typeface="Calibri" pitchFamily="34" charset="-120"/>
-              </a:rPr>
-              <a:t>tool_result</a:t>
-            </a:r>
-            <a:endParaRPr lang="en-US" sz="1200" dirty="0"/>
-          </a:p>
-        </p:txBody>
-      </p:sp>
-      <p:sp>
-        <p:nvSpPr>
-          <p:cNvPr id="17" name="Text 15"/>
-          <p:cNvSpPr/>
-          <p:nvPr/>
-        </p:nvSpPr>
-        <p:spPr>
-          <a:xfrm>
-            <a:off x="6492240" y="2322576"/>
-            <a:ext cx="2011680" cy="320040"/>
-          </a:xfrm>
-          <a:prstGeom prst="rect">
-            <a:avLst/>
-          </a:prstGeom>
-          <a:noFill/>
-          <a:ln/>
-        </p:spPr>
-        <p:txBody>
-          <a:bodyPr wrap="square" lIns="0" tIns="0" rIns="0" bIns="0" rtlCol="0" anchor="ctr"/>
-          <a:lstStyle/>
-          <a:p>
-            <a:pPr indent="0" marL="0">
-              <a:buNone/>
-            </a:pPr>
-            <a:r>
-              <a:rPr lang="en-US" sz="1200" dirty="0">
-                <a:solidFill>
-                  <a:srgbClr val="64748B"/>
-                </a:solidFill>
-                <a:latin typeface="Calibri" pitchFamily="34" charset="0"/>
-                <a:ea typeface="Calibri" pitchFamily="34" charset="-122"/>
-                <a:cs typeface="Calibri" pitchFamily="34" charset="-120"/>
-              </a:rPr>
-              <a:t>Tool output received</a:t>
-            </a:r>
-            <a:endParaRPr lang="en-US" sz="1200" dirty="0"/>
-          </a:p>
-        </p:txBody>
-      </p:sp>
-      <p:sp>
-        <p:nvSpPr>
-          <p:cNvPr id="18" name="Shape 16"/>
-          <p:cNvSpPr/>
-          <p:nvPr/>
-        </p:nvSpPr>
-        <p:spPr>
-          <a:xfrm>
-            <a:off x="4754880" y="2706624"/>
-            <a:ext cx="3840480" cy="320040"/>
-          </a:xfrm>
-          <a:prstGeom prst="rect">
-            <a:avLst/>
-          </a:prstGeom>
-          <a:solidFill>
-            <a:srgbClr val="FFFFFF"/>
-          </a:solidFill>
-          <a:ln/>
-        </p:spPr>
-      </p:sp>
-      <p:sp>
-        <p:nvSpPr>
-          <p:cNvPr id="19" name="Text 17"/>
-          <p:cNvSpPr/>
-          <p:nvPr/>
-        </p:nvSpPr>
-        <p:spPr>
-          <a:xfrm>
-            <a:off x="4846320" y="2706624"/>
-            <a:ext cx="1645920" cy="320040"/>
-          </a:xfrm>
-          <a:prstGeom prst="rect">
-            <a:avLst/>
-          </a:prstGeom>
-          <a:noFill/>
-          <a:ln/>
-        </p:spPr>
-        <p:txBody>
-          <a:bodyPr wrap="square" lIns="0" tIns="0" rIns="0" bIns="0" rtlCol="0" anchor="ctr"/>
-          <a:lstStyle/>
-          <a:p>
-            <a:pPr indent="0" marL="0">
-              <a:buNone/>
-            </a:pPr>
-            <a:r>
-              <a:rPr lang="en-US" sz="1200" b="1" dirty="0">
-                <a:solidFill>
-                  <a:srgbClr val="3B82F6"/>
-                </a:solidFill>
-                <a:latin typeface="Calibri" pitchFamily="34" charset="0"/>
-                <a:ea typeface="Calibri" pitchFamily="34" charset="-122"/>
-                <a:cs typeface="Calibri" pitchFamily="34" charset="-120"/>
-              </a:rPr>
-              <a:t>text_delta</a:t>
-            </a:r>
-            <a:endParaRPr lang="en-US" sz="1200" dirty="0"/>
-          </a:p>
-        </p:txBody>
-      </p:sp>
-      <p:sp>
-        <p:nvSpPr>
-          <p:cNvPr id="20" name="Text 18"/>
-          <p:cNvSpPr/>
-          <p:nvPr/>
-        </p:nvSpPr>
-        <p:spPr>
-          <a:xfrm>
-            <a:off x="6492240" y="2706624"/>
-            <a:ext cx="2011680" cy="320040"/>
-          </a:xfrm>
-          <a:prstGeom prst="rect">
-            <a:avLst/>
-          </a:prstGeom>
-          <a:noFill/>
-          <a:ln/>
-        </p:spPr>
-        <p:txBody>
-          <a:bodyPr wrap="square" lIns="0" tIns="0" rIns="0" bIns="0" rtlCol="0" anchor="ctr"/>
-          <a:lstStyle/>
-          <a:p>
-            <a:pPr indent="0" marL="0">
-              <a:buNone/>
-            </a:pPr>
-            <a:r>
-              <a:rPr lang="en-US" sz="1200" dirty="0">
-                <a:solidFill>
-                  <a:srgbClr val="64748B"/>
-                </a:solidFill>
-                <a:latin typeface="Calibri" pitchFamily="34" charset="0"/>
-                <a:ea typeface="Calibri" pitchFamily="34" charset="-122"/>
-                <a:cs typeface="Calibri" pitchFamily="34" charset="-120"/>
-              </a:rPr>
-              <a:t>Streaming text</a:t>
-            </a:r>
-            <a:endParaRPr lang="en-US" sz="1200" dirty="0"/>
-          </a:p>
-        </p:txBody>
-      </p:sp>
-      <p:sp>
-        <p:nvSpPr>
-          <p:cNvPr id="21" name="Shape 19"/>
-          <p:cNvSpPr/>
-          <p:nvPr/>
-        </p:nvSpPr>
-        <p:spPr>
-          <a:xfrm>
-            <a:off x="4754880" y="3090672"/>
-            <a:ext cx="3840480" cy="320040"/>
-          </a:xfrm>
-          <a:prstGeom prst="rect">
-            <a:avLst/>
-          </a:prstGeom>
-          <a:solidFill>
-            <a:srgbClr val="F0F4FF"/>
-          </a:solidFill>
-          <a:ln/>
-        </p:spPr>
-      </p:sp>
-      <p:sp>
-        <p:nvSpPr>
-          <p:cNvPr id="22" name="Text 20"/>
-          <p:cNvSpPr/>
-          <p:nvPr/>
-        </p:nvSpPr>
-        <p:spPr>
-          <a:xfrm>
-            <a:off x="4846320" y="3090672"/>
-            <a:ext cx="1645920" cy="320040"/>
-          </a:xfrm>
-          <a:prstGeom prst="rect">
-            <a:avLst/>
-          </a:prstGeom>
-          <a:noFill/>
-          <a:ln/>
-        </p:spPr>
-        <p:txBody>
-          <a:bodyPr wrap="square" lIns="0" tIns="0" rIns="0" bIns="0" rtlCol="0" anchor="ctr"/>
-          <a:lstStyle/>
-          <a:p>
-            <a:pPr indent="0" marL="0">
-              <a:buNone/>
-            </a:pPr>
-            <a:r>
-              <a:rPr lang="en-US" sz="1200" b="1" dirty="0">
-                <a:solidFill>
-                  <a:srgbClr val="3B82F6"/>
-                </a:solidFill>
-                <a:latin typeface="Calibri" pitchFamily="34" charset="0"/>
-                <a:ea typeface="Calibri" pitchFamily="34" charset="-122"/>
-                <a:cs typeface="Calibri" pitchFamily="34" charset="-120"/>
-              </a:rPr>
-              <a:t>message_complete</a:t>
-            </a:r>
-            <a:endParaRPr lang="en-US" sz="1200" dirty="0"/>
-          </a:p>
-        </p:txBody>
-      </p:sp>
-      <p:sp>
-        <p:nvSpPr>
-          <p:cNvPr id="23" name="Text 21"/>
-          <p:cNvSpPr/>
-          <p:nvPr/>
-        </p:nvSpPr>
-        <p:spPr>
-          <a:xfrm>
-            <a:off x="6492240" y="3090672"/>
-            <a:ext cx="2011680" cy="320040"/>
-          </a:xfrm>
-          <a:prstGeom prst="rect">
-            <a:avLst/>
-          </a:prstGeom>
-          <a:noFill/>
-          <a:ln/>
-        </p:spPr>
-        <p:txBody>
-          <a:bodyPr wrap="square" lIns="0" tIns="0" rIns="0" bIns="0" rtlCol="0" anchor="ctr"/>
-          <a:lstStyle/>
-          <a:p>
-            <a:pPr indent="0" marL="0">
-              <a:buNone/>
-            </a:pPr>
-            <a:r>
-              <a:rPr lang="en-US" sz="1200" dirty="0">
-                <a:solidFill>
-                  <a:srgbClr val="64748B"/>
-                </a:solidFill>
-                <a:latin typeface="Calibri" pitchFamily="34" charset="0"/>
-                <a:ea typeface="Calibri" pitchFamily="34" charset="-122"/>
-                <a:cs typeface="Calibri" pitchFamily="34" charset="-120"/>
-              </a:rPr>
-              <a:t>Final message</a:t>
-            </a:r>
-            <a:endParaRPr lang="en-US" sz="1200" dirty="0"/>
-          </a:p>
-        </p:txBody>
-      </p:sp>
-      <p:sp>
-        <p:nvSpPr>
-          <p:cNvPr id="24" name="Shape 22"/>
-          <p:cNvSpPr/>
-          <p:nvPr/>
-        </p:nvSpPr>
-        <p:spPr>
-          <a:xfrm>
-            <a:off x="4754880" y="3474720"/>
-            <a:ext cx="3840480" cy="320040"/>
-          </a:xfrm>
-          <a:prstGeom prst="rect">
-            <a:avLst/>
-          </a:prstGeom>
-          <a:solidFill>
-            <a:srgbClr val="FFFFFF"/>
-          </a:solidFill>
-          <a:ln/>
-        </p:spPr>
-      </p:sp>
-      <p:sp>
-        <p:nvSpPr>
-          <p:cNvPr id="25" name="Text 23"/>
-          <p:cNvSpPr/>
-          <p:nvPr/>
-        </p:nvSpPr>
-        <p:spPr>
-          <a:xfrm>
-            <a:off x="4846320" y="3474720"/>
-            <a:ext cx="1645920" cy="320040"/>
-          </a:xfrm>
-          <a:prstGeom prst="rect">
-            <a:avLst/>
-          </a:prstGeom>
-          <a:noFill/>
-          <a:ln/>
-        </p:spPr>
-        <p:txBody>
-          <a:bodyPr wrap="square" lIns="0" tIns="0" rIns="0" bIns="0" rtlCol="0" anchor="ctr"/>
-          <a:lstStyle/>
-          <a:p>
-            <a:pPr indent="0" marL="0">
-              <a:buNone/>
-            </a:pPr>
-            <a:r>
-              <a:rPr lang="en-US" sz="1200" b="1" dirty="0">
-                <a:solidFill>
-                  <a:srgbClr val="3B82F6"/>
-                </a:solidFill>
-                <a:latin typeface="Calibri" pitchFamily="34" charset="0"/>
-                <a:ea typeface="Calibri" pitchFamily="34" charset="-122"/>
-                <a:cs typeface="Calibri" pitchFamily="34" charset="-120"/>
-              </a:rPr>
-              <a:t>error</a:t>
-            </a:r>
-            <a:endParaRPr lang="en-US" sz="1200" dirty="0"/>
-          </a:p>
-        </p:txBody>
-      </p:sp>
-      <p:sp>
-        <p:nvSpPr>
-          <p:cNvPr id="26" name="Text 24"/>
-          <p:cNvSpPr/>
-          <p:nvPr/>
-        </p:nvSpPr>
-        <p:spPr>
-          <a:xfrm>
-            <a:off x="6492240" y="3474720"/>
-            <a:ext cx="2011680" cy="320040"/>
-          </a:xfrm>
-          <a:prstGeom prst="rect">
-            <a:avLst/>
-          </a:prstGeom>
-          <a:noFill/>
-          <a:ln/>
-        </p:spPr>
-        <p:txBody>
-          <a:bodyPr wrap="square" lIns="0" tIns="0" rIns="0" bIns="0" rtlCol="0" anchor="ctr"/>
-          <a:lstStyle/>
-          <a:p>
-            <a:pPr indent="0" marL="0">
-              <a:buNone/>
-            </a:pPr>
-            <a:r>
-              <a:rPr lang="en-US" sz="1200" dirty="0">
-                <a:solidFill>
-                  <a:srgbClr val="64748B"/>
-                </a:solidFill>
-                <a:latin typeface="Calibri" pitchFamily="34" charset="0"/>
-                <a:ea typeface="Calibri" pitchFamily="34" charset="-122"/>
-                <a:cs typeface="Calibri" pitchFamily="34" charset="-120"/>
-              </a:rPr>
-              <a:t>Error notification</a:t>
-            </a:r>
-            <a:endParaRPr lang="en-US" sz="1200" dirty="0"/>
-          </a:p>
-        </p:txBody>
-      </p:sp>
-      <p:sp>
-        <p:nvSpPr>
-          <p:cNvPr id="27" name="Shape 25"/>
-          <p:cNvSpPr/>
-          <p:nvPr/>
-        </p:nvSpPr>
-        <p:spPr>
-          <a:xfrm>
-            <a:off x="548640" y="3931920"/>
-            <a:ext cx="8046720" cy="914400"/>
-          </a:xfrm>
-          <a:prstGeom prst="rect">
-            <a:avLst/>
-          </a:prstGeom>
-          <a:solidFill>
-            <a:srgbClr val="F0F4FF"/>
-          </a:solidFill>
-          <a:ln w="6350">
-            <a:solidFill>
-              <a:srgbClr val="94A3B8"/>
-            </a:solidFill>
-            <a:prstDash val="dash"/>
-          </a:ln>
-        </p:spPr>
-      </p:sp>
-      <p:sp>
-        <p:nvSpPr>
-          <p:cNvPr id="28" name="Text 26"/>
-          <p:cNvSpPr/>
-          <p:nvPr/>
-        </p:nvSpPr>
-        <p:spPr>
-          <a:xfrm>
-            <a:off x="548640" y="3931920"/>
-            <a:ext cx="8046720" cy="914400"/>
-          </a:xfrm>
-          <a:prstGeom prst="rect">
-            <a:avLst/>
-          </a:prstGeom>
-          <a:noFill/>
-          <a:ln/>
-        </p:spPr>
-        <p:txBody>
-          <a:bodyPr wrap="square" rtlCol="0" anchor="ctr"/>
-          <a:lstStyle/>
-          <a:p>
-            <a:pPr algn="ctr" indent="0" marL="0">
-              <a:buNone/>
-            </a:pPr>
-            <a:r>
-              <a:rPr lang="en-US" sz="1200" i="1" dirty="0">
-                <a:solidFill>
-                  <a:srgbClr val="64748B"/>
-                </a:solidFill>
-                <a:latin typeface="Calibri" pitchFamily="34" charset="0"/>
-                <a:ea typeface="Calibri" pitchFamily="34" charset="-122"/>
-                <a:cs typeface="Calibri" pitchFamily="34" charset="-120"/>
-              </a:rPr>
-              <a:t>[Screenshot placeholder: Web UI with tool call card]</a:t>
-            </a:r>
-            <a:endParaRPr lang="en-US" sz="1200" dirty="0"/>
-          </a:p>
-        </p:txBody>
-      </p:sp>
-    </p:spTree>
-  </p:cSld>
-  <p:clrMapOvr>
-    <a:masterClrMapping/>
-  </p:clrMapOvr>
-</p:sld>
-</file>
-
-<file path=ppt/slides/slide9.xml><?xml version="1.0" encoding="utf-8"?>
-<p:sld xmlns:a="http://schemas.openxmlformats.org/drawingml/2006/main" xmlns:r="http://schemas.openxmlformats.org/officeDocument/2006/relationships" xmlns:p="http://schemas.openxmlformats.org/presentationml/2006/main">
-  <p:cSld name="Slide 9">
-    <p:bg>
-      <p:bgPr>
-        <a:solidFill>
-          <a:srgbClr val="FFFFFF"/>
-        </a:solidFill>
-      </p:bgPr>
-    </p:bg>
-    <p:spTree>
-      <p:nvGrpSpPr>
-        <p:cNvPr id="1" name=""/>
-        <p:cNvGrpSpPr/>
-        <p:nvPr/>
-      </p:nvGrpSpPr>
-      <p:grpSpPr>
-        <a:xfrm>
-          <a:off x="0" y="0"/>
-          <a:ext cx="0" cy="0"/>
-          <a:chOff x="0" y="0"/>
-          <a:chExt cx="0" cy="0"/>
-        </a:xfrm>
-      </p:grpSpPr>
-      <p:sp>
-        <p:nvSpPr>
-          <p:cNvPr id="2" name="Shape 0"/>
-          <p:cNvSpPr/>
-          <p:nvPr/>
-        </p:nvSpPr>
-        <p:spPr>
-          <a:xfrm>
-            <a:off x="0" y="0"/>
-            <a:ext cx="9144000" cy="54864"/>
-          </a:xfrm>
-          <a:prstGeom prst="rect">
-            <a:avLst/>
-          </a:prstGeom>
-          <a:solidFill>
-            <a:srgbClr val="3B82F6"/>
-          </a:solidFill>
-          <a:ln/>
-        </p:spPr>
-      </p:sp>
-      <p:sp>
-        <p:nvSpPr>
-          <p:cNvPr id="3" name="Text 1"/>
-          <p:cNvSpPr/>
-          <p:nvPr/>
-        </p:nvSpPr>
-        <p:spPr>
-          <a:xfrm>
-            <a:off x="548640" y="228600"/>
-            <a:ext cx="8046720" cy="548640"/>
-          </a:xfrm>
-          <a:prstGeom prst="rect">
-            <a:avLst/>
-          </a:prstGeom>
-          <a:noFill/>
-          <a:ln/>
-        </p:spPr>
-        <p:txBody>
-          <a:bodyPr wrap="square" lIns="0" tIns="0" rIns="0" bIns="0" rtlCol="0" anchor="ctr"/>
-          <a:lstStyle/>
-          <a:p>
-            <a:pPr indent="0" marL="0">
-              <a:buNone/>
-            </a:pPr>
-            <a:r>
-              <a:rPr lang="en-US" sz="2800" b="1" dirty="0">
-                <a:solidFill>
-                  <a:srgbClr val="1E2761"/>
-                </a:solidFill>
-                <a:latin typeface="Georgia" pitchFamily="34" charset="0"/>
-                <a:ea typeface="Georgia" pitchFamily="34" charset="-122"/>
-                <a:cs typeface="Georgia" pitchFamily="34" charset="-120"/>
-              </a:rPr>
-              <a:t>How to Build It</a:t>
-            </a:r>
-            <a:endParaRPr lang="en-US" sz="2800" dirty="0"/>
-          </a:p>
-        </p:txBody>
-      </p:sp>
-      <p:sp>
-        <p:nvSpPr>
-          <p:cNvPr id="4" name="Shape 2"/>
-          <p:cNvSpPr/>
-          <p:nvPr/>
-        </p:nvSpPr>
-        <p:spPr>
-          <a:xfrm>
-            <a:off x="548640" y="822960"/>
-            <a:ext cx="2286000" cy="0"/>
-          </a:xfrm>
-          <a:prstGeom prst="line">
-            <a:avLst/>
-          </a:prstGeom>
-          <a:noFill/>
-          <a:ln w="25400">
-            <a:solidFill>
-              <a:srgbClr val="3B82F6"/>
-            </a:solidFill>
-            <a:prstDash val="solid"/>
-          </a:ln>
-        </p:spPr>
-      </p:sp>
-      <p:sp>
-        <p:nvSpPr>
-          <p:cNvPr id="5" name="Text 3"/>
-          <p:cNvSpPr/>
-          <p:nvPr/>
-        </p:nvSpPr>
-        <p:spPr>
-          <a:xfrm>
-            <a:off x="8503920" y="4754880"/>
-            <a:ext cx="457200" cy="274320"/>
-          </a:xfrm>
-          <a:prstGeom prst="rect">
-            <a:avLst/>
-          </a:prstGeom>
-          <a:noFill/>
-          <a:ln/>
-        </p:spPr>
-        <p:txBody>
-          <a:bodyPr wrap="square" rtlCol="0" anchor="ctr"/>
-          <a:lstStyle/>
-          <a:p>
-            <a:pPr algn="r" indent="0" marL="0">
-              <a:buNone/>
-            </a:pPr>
-            <a:r>
-              <a:rPr lang="en-US" sz="1000" dirty="0">
-                <a:solidFill>
-                  <a:srgbClr val="64748B"/>
-                </a:solidFill>
-              </a:rPr>
-              <a:t>9</a:t>
-            </a:r>
-            <a:endParaRPr lang="en-US" sz="1000" dirty="0"/>
-          </a:p>
-        </p:txBody>
-      </p:sp>
-      <p:sp>
-        <p:nvSpPr>
-          <p:cNvPr id="6" name="Shape 4"/>
-          <p:cNvSpPr/>
-          <p:nvPr/>
-        </p:nvSpPr>
-        <p:spPr>
-          <a:xfrm>
-            <a:off x="640080" y="1188720"/>
-            <a:ext cx="502920" cy="502920"/>
-          </a:xfrm>
-          <a:prstGeom prst="ellipse">
-            <a:avLst/>
-          </a:prstGeom>
-          <a:solidFill>
-            <a:srgbClr val="3B82F6"/>
-          </a:solidFill>
-          <a:ln/>
-        </p:spPr>
-      </p:sp>
-      <p:sp>
-        <p:nvSpPr>
-          <p:cNvPr id="7" name="Text 5"/>
-          <p:cNvSpPr/>
-          <p:nvPr/>
-        </p:nvSpPr>
-        <p:spPr>
-          <a:xfrm>
-            <a:off x="640080" y="1188720"/>
-            <a:ext cx="502920" cy="502920"/>
-          </a:xfrm>
-          <a:prstGeom prst="rect">
-            <a:avLst/>
-          </a:prstGeom>
-          <a:noFill/>
-          <a:ln/>
-        </p:spPr>
-        <p:txBody>
-          <a:bodyPr wrap="square" lIns="0" tIns="0" rIns="0" bIns="0" rtlCol="0" anchor="ctr"/>
-          <a:lstStyle/>
-          <a:p>
-            <a:pPr algn="ctr" indent="0" marL="0">
-              <a:buNone/>
-            </a:pPr>
-            <a:r>
-              <a:rPr lang="en-US" sz="1800" b="1" dirty="0">
-                <a:solidFill>
-                  <a:srgbClr val="FFFFFF"/>
-                </a:solidFill>
-                <a:latin typeface="Georgia" pitchFamily="34" charset="0"/>
-                <a:ea typeface="Georgia" pitchFamily="34" charset="-122"/>
-                <a:cs typeface="Georgia" pitchFamily="34" charset="-120"/>
-              </a:rPr>
-              <a:t>1</a:t>
-            </a:r>
-            <a:endParaRPr lang="en-US" sz="1800" dirty="0"/>
-          </a:p>
-        </p:txBody>
-      </p:sp>
-      <p:sp>
-        <p:nvSpPr>
-          <p:cNvPr id="8" name="Text 6"/>
-          <p:cNvSpPr/>
-          <p:nvPr/>
-        </p:nvSpPr>
-        <p:spPr>
-          <a:xfrm>
-            <a:off x="1371600" y="1115568"/>
-            <a:ext cx="2743200" cy="320040"/>
-          </a:xfrm>
-          <a:prstGeom prst="rect">
-            <a:avLst/>
-          </a:prstGeom>
-          <a:noFill/>
-          <a:ln/>
-        </p:spPr>
-        <p:txBody>
-          <a:bodyPr wrap="square" lIns="0" tIns="0" rIns="0" bIns="0" rtlCol="0" anchor="ctr"/>
-          <a:lstStyle/>
-          <a:p>
-            <a:pPr indent="0" marL="0">
-              <a:buNone/>
-            </a:pPr>
-            <a:r>
-              <a:rPr lang="en-US" sz="1600" b="1" dirty="0">
-                <a:solidFill>
-                  <a:srgbClr val="1E2761"/>
-                </a:solidFill>
-                <a:latin typeface="Georgia" pitchFamily="34" charset="0"/>
-                <a:ea typeface="Georgia" pitchFamily="34" charset="-122"/>
-                <a:cs typeface="Georgia" pitchFamily="34" charset="-120"/>
-              </a:rPr>
-              <a:t>Foundation</a:t>
-            </a:r>
-            <a:endParaRPr lang="en-US" sz="1600" dirty="0"/>
-          </a:p>
-        </p:txBody>
-      </p:sp>
-      <p:sp>
-        <p:nvSpPr>
-          <p:cNvPr id="9" name="Text 7"/>
-          <p:cNvSpPr/>
-          <p:nvPr/>
-        </p:nvSpPr>
-        <p:spPr>
-          <a:xfrm>
-            <a:off x="1371600" y="1444752"/>
-            <a:ext cx="4114800" cy="320040"/>
-          </a:xfrm>
-          <a:prstGeom prst="rect">
-            <a:avLst/>
-          </a:prstGeom>
-          <a:noFill/>
-          <a:ln/>
-        </p:spPr>
-        <p:txBody>
-          <a:bodyPr wrap="square" lIns="0" tIns="0" rIns="0" bIns="0" rtlCol="0" anchor="ctr"/>
-          <a:lstStyle/>
-          <a:p>
-            <a:pPr indent="0" marL="0">
-              <a:buNone/>
-            </a:pPr>
-            <a:r>
-              <a:rPr lang="en-US" sz="1200" dirty="0">
-                <a:solidFill>
-                  <a:srgbClr val="64748B"/>
-                </a:solidFill>
-                <a:latin typeface="Calibri" pitchFamily="34" charset="0"/>
-                <a:ea typeface="Calibri" pitchFamily="34" charset="-122"/>
-                <a:cs typeface="Calibri" pitchFamily="34" charset="-120"/>
-              </a:rPr>
-              <a:t>Types, config, LLM client, tool registry, agent loop, CLI</a:t>
-            </a:r>
-            <a:endParaRPr lang="en-US" sz="1200" dirty="0"/>
-          </a:p>
-        </p:txBody>
-      </p:sp>
-      <p:sp>
-        <p:nvSpPr>
-          <p:cNvPr id="10" name="Shape 8"/>
-          <p:cNvSpPr/>
-          <p:nvPr/>
-        </p:nvSpPr>
-        <p:spPr>
-          <a:xfrm>
-            <a:off x="640080" y="2057400"/>
-            <a:ext cx="502920" cy="502920"/>
-          </a:xfrm>
-          <a:prstGeom prst="ellipse">
-            <a:avLst/>
-          </a:prstGeom>
-          <a:solidFill>
-            <a:srgbClr val="10B981"/>
-          </a:solidFill>
-          <a:ln/>
-        </p:spPr>
-      </p:sp>
-      <p:sp>
-        <p:nvSpPr>
-          <p:cNvPr id="11" name="Text 9"/>
-          <p:cNvSpPr/>
-          <p:nvPr/>
-        </p:nvSpPr>
-        <p:spPr>
-          <a:xfrm>
-            <a:off x="640080" y="2057400"/>
-            <a:ext cx="502920" cy="502920"/>
-          </a:xfrm>
-          <a:prstGeom prst="rect">
-            <a:avLst/>
-          </a:prstGeom>
-          <a:noFill/>
-          <a:ln/>
-        </p:spPr>
-        <p:txBody>
-          <a:bodyPr wrap="square" lIns="0" tIns="0" rIns="0" bIns="0" rtlCol="0" anchor="ctr"/>
-          <a:lstStyle/>
-          <a:p>
-            <a:pPr algn="ctr" indent="0" marL="0">
-              <a:buNone/>
-            </a:pPr>
-            <a:r>
-              <a:rPr lang="en-US" sz="1800" b="1" dirty="0">
-                <a:solidFill>
-                  <a:srgbClr val="FFFFFF"/>
-                </a:solidFill>
-                <a:latin typeface="Georgia" pitchFamily="34" charset="0"/>
-                <a:ea typeface="Georgia" pitchFamily="34" charset="-122"/>
-                <a:cs typeface="Georgia" pitchFamily="34" charset="-120"/>
-              </a:rPr>
-              <a:t>2</a:t>
-            </a:r>
-            <a:endParaRPr lang="en-US" sz="1800" dirty="0"/>
-          </a:p>
-        </p:txBody>
-      </p:sp>
-      <p:sp>
-        <p:nvSpPr>
-          <p:cNvPr id="12" name="Text 10"/>
-          <p:cNvSpPr/>
-          <p:nvPr/>
-        </p:nvSpPr>
-        <p:spPr>
-          <a:xfrm>
-            <a:off x="1371600" y="1984248"/>
-            <a:ext cx="2743200" cy="320040"/>
-          </a:xfrm>
-          <a:prstGeom prst="rect">
-            <a:avLst/>
-          </a:prstGeom>
-          <a:noFill/>
-          <a:ln/>
-        </p:spPr>
-        <p:txBody>
-          <a:bodyPr wrap="square" lIns="0" tIns="0" rIns="0" bIns="0" rtlCol="0" anchor="ctr"/>
-          <a:lstStyle/>
-          <a:p>
-            <a:pPr indent="0" marL="0">
-              <a:buNone/>
-            </a:pPr>
-            <a:r>
-              <a:rPr lang="en-US" sz="1600" b="1" dirty="0">
-                <a:solidFill>
-                  <a:srgbClr val="1E2761"/>
-                </a:solidFill>
-                <a:latin typeface="Georgia" pitchFamily="34" charset="0"/>
-                <a:ea typeface="Georgia" pitchFamily="34" charset="-122"/>
-                <a:cs typeface="Georgia" pitchFamily="34" charset="-120"/>
-              </a:rPr>
-              <a:t>Tool System</a:t>
-            </a:r>
-            <a:endParaRPr lang="en-US" sz="1600" dirty="0"/>
-          </a:p>
-        </p:txBody>
-      </p:sp>
-      <p:sp>
-        <p:nvSpPr>
-          <p:cNvPr id="13" name="Text 11"/>
-          <p:cNvSpPr/>
-          <p:nvPr/>
-        </p:nvSpPr>
-        <p:spPr>
-          <a:xfrm>
-            <a:off x="1371600" y="2313432"/>
-            <a:ext cx="4114800" cy="320040"/>
-          </a:xfrm>
-          <a:prstGeom prst="rect">
-            <a:avLst/>
-          </a:prstGeom>
-          <a:noFill/>
-          <a:ln/>
-        </p:spPr>
-        <p:txBody>
-          <a:bodyPr wrap="square" lIns="0" tIns="0" rIns="0" bIns="0" rtlCol="0" anchor="ctr"/>
-          <a:lstStyle/>
-          <a:p>
-            <a:pPr indent="0" marL="0">
-              <a:buNone/>
-            </a:pPr>
-            <a:r>
-              <a:rPr lang="en-US" sz="1200" dirty="0">
-                <a:solidFill>
-                  <a:srgbClr val="64748B"/>
-                </a:solidFill>
-                <a:latin typeface="Calibri" pitchFamily="34" charset="0"/>
-                <a:ea typeface="Calibri" pitchFamily="34" charset="-122"/>
-                <a:cs typeface="Calibri" pitchFamily="34" charset="-120"/>
-              </a:rPr>
-              <a:t>Base class + Shell, File Ops, Web Access, Memory tools</a:t>
-            </a:r>
-            <a:endParaRPr lang="en-US" sz="1200" dirty="0"/>
-          </a:p>
-        </p:txBody>
-      </p:sp>
-      <p:sp>
-        <p:nvSpPr>
-          <p:cNvPr id="14" name="Shape 12"/>
-          <p:cNvSpPr/>
-          <p:nvPr/>
-        </p:nvSpPr>
-        <p:spPr>
-          <a:xfrm>
-            <a:off x="640080" y="2926080"/>
-            <a:ext cx="502920" cy="502920"/>
-          </a:xfrm>
-          <a:prstGeom prst="ellipse">
-            <a:avLst/>
-          </a:prstGeom>
-          <a:solidFill>
-            <a:srgbClr val="8B5CF6"/>
-          </a:solidFill>
-          <a:ln/>
-        </p:spPr>
-      </p:sp>
-      <p:sp>
-        <p:nvSpPr>
-          <p:cNvPr id="15" name="Text 13"/>
-          <p:cNvSpPr/>
-          <p:nvPr/>
-        </p:nvSpPr>
-        <p:spPr>
-          <a:xfrm>
-            <a:off x="640080" y="2926080"/>
-            <a:ext cx="502920" cy="502920"/>
-          </a:xfrm>
-          <a:prstGeom prst="rect">
-            <a:avLst/>
-          </a:prstGeom>
-          <a:noFill/>
-          <a:ln/>
-        </p:spPr>
-        <p:txBody>
-          <a:bodyPr wrap="square" lIns="0" tIns="0" rIns="0" bIns="0" rtlCol="0" anchor="ctr"/>
-          <a:lstStyle/>
-          <a:p>
-            <a:pPr algn="ctr" indent="0" marL="0">
-              <a:buNone/>
-            </a:pPr>
-            <a:r>
-              <a:rPr lang="en-US" sz="1800" b="1" dirty="0">
-                <a:solidFill>
-                  <a:srgbClr val="FFFFFF"/>
-                </a:solidFill>
-                <a:latin typeface="Georgia" pitchFamily="34" charset="0"/>
-                <a:ea typeface="Georgia" pitchFamily="34" charset="-122"/>
-                <a:cs typeface="Georgia" pitchFamily="34" charset="-120"/>
-              </a:rPr>
-              <a:t>3</a:t>
-            </a:r>
-            <a:endParaRPr lang="en-US" sz="1800" dirty="0"/>
-          </a:p>
-        </p:txBody>
-      </p:sp>
-      <p:sp>
-        <p:nvSpPr>
-          <p:cNvPr id="16" name="Text 14"/>
-          <p:cNvSpPr/>
-          <p:nvPr/>
-        </p:nvSpPr>
-        <p:spPr>
-          <a:xfrm>
-            <a:off x="1371600" y="2852928"/>
-            <a:ext cx="2743200" cy="320040"/>
-          </a:xfrm>
-          <a:prstGeom prst="rect">
-            <a:avLst/>
-          </a:prstGeom>
-          <a:noFill/>
-          <a:ln/>
-        </p:spPr>
-        <p:txBody>
-          <a:bodyPr wrap="square" lIns="0" tIns="0" rIns="0" bIns="0" rtlCol="0" anchor="ctr"/>
-          <a:lstStyle/>
-          <a:p>
-            <a:pPr indent="0" marL="0">
-              <a:buNone/>
-            </a:pPr>
-            <a:r>
-              <a:rPr lang="en-US" sz="1600" b="1" dirty="0">
-                <a:solidFill>
-                  <a:srgbClr val="1E2761"/>
-                </a:solidFill>
-                <a:latin typeface="Georgia" pitchFamily="34" charset="0"/>
-                <a:ea typeface="Georgia" pitchFamily="34" charset="-122"/>
-                <a:cs typeface="Georgia" pitchFamily="34" charset="-120"/>
-              </a:rPr>
-              <a:t>Memory</a:t>
-            </a:r>
-            <a:endParaRPr lang="en-US" sz="1600" dirty="0"/>
-          </a:p>
-        </p:txBody>
-      </p:sp>
-      <p:sp>
-        <p:nvSpPr>
-          <p:cNvPr id="17" name="Text 15"/>
-          <p:cNvSpPr/>
-          <p:nvPr/>
-        </p:nvSpPr>
-        <p:spPr>
-          <a:xfrm>
-            <a:off x="1371600" y="3182112"/>
-            <a:ext cx="4114800" cy="320040"/>
-          </a:xfrm>
-          <a:prstGeom prst="rect">
-            <a:avLst/>
-          </a:prstGeom>
-          <a:noFill/>
-          <a:ln/>
-        </p:spPr>
-        <p:txBody>
-          <a:bodyPr wrap="square" lIns="0" tIns="0" rIns="0" bIns="0" rtlCol="0" anchor="ctr"/>
-          <a:lstStyle/>
-          <a:p>
-            <a:pPr indent="0" marL="0">
-              <a:buNone/>
-            </a:pPr>
-            <a:r>
-              <a:rPr lang="en-US" sz="1200" dirty="0">
-                <a:solidFill>
-                  <a:srgbClr val="64748B"/>
-                </a:solidFill>
-                <a:latin typeface="Calibri" pitchFamily="34" charset="0"/>
-                <a:ea typeface="Calibri" pitchFamily="34" charset="-122"/>
-                <a:cs typeface="Calibri" pitchFamily="34" charset="-120"/>
-              </a:rPr>
-              <a:t>Markdown files with YAML frontmatter, conversation logs</a:t>
-            </a:r>
-            <a:endParaRPr lang="en-US" sz="1200" dirty="0"/>
-          </a:p>
-        </p:txBody>
-      </p:sp>
-      <p:sp>
-        <p:nvSpPr>
-          <p:cNvPr id="18" name="Shape 16"/>
-          <p:cNvSpPr/>
-          <p:nvPr/>
-        </p:nvSpPr>
-        <p:spPr>
-          <a:xfrm>
-            <a:off x="640080" y="3794760"/>
-            <a:ext cx="502920" cy="502920"/>
-          </a:xfrm>
-          <a:prstGeom prst="ellipse">
-            <a:avLst/>
-          </a:prstGeom>
-          <a:solidFill>
-            <a:srgbClr val="F59E0B"/>
-          </a:solidFill>
-          <a:ln/>
-        </p:spPr>
-      </p:sp>
-      <p:sp>
-        <p:nvSpPr>
-          <p:cNvPr id="19" name="Text 17"/>
-          <p:cNvSpPr/>
-          <p:nvPr/>
-        </p:nvSpPr>
-        <p:spPr>
-          <a:xfrm>
-            <a:off x="640080" y="3794760"/>
-            <a:ext cx="502920" cy="502920"/>
-          </a:xfrm>
-          <a:prstGeom prst="rect">
-            <a:avLst/>
-          </a:prstGeom>
-          <a:noFill/>
-          <a:ln/>
-        </p:spPr>
-        <p:txBody>
-          <a:bodyPr wrap="square" lIns="0" tIns="0" rIns="0" bIns="0" rtlCol="0" anchor="ctr"/>
-          <a:lstStyle/>
-          <a:p>
-            <a:pPr algn="ctr" indent="0" marL="0">
-              <a:buNone/>
-            </a:pPr>
-            <a:r>
-              <a:rPr lang="en-US" sz="1800" b="1" dirty="0">
-                <a:solidFill>
-                  <a:srgbClr val="FFFFFF"/>
-                </a:solidFill>
-                <a:latin typeface="Georgia" pitchFamily="34" charset="0"/>
-                <a:ea typeface="Georgia" pitchFamily="34" charset="-122"/>
-                <a:cs typeface="Georgia" pitchFamily="34" charset="-120"/>
-              </a:rPr>
-              <a:t>4</a:t>
-            </a:r>
-            <a:endParaRPr lang="en-US" sz="1800" dirty="0"/>
-          </a:p>
-        </p:txBody>
-      </p:sp>
-      <p:sp>
-        <p:nvSpPr>
-          <p:cNvPr id="20" name="Text 18"/>
-          <p:cNvSpPr/>
-          <p:nvPr/>
-        </p:nvSpPr>
-        <p:spPr>
-          <a:xfrm>
-            <a:off x="1371600" y="3721608"/>
-            <a:ext cx="2743200" cy="320040"/>
-          </a:xfrm>
-          <a:prstGeom prst="rect">
-            <a:avLst/>
-          </a:prstGeom>
-          <a:noFill/>
-          <a:ln/>
-        </p:spPr>
-        <p:txBody>
-          <a:bodyPr wrap="square" lIns="0" tIns="0" rIns="0" bIns="0" rtlCol="0" anchor="ctr"/>
-          <a:lstStyle/>
-          <a:p>
-            <a:pPr indent="0" marL="0">
-              <a:buNone/>
-            </a:pPr>
-            <a:r>
-              <a:rPr lang="en-US" sz="1600" b="1" dirty="0">
-                <a:solidFill>
-                  <a:srgbClr val="1E2761"/>
-                </a:solidFill>
-                <a:latin typeface="Georgia" pitchFamily="34" charset="0"/>
-                <a:ea typeface="Georgia" pitchFamily="34" charset="-122"/>
-                <a:cs typeface="Georgia" pitchFamily="34" charset="-120"/>
-              </a:rPr>
-              <a:t>Web UI</a:t>
-            </a:r>
-            <a:endParaRPr lang="en-US" sz="1600" dirty="0"/>
-          </a:p>
-        </p:txBody>
-      </p:sp>
-      <p:sp>
-        <p:nvSpPr>
-          <p:cNvPr id="21" name="Text 19"/>
-          <p:cNvSpPr/>
-          <p:nvPr/>
-        </p:nvSpPr>
-        <p:spPr>
-          <a:xfrm>
-            <a:off x="1371600" y="4050792"/>
-            <a:ext cx="4114800" cy="320040"/>
-          </a:xfrm>
-          <a:prstGeom prst="rect">
-            <a:avLst/>
-          </a:prstGeom>
-          <a:noFill/>
-          <a:ln/>
-        </p:spPr>
-        <p:txBody>
-          <a:bodyPr wrap="square" lIns="0" tIns="0" rIns="0" bIns="0" rtlCol="0" anchor="ctr"/>
-          <a:lstStyle/>
-          <a:p>
-            <a:pPr indent="0" marL="0">
-              <a:buNone/>
-            </a:pPr>
-            <a:r>
-              <a:rPr lang="en-US" sz="1200" dirty="0">
-                <a:solidFill>
-                  <a:srgbClr val="64748B"/>
-                </a:solidFill>
-                <a:latin typeface="Calibri" pitchFamily="34" charset="0"/>
-                <a:ea typeface="Calibri" pitchFamily="34" charset="-122"/>
-                <a:cs typeface="Calibri" pitchFamily="34" charset="-120"/>
-              </a:rPr>
-              <a:t>Express + WebSocket server, React SPA with streaming</a:t>
-            </a:r>
-            <a:endParaRPr lang="en-US" sz="1200" dirty="0"/>
-          </a:p>
-        </p:txBody>
-      </p:sp>
-      <p:sp>
-        <p:nvSpPr>
-          <p:cNvPr id="22" name="Shape 20"/>
-          <p:cNvSpPr/>
-          <p:nvPr/>
-        </p:nvSpPr>
-        <p:spPr>
-          <a:xfrm>
-            <a:off x="5943600" y="1097280"/>
-            <a:ext cx="2743200" cy="3200400"/>
-          </a:xfrm>
-          <a:prstGeom prst="rect">
-            <a:avLst/>
-          </a:prstGeom>
-          <a:solidFill>
-            <a:srgbClr val="F0F4FF"/>
-          </a:solidFill>
-          <a:ln/>
-          <a:effectLst>
-            <a:outerShdw sx="100000" sy="100000" kx="0" ky="0" algn="bl" rotWithShape="0" blurRad="50800" dist="25400" dir="8100000">
-              <a:srgbClr val="000000">
-                <a:alpha val="12000"/>
-              </a:srgbClr>
-            </a:outerShdw>
-          </a:effectLst>
-        </p:spPr>
-      </p:sp>
-      <p:sp>
-        <p:nvSpPr>
-          <p:cNvPr id="23" name="Text 21"/>
-          <p:cNvSpPr/>
-          <p:nvPr/>
-        </p:nvSpPr>
-        <p:spPr>
-          <a:xfrm>
-            <a:off x="5943600" y="1234440"/>
-            <a:ext cx="2743200" cy="365760"/>
-          </a:xfrm>
-          <a:prstGeom prst="rect">
-            <a:avLst/>
-          </a:prstGeom>
-          <a:noFill/>
-          <a:ln/>
-        </p:spPr>
-        <p:txBody>
-          <a:bodyPr wrap="square" lIns="0" tIns="0" rIns="0" bIns="0" rtlCol="0" anchor="ctr"/>
-          <a:lstStyle/>
-          <a:p>
-            <a:pPr algn="ctr" indent="0" marL="0">
-              <a:buNone/>
-            </a:pPr>
-            <a:r>
-              <a:rPr lang="en-US" sz="1500" b="1" dirty="0">
-                <a:solidFill>
-                  <a:srgbClr val="1E2761"/>
-                </a:solidFill>
-                <a:latin typeface="Georgia" pitchFamily="34" charset="0"/>
-                <a:ea typeface="Georgia" pitchFamily="34" charset="-122"/>
-                <a:cs typeface="Georgia" pitchFamily="34" charset="-120"/>
-              </a:rPr>
-              <a:t>By the Numbers</a:t>
-            </a:r>
-            <a:endParaRPr lang="en-US" sz="1500" dirty="0"/>
-          </a:p>
-        </p:txBody>
-      </p:sp>
-      <p:sp>
-        <p:nvSpPr>
-          <p:cNvPr id="24" name="Text 22"/>
-          <p:cNvSpPr/>
-          <p:nvPr/>
-        </p:nvSpPr>
-        <p:spPr>
-          <a:xfrm>
-            <a:off x="5943600" y="1737360"/>
-            <a:ext cx="2743200" cy="411480"/>
-          </a:xfrm>
-          <a:prstGeom prst="rect">
-            <a:avLst/>
-          </a:prstGeom>
-          <a:noFill/>
-          <a:ln/>
-        </p:spPr>
-        <p:txBody>
-          <a:bodyPr wrap="square" lIns="0" tIns="0" rIns="0" bIns="0" rtlCol="0" anchor="ctr"/>
-          <a:lstStyle/>
-          <a:p>
-            <a:pPr algn="ctr" indent="0" marL="0">
-              <a:buNone/>
-            </a:pPr>
-            <a:r>
-              <a:rPr lang="en-US" sz="2800" b="1" dirty="0">
-                <a:solidFill>
-                  <a:srgbClr val="3B82F6"/>
-                </a:solidFill>
-                <a:latin typeface="Georgia" pitchFamily="34" charset="0"/>
-                <a:ea typeface="Georgia" pitchFamily="34" charset="-122"/>
-                <a:cs typeface="Georgia" pitchFamily="34" charset="-120"/>
-              </a:rPr>
-              <a:t>2,049</a:t>
-            </a:r>
-            <a:endParaRPr lang="en-US" sz="2800" dirty="0"/>
-          </a:p>
-        </p:txBody>
-      </p:sp>
-      <p:sp>
-        <p:nvSpPr>
-          <p:cNvPr id="25" name="Text 23"/>
-          <p:cNvSpPr/>
-          <p:nvPr/>
-        </p:nvSpPr>
-        <p:spPr>
-          <a:xfrm>
-            <a:off x="5943600" y="2148840"/>
-            <a:ext cx="2743200" cy="274320"/>
-          </a:xfrm>
-          <a:prstGeom prst="rect">
-            <a:avLst/>
-          </a:prstGeom>
-          <a:noFill/>
-          <a:ln/>
-        </p:spPr>
-        <p:txBody>
-          <a:bodyPr wrap="square" lIns="0" tIns="0" rIns="0" bIns="0" rtlCol="0" anchor="ctr"/>
-          <a:lstStyle/>
-          <a:p>
-            <a:pPr algn="ctr" indent="0" marL="0">
-              <a:buNone/>
-            </a:pPr>
-            <a:r>
-              <a:rPr lang="en-US" sz="1100" dirty="0">
-                <a:solidFill>
-                  <a:srgbClr val="64748B"/>
-                </a:solidFill>
-                <a:latin typeface="Calibri" pitchFamily="34" charset="0"/>
-                <a:ea typeface="Calibri" pitchFamily="34" charset="-122"/>
-                <a:cs typeface="Calibri" pitchFamily="34" charset="-120"/>
-              </a:rPr>
-              <a:t>Total lines of code</a:t>
-            </a:r>
-            <a:endParaRPr lang="en-US" sz="1100" dirty="0"/>
-          </a:p>
-        </p:txBody>
-      </p:sp>
-      <p:sp>
-        <p:nvSpPr>
-          <p:cNvPr id="26" name="Text 24"/>
-          <p:cNvSpPr/>
-          <p:nvPr/>
-        </p:nvSpPr>
-        <p:spPr>
-          <a:xfrm>
-            <a:off x="5943600" y="2606040"/>
-            <a:ext cx="2743200" cy="411480"/>
-          </a:xfrm>
-          <a:prstGeom prst="rect">
-            <a:avLst/>
-          </a:prstGeom>
-          <a:noFill/>
-          <a:ln/>
-        </p:spPr>
-        <p:txBody>
-          <a:bodyPr wrap="square" lIns="0" tIns="0" rIns="0" bIns="0" rtlCol="0" anchor="ctr"/>
-          <a:lstStyle/>
-          <a:p>
-            <a:pPr algn="ctr" indent="0" marL="0">
-              <a:buNone/>
-            </a:pPr>
-            <a:r>
-              <a:rPr lang="en-US" sz="2800" b="1" dirty="0">
-                <a:solidFill>
-                  <a:srgbClr val="3B82F6"/>
-                </a:solidFill>
-                <a:latin typeface="Georgia" pitchFamily="34" charset="0"/>
-                <a:ea typeface="Georgia" pitchFamily="34" charset="-122"/>
-                <a:cs typeface="Georgia" pitchFamily="34" charset="-120"/>
-              </a:rPr>
-              <a:t>6</a:t>
-            </a:r>
-            <a:endParaRPr lang="en-US" sz="2800" dirty="0"/>
-          </a:p>
-        </p:txBody>
-      </p:sp>
-      <p:sp>
-        <p:nvSpPr>
-          <p:cNvPr id="27" name="Text 25"/>
-          <p:cNvSpPr/>
-          <p:nvPr/>
-        </p:nvSpPr>
-        <p:spPr>
-          <a:xfrm>
-            <a:off x="5943600" y="3017520"/>
-            <a:ext cx="2743200" cy="274320"/>
-          </a:xfrm>
-          <a:prstGeom prst="rect">
-            <a:avLst/>
-          </a:prstGeom>
-          <a:noFill/>
-          <a:ln/>
-        </p:spPr>
-        <p:txBody>
-          <a:bodyPr wrap="square" lIns="0" tIns="0" rIns="0" bIns="0" rtlCol="0" anchor="ctr"/>
-          <a:lstStyle/>
-          <a:p>
-            <a:pPr algn="ctr" indent="0" marL="0">
-              <a:buNone/>
-            </a:pPr>
-            <a:r>
-              <a:rPr lang="en-US" sz="1100" dirty="0">
-                <a:solidFill>
-                  <a:srgbClr val="64748B"/>
-                </a:solidFill>
-                <a:latin typeface="Calibri" pitchFamily="34" charset="0"/>
-                <a:ea typeface="Calibri" pitchFamily="34" charset="-122"/>
-                <a:cs typeface="Calibri" pitchFamily="34" charset="-120"/>
-              </a:rPr>
-              <a:t>Production dependencies</a:t>
-            </a:r>
-            <a:endParaRPr lang="en-US" sz="1100" dirty="0"/>
-          </a:p>
-        </p:txBody>
-      </p:sp>
-      <p:sp>
-        <p:nvSpPr>
-          <p:cNvPr id="28" name="Text 26"/>
-          <p:cNvSpPr/>
-          <p:nvPr/>
-        </p:nvSpPr>
-        <p:spPr>
-          <a:xfrm>
-            <a:off x="5943600" y="3474720"/>
-            <a:ext cx="2743200" cy="411480"/>
-          </a:xfrm>
-          <a:prstGeom prst="rect">
-            <a:avLst/>
-          </a:prstGeom>
-          <a:noFill/>
-          <a:ln/>
-        </p:spPr>
-        <p:txBody>
-          <a:bodyPr wrap="square" lIns="0" tIns="0" rIns="0" bIns="0" rtlCol="0" anchor="ctr"/>
-          <a:lstStyle/>
-          <a:p>
-            <a:pPr algn="ctr" indent="0" marL="0">
-              <a:buNone/>
-            </a:pPr>
-            <a:r>
-              <a:rPr lang="en-US" sz="2800" b="1" dirty="0">
-                <a:solidFill>
-                  <a:srgbClr val="3B82F6"/>
-                </a:solidFill>
-                <a:latin typeface="Georgia" pitchFamily="34" charset="0"/>
-                <a:ea typeface="Georgia" pitchFamily="34" charset="-122"/>
-                <a:cs typeface="Georgia" pitchFamily="34" charset="-120"/>
-              </a:rPr>
-              <a:t>99.6%</a:t>
-            </a:r>
-            <a:endParaRPr lang="en-US" sz="2800" dirty="0"/>
-          </a:p>
-        </p:txBody>
-      </p:sp>
-      <p:sp>
-        <p:nvSpPr>
-          <p:cNvPr id="29" name="Text 27"/>
-          <p:cNvSpPr/>
-          <p:nvPr/>
-        </p:nvSpPr>
-        <p:spPr>
-          <a:xfrm>
-            <a:off x="5943600" y="3886200"/>
-            <a:ext cx="2743200" cy="274320"/>
-          </a:xfrm>
-          <a:prstGeom prst="rect">
-            <a:avLst/>
-          </a:prstGeom>
-          <a:noFill/>
-          <a:ln/>
-        </p:spPr>
-        <p:txBody>
-          <a:bodyPr wrap="square" lIns="0" tIns="0" rIns="0" bIns="0" rtlCol="0" anchor="ctr"/>
-          <a:lstStyle/>
-          <a:p>
-            <a:pPr algn="ctr" indent="0" marL="0">
-              <a:buNone/>
-            </a:pPr>
-            <a:r>
-              <a:rPr lang="en-US" sz="1100" dirty="0">
-                <a:solidFill>
-                  <a:srgbClr val="64748B"/>
-                </a:solidFill>
-                <a:latin typeface="Calibri" pitchFamily="34" charset="0"/>
-                <a:ea typeface="Calibri" pitchFamily="34" charset="-122"/>
-                <a:cs typeface="Calibri" pitchFamily="34" charset="-120"/>
-              </a:rPr>
-              <a:t>Reduction vs. OpenClaw</a:t>
-            </a:r>
-            <a:endParaRPr lang="en-US" sz="1100" dirty="0"/>
-          </a:p>
-        </p:txBody>
-      </p:sp>
     </p:spTree>
   </p:cSld>
   <p:clrMapOvr>
